--- a/attached_assets/Cisco_Webex_Case_Comp_By_Agentix_Consulting_1772856010304.pptx
+++ b/attached_assets/Cisco_Webex_Case_Comp_By_Agentix_Consulting_1772856010304.pptx
@@ -3891,7 +3891,7 @@
         <p:spPr>
           <a:xfrm>
             <a:off x="1097280" y="1645920"/>
-            <a:ext cx="5303520" cy="3657600"/>
+            <a:ext cx="5029200" cy="3474720"/>
           </a:xfrm>
           <a:prstGeom prst="rect">
             <a:avLst/>
@@ -3906,27 +3906,27 @@
           <a:p>
             <a:pPr>
               <a:spcAft>
-                <a:spcPts val="200"/>
-              </a:spcAft>
-            </a:pPr>
-            <a:r>
-              <a:rPr sz="1300" b="1">
+                <a:spcPts val="100"/>
+              </a:spcAft>
+            </a:pPr>
+            <a:r>
+              <a:rPr sz="1200" b="1">
                 <a:solidFill>
                   <a:srgbClr val="049FD9"/>
                 </a:solidFill>
                 <a:latin typeface="TT Commons Pro"/>
               </a:rPr>
-              <a:t>Solution 1: AI Orchestrator</a:t>
-            </a:r>
-          </a:p>
-          <a:p>
-            <a:pPr>
-              <a:spcAft>
-                <a:spcPts val="200"/>
-              </a:spcAft>
-            </a:pPr>
-            <a:r>
-              <a:rPr sz="300" b="0">
+              <a:t>Sol 1: AI Orchestrator</a:t>
+            </a:r>
+          </a:p>
+          <a:p>
+            <a:pPr>
+              <a:spcAft>
+                <a:spcPts val="100"/>
+              </a:spcAft>
+            </a:pPr>
+            <a:r>
+              <a:rPr sz="200" b="0">
                 <a:solidFill>
                   <a:srgbClr val="000000"/>
                 </a:solidFill>
@@ -3938,177 +3938,65 @@
           <a:p>
             <a:pPr>
               <a:spcAft>
-                <a:spcPts val="200"/>
-              </a:spcAft>
-            </a:pPr>
-            <a:r>
-              <a:rPr sz="1000" b="1">
-                <a:solidFill>
-                  <a:srgbClr val="204F69"/>
-                </a:solidFill>
-                <a:latin typeface="TT Commons Pro"/>
-              </a:rPr>
-              <a:t>Q3-Q4 2026</a:t>
-            </a:r>
-          </a:p>
-          <a:p>
-            <a:pPr>
-              <a:spcAft>
-                <a:spcPts val="200"/>
-              </a:spcAft>
-            </a:pPr>
-            <a:r>
-              <a:rPr sz="1000" b="0">
-                <a:solidFill>
-                  <a:srgbClr val="000000"/>
-                </a:solidFill>
-                <a:latin typeface="TT Commons Pro"/>
-              </a:rPr>
-              <a:t>NLP pipeline + task intent detection</a:t>
-            </a:r>
-          </a:p>
-          <a:p>
-            <a:pPr>
-              <a:spcAft>
-                <a:spcPts val="200"/>
-              </a:spcAft>
-            </a:pPr>
-            <a:r>
-              <a:rPr sz="200" b="0">
-                <a:solidFill>
-                  <a:srgbClr val="000000"/>
-                </a:solidFill>
-                <a:latin typeface="TT Commons Pro"/>
-              </a:rPr>
-              <a:t/>
-            </a:r>
-          </a:p>
-          <a:p>
-            <a:pPr>
-              <a:spcAft>
-                <a:spcPts val="200"/>
-              </a:spcAft>
-            </a:pPr>
-            <a:r>
-              <a:rPr sz="1000" b="1">
-                <a:solidFill>
-                  <a:srgbClr val="204F69"/>
-                </a:solidFill>
-                <a:latin typeface="TT Commons Pro"/>
-              </a:rPr>
-              <a:t>Q1-Q2 2027</a:t>
-            </a:r>
-          </a:p>
-          <a:p>
-            <a:pPr>
-              <a:spcAft>
-                <a:spcPts val="200"/>
-              </a:spcAft>
-            </a:pPr>
-            <a:r>
-              <a:rPr sz="1000" b="0">
-                <a:solidFill>
-                  <a:srgbClr val="000000"/>
-                </a:solidFill>
-                <a:latin typeface="TT Commons Pro"/>
-              </a:rPr>
-              <a:t>A2A integrations (Jira, Salesforce, SAP)</a:t>
-            </a:r>
-          </a:p>
-          <a:p>
-            <a:pPr>
-              <a:spcAft>
-                <a:spcPts val="200"/>
-              </a:spcAft>
-            </a:pPr>
-            <a:r>
-              <a:rPr sz="200" b="0">
-                <a:solidFill>
-                  <a:srgbClr val="000000"/>
-                </a:solidFill>
-                <a:latin typeface="TT Commons Pro"/>
-              </a:rPr>
-              <a:t/>
-            </a:r>
-          </a:p>
-          <a:p>
-            <a:pPr>
-              <a:spcAft>
-                <a:spcPts val="200"/>
-              </a:spcAft>
-            </a:pPr>
-            <a:r>
-              <a:rPr sz="1000" b="1">
-                <a:solidFill>
-                  <a:srgbClr val="204F69"/>
-                </a:solidFill>
-                <a:latin typeface="TT Commons Pro"/>
-              </a:rPr>
-              <a:t>Q3 2027</a:t>
-            </a:r>
-          </a:p>
-          <a:p>
-            <a:pPr>
-              <a:spcAft>
-                <a:spcPts val="200"/>
-              </a:spcAft>
-            </a:pPr>
-            <a:r>
-              <a:rPr sz="1000" b="0">
-                <a:solidFill>
-                  <a:srgbClr val="000000"/>
-                </a:solidFill>
-                <a:latin typeface="TT Commons Pro"/>
-              </a:rPr>
-              <a:t>PREPARE phase (auto-slides, predicted Q&amp;A)</a:t>
-            </a:r>
-          </a:p>
-          <a:p>
-            <a:pPr>
-              <a:spcAft>
-                <a:spcPts val="200"/>
-              </a:spcAft>
-            </a:pPr>
-            <a:r>
-              <a:rPr sz="200" b="0">
-                <a:solidFill>
-                  <a:srgbClr val="000000"/>
-                </a:solidFill>
-                <a:latin typeface="TT Commons Pro"/>
-              </a:rPr>
-              <a:t/>
-            </a:r>
-          </a:p>
-          <a:p>
-            <a:pPr>
-              <a:spcAft>
-                <a:spcPts val="200"/>
-              </a:spcAft>
-            </a:pPr>
-            <a:r>
-              <a:rPr sz="1000" b="1">
-                <a:solidFill>
-                  <a:srgbClr val="204F69"/>
-                </a:solidFill>
-                <a:latin typeface="TT Commons Pro"/>
-              </a:rPr>
-              <a:t>Q4 2027</a:t>
-            </a:r>
-          </a:p>
-          <a:p>
-            <a:pPr>
-              <a:spcAft>
-                <a:spcPts val="200"/>
-              </a:spcAft>
-            </a:pPr>
-            <a:r>
-              <a:rPr sz="1000" b="0">
-                <a:solidFill>
-                  <a:srgbClr val="000000"/>
-                </a:solidFill>
-                <a:latin typeface="TT Commons Pro"/>
-              </a:rPr>
-              <a:t>FOLLOW-UP phase + enterprise rollout</a:t>
+                <a:spcPts val="100"/>
+              </a:spcAft>
+            </a:pPr>
+            <a:r>
+              <a:rPr sz="900" b="0">
+                <a:solidFill>
+                  <a:srgbClr val="000000"/>
+                </a:solidFill>
+                <a:latin typeface="TT Commons Pro"/>
+              </a:rPr>
+              <a:t>Q3-Q4 2026: NLP + intent detection</a:t>
+            </a:r>
+          </a:p>
+          <a:p>
+            <a:pPr>
+              <a:spcAft>
+                <a:spcPts val="100"/>
+              </a:spcAft>
+            </a:pPr>
+            <a:r>
+              <a:rPr sz="900" b="0">
+                <a:solidFill>
+                  <a:srgbClr val="000000"/>
+                </a:solidFill>
+                <a:latin typeface="TT Commons Pro"/>
+              </a:rPr>
+              <a:t>Q1-Q2 2027: A2A integrations</a:t>
+            </a:r>
+          </a:p>
+          <a:p>
+            <a:pPr>
+              <a:spcAft>
+                <a:spcPts val="100"/>
+              </a:spcAft>
+            </a:pPr>
+            <a:r>
+              <a:rPr sz="900" b="0">
+                <a:solidFill>
+                  <a:srgbClr val="000000"/>
+                </a:solidFill>
+                <a:latin typeface="TT Commons Pro"/>
+              </a:rPr>
+              <a:t>Q3 2027: PREPARE phase</a:t>
+            </a:r>
+          </a:p>
+          <a:p>
+            <a:pPr>
+              <a:spcAft>
+                <a:spcPts val="100"/>
+              </a:spcAft>
+            </a:pPr>
+            <a:r>
+              <a:rPr sz="900" b="0">
+                <a:solidFill>
+                  <a:srgbClr val="000000"/>
+                </a:solidFill>
+                <a:latin typeface="TT Commons Pro"/>
+              </a:rPr>
+              <a:t>Q4 2027: Full enterprise rollout</a:t>
             </a:r>
           </a:p>
         </p:txBody>
@@ -4122,7 +4010,7 @@
         <p:spPr>
           <a:xfrm>
             <a:off x="6675120" y="1645920"/>
-            <a:ext cx="5303520" cy="3657600"/>
+            <a:ext cx="5029200" cy="3474720"/>
           </a:xfrm>
           <a:prstGeom prst="rect">
             <a:avLst/>
@@ -4137,27 +4025,27 @@
           <a:p>
             <a:pPr>
               <a:spcAft>
-                <a:spcPts val="200"/>
-              </a:spcAft>
-            </a:pPr>
-            <a:r>
-              <a:rPr sz="1300" b="1">
+                <a:spcPts val="100"/>
+              </a:spcAft>
+            </a:pPr>
+            <a:r>
+              <a:rPr sz="1200" b="1">
                 <a:solidFill>
                   <a:srgbClr val="049FD9"/>
                 </a:solidFill>
                 <a:latin typeface="TT Commons Pro"/>
               </a:rPr>
-              <a:t>Solution 2: VIBE</a:t>
-            </a:r>
-          </a:p>
-          <a:p>
-            <a:pPr>
-              <a:spcAft>
-                <a:spcPts val="200"/>
-              </a:spcAft>
-            </a:pPr>
-            <a:r>
-              <a:rPr sz="300" b="0">
+              <a:t>Sol 2: VIBE</a:t>
+            </a:r>
+          </a:p>
+          <a:p>
+            <a:pPr>
+              <a:spcAft>
+                <a:spcPts val="100"/>
+              </a:spcAft>
+            </a:pPr>
+            <a:r>
+              <a:rPr sz="200" b="0">
                 <a:solidFill>
                   <a:srgbClr val="000000"/>
                 </a:solidFill>
@@ -4169,177 +4057,65 @@
           <a:p>
             <a:pPr>
               <a:spcAft>
-                <a:spcPts val="200"/>
-              </a:spcAft>
-            </a:pPr>
-            <a:r>
-              <a:rPr sz="1000" b="1">
-                <a:solidFill>
-                  <a:srgbClr val="204F69"/>
-                </a:solidFill>
-                <a:latin typeface="TT Commons Pro"/>
-              </a:rPr>
-              <a:t>Q3 2026</a:t>
-            </a:r>
-          </a:p>
-          <a:p>
-            <a:pPr>
-              <a:spcAft>
-                <a:spcPts val="200"/>
-              </a:spcAft>
-            </a:pPr>
-            <a:r>
-              <a:rPr sz="1000" b="0">
-                <a:solidFill>
-                  <a:srgbClr val="000000"/>
-                </a:solidFill>
-                <a:latin typeface="TT Commons Pro"/>
-              </a:rPr>
-              <a:t>Voice Boost + DNN noise removal</a:t>
-            </a:r>
-          </a:p>
-          <a:p>
-            <a:pPr>
-              <a:spcAft>
-                <a:spcPts val="200"/>
-              </a:spcAft>
-            </a:pPr>
-            <a:r>
-              <a:rPr sz="200" b="0">
-                <a:solidFill>
-                  <a:srgbClr val="000000"/>
-                </a:solidFill>
-                <a:latin typeface="TT Commons Pro"/>
-              </a:rPr>
-              <a:t/>
-            </a:r>
-          </a:p>
-          <a:p>
-            <a:pPr>
-              <a:spcAft>
-                <a:spcPts val="200"/>
-              </a:spcAft>
-            </a:pPr>
-            <a:r>
-              <a:rPr sz="1000" b="1">
-                <a:solidFill>
-                  <a:srgbClr val="204F69"/>
-                </a:solidFill>
-                <a:latin typeface="TT Commons Pro"/>
-              </a:rPr>
-              <a:t>Q4 2026</a:t>
-            </a:r>
-          </a:p>
-          <a:p>
-            <a:pPr>
-              <a:spcAft>
-                <a:spcPts val="200"/>
-              </a:spcAft>
-            </a:pPr>
-            <a:r>
-              <a:rPr sz="1000" b="0">
-                <a:solidFill>
-                  <a:srgbClr val="000000"/>
-                </a:solidFill>
-                <a:latin typeface="TT Commons Pro"/>
-              </a:rPr>
-              <a:t>ASR + Live Translation (top 20 languages)</a:t>
-            </a:r>
-          </a:p>
-          <a:p>
-            <a:pPr>
-              <a:spcAft>
-                <a:spcPts val="200"/>
-              </a:spcAft>
-            </a:pPr>
-            <a:r>
-              <a:rPr sz="200" b="0">
-                <a:solidFill>
-                  <a:srgbClr val="000000"/>
-                </a:solidFill>
-                <a:latin typeface="TT Commons Pro"/>
-              </a:rPr>
-              <a:t/>
-            </a:r>
-          </a:p>
-          <a:p>
-            <a:pPr>
-              <a:spcAft>
-                <a:spcPts val="200"/>
-              </a:spcAft>
-            </a:pPr>
-            <a:r>
-              <a:rPr sz="1000" b="1">
-                <a:solidFill>
-                  <a:srgbClr val="204F69"/>
-                </a:solidFill>
-                <a:latin typeface="TT Commons Pro"/>
-              </a:rPr>
-              <a:t>Q1 2027</a:t>
-            </a:r>
-          </a:p>
-          <a:p>
-            <a:pPr>
-              <a:spcAft>
-                <a:spcPts val="200"/>
-              </a:spcAft>
-            </a:pPr>
-            <a:r>
-              <a:rPr sz="1000" b="0">
-                <a:solidFill>
-                  <a:srgbClr val="000000"/>
-                </a:solidFill>
-                <a:latin typeface="TT Commons Pro"/>
-              </a:rPr>
-              <a:t>Type-to-Speak + Simple Mode</a:t>
-            </a:r>
-          </a:p>
-          <a:p>
-            <a:pPr>
-              <a:spcAft>
-                <a:spcPts val="200"/>
-              </a:spcAft>
-            </a:pPr>
-            <a:r>
-              <a:rPr sz="200" b="0">
-                <a:solidFill>
-                  <a:srgbClr val="000000"/>
-                </a:solidFill>
-                <a:latin typeface="TT Commons Pro"/>
-              </a:rPr>
-              <a:t/>
-            </a:r>
-          </a:p>
-          <a:p>
-            <a:pPr>
-              <a:spcAft>
-                <a:spcPts val="200"/>
-              </a:spcAft>
-            </a:pPr>
-            <a:r>
-              <a:rPr sz="1000" b="1">
-                <a:solidFill>
-                  <a:srgbClr val="204F69"/>
-                </a:solidFill>
-                <a:latin typeface="TT Commons Pro"/>
-              </a:rPr>
-              <a:t>Q2 2027</a:t>
-            </a:r>
-          </a:p>
-          <a:p>
-            <a:pPr>
-              <a:spcAft>
-                <a:spcPts val="200"/>
-              </a:spcAft>
-            </a:pPr>
-            <a:r>
-              <a:rPr sz="1000" b="0">
-                <a:solidFill>
-                  <a:srgbClr val="000000"/>
-                </a:solidFill>
-                <a:latin typeface="TT Commons Pro"/>
-              </a:rPr>
-              <a:t>Q&amp;A Close-Loop + full 100+ languages</a:t>
+                <a:spcPts val="100"/>
+              </a:spcAft>
+            </a:pPr>
+            <a:r>
+              <a:rPr sz="900" b="0">
+                <a:solidFill>
+                  <a:srgbClr val="000000"/>
+                </a:solidFill>
+                <a:latin typeface="TT Commons Pro"/>
+              </a:rPr>
+              <a:t>Q3 2026: Voice Boost + noise removal</a:t>
+            </a:r>
+          </a:p>
+          <a:p>
+            <a:pPr>
+              <a:spcAft>
+                <a:spcPts val="100"/>
+              </a:spcAft>
+            </a:pPr>
+            <a:r>
+              <a:rPr sz="900" b="0">
+                <a:solidFill>
+                  <a:srgbClr val="000000"/>
+                </a:solidFill>
+                <a:latin typeface="TT Commons Pro"/>
+              </a:rPr>
+              <a:t>Q4 2026: ASR + Translation (20 langs)</a:t>
+            </a:r>
+          </a:p>
+          <a:p>
+            <a:pPr>
+              <a:spcAft>
+                <a:spcPts val="100"/>
+              </a:spcAft>
+            </a:pPr>
+            <a:r>
+              <a:rPr sz="900" b="0">
+                <a:solidFill>
+                  <a:srgbClr val="000000"/>
+                </a:solidFill>
+                <a:latin typeface="TT Commons Pro"/>
+              </a:rPr>
+              <a:t>Q1 2027: Type-to-Speak + Simple Mode</a:t>
+            </a:r>
+          </a:p>
+          <a:p>
+            <a:pPr>
+              <a:spcAft>
+                <a:spcPts val="100"/>
+              </a:spcAft>
+            </a:pPr>
+            <a:r>
+              <a:rPr sz="900" b="0">
+                <a:solidFill>
+                  <a:srgbClr val="000000"/>
+                </a:solidFill>
+                <a:latin typeface="TT Commons Pro"/>
+              </a:rPr>
+              <a:t>Q2 2027: Full 100+ languages</a:t>
             </a:r>
           </a:p>
         </p:txBody>
@@ -4353,7 +4129,7 @@
         <p:spPr>
           <a:xfrm>
             <a:off x="12252960" y="1645920"/>
-            <a:ext cx="5303520" cy="3657600"/>
+            <a:ext cx="5029200" cy="3474720"/>
           </a:xfrm>
           <a:prstGeom prst="rect">
             <a:avLst/>
@@ -4368,27 +4144,27 @@
           <a:p>
             <a:pPr>
               <a:spcAft>
-                <a:spcPts val="200"/>
-              </a:spcAft>
-            </a:pPr>
-            <a:r>
-              <a:rPr sz="1300" b="1">
+                <a:spcPts val="100"/>
+              </a:spcAft>
+            </a:pPr>
+            <a:r>
+              <a:rPr sz="1200" b="1">
                 <a:solidFill>
                   <a:srgbClr val="049FD9"/>
                 </a:solidFill>
                 <a:latin typeface="TT Commons Pro"/>
               </a:rPr>
-              <a:t>Solution 3: Marketplace</a:t>
-            </a:r>
-          </a:p>
-          <a:p>
-            <a:pPr>
-              <a:spcAft>
-                <a:spcPts val="200"/>
-              </a:spcAft>
-            </a:pPr>
-            <a:r>
-              <a:rPr sz="300" b="0">
+              <a:t>Sol 3: Marketplace</a:t>
+            </a:r>
+          </a:p>
+          <a:p>
+            <a:pPr>
+              <a:spcAft>
+                <a:spcPts val="100"/>
+              </a:spcAft>
+            </a:pPr>
+            <a:r>
+              <a:rPr sz="200" b="0">
                 <a:solidFill>
                   <a:srgbClr val="000000"/>
                 </a:solidFill>
@@ -4400,177 +4176,65 @@
           <a:p>
             <a:pPr>
               <a:spcAft>
-                <a:spcPts val="200"/>
-              </a:spcAft>
-            </a:pPr>
-            <a:r>
-              <a:rPr sz="1000" b="1">
-                <a:solidFill>
-                  <a:srgbClr val="204F69"/>
-                </a:solidFill>
-                <a:latin typeface="TT Commons Pro"/>
-              </a:rPr>
-              <a:t>Q3-Q4 2026</a:t>
-            </a:r>
-          </a:p>
-          <a:p>
-            <a:pPr>
-              <a:spcAft>
-                <a:spcPts val="200"/>
-              </a:spcAft>
-            </a:pPr>
-            <a:r>
-              <a:rPr sz="1000" b="0">
-                <a:solidFill>
-                  <a:srgbClr val="000000"/>
-                </a:solidFill>
-                <a:latin typeface="TT Commons Pro"/>
-              </a:rPr>
-              <a:t>SDK development + certification pipeline</a:t>
-            </a:r>
-          </a:p>
-          <a:p>
-            <a:pPr>
-              <a:spcAft>
-                <a:spcPts val="200"/>
-              </a:spcAft>
-            </a:pPr>
-            <a:r>
-              <a:rPr sz="200" b="0">
-                <a:solidFill>
-                  <a:srgbClr val="000000"/>
-                </a:solidFill>
-                <a:latin typeface="TT Commons Pro"/>
-              </a:rPr>
-              <a:t/>
-            </a:r>
-          </a:p>
-          <a:p>
-            <a:pPr>
-              <a:spcAft>
-                <a:spcPts val="200"/>
-              </a:spcAft>
-            </a:pPr>
-            <a:r>
-              <a:rPr sz="1000" b="1">
-                <a:solidFill>
-                  <a:srgbClr val="204F69"/>
-                </a:solidFill>
-                <a:latin typeface="TT Commons Pro"/>
-              </a:rPr>
-              <a:t>Q1 2027</a:t>
-            </a:r>
-          </a:p>
-          <a:p>
-            <a:pPr>
-              <a:spcAft>
-                <a:spcPts val="200"/>
-              </a:spcAft>
-            </a:pPr>
-            <a:r>
-              <a:rPr sz="1000" b="0">
-                <a:solidFill>
-                  <a:srgbClr val="000000"/>
-                </a:solidFill>
-                <a:latin typeface="TT Commons Pro"/>
-              </a:rPr>
-              <a:t>Beta with 20-30 first-party agents</a:t>
-            </a:r>
-          </a:p>
-          <a:p>
-            <a:pPr>
-              <a:spcAft>
-                <a:spcPts val="200"/>
-              </a:spcAft>
-            </a:pPr>
-            <a:r>
-              <a:rPr sz="200" b="0">
-                <a:solidFill>
-                  <a:srgbClr val="000000"/>
-                </a:solidFill>
-                <a:latin typeface="TT Commons Pro"/>
-              </a:rPr>
-              <a:t/>
-            </a:r>
-          </a:p>
-          <a:p>
-            <a:pPr>
-              <a:spcAft>
-                <a:spcPts val="200"/>
-              </a:spcAft>
-            </a:pPr>
-            <a:r>
-              <a:rPr sz="1000" b="1">
-                <a:solidFill>
-                  <a:srgbClr val="204F69"/>
-                </a:solidFill>
-                <a:latin typeface="TT Commons Pro"/>
-              </a:rPr>
-              <a:t>Q2-Q3 2027</a:t>
-            </a:r>
-          </a:p>
-          <a:p>
-            <a:pPr>
-              <a:spcAft>
-                <a:spcPts val="200"/>
-              </a:spcAft>
-            </a:pPr>
-            <a:r>
-              <a:rPr sz="1000" b="0">
-                <a:solidFill>
-                  <a:srgbClr val="000000"/>
-                </a:solidFill>
-                <a:latin typeface="TT Commons Pro"/>
-              </a:rPr>
-              <a:t>Public launch + developer grants program</a:t>
-            </a:r>
-          </a:p>
-          <a:p>
-            <a:pPr>
-              <a:spcAft>
-                <a:spcPts val="200"/>
-              </a:spcAft>
-            </a:pPr>
-            <a:r>
-              <a:rPr sz="200" b="0">
-                <a:solidFill>
-                  <a:srgbClr val="000000"/>
-                </a:solidFill>
-                <a:latin typeface="TT Commons Pro"/>
-              </a:rPr>
-              <a:t/>
-            </a:r>
-          </a:p>
-          <a:p>
-            <a:pPr>
-              <a:spcAft>
-                <a:spcPts val="200"/>
-              </a:spcAft>
-            </a:pPr>
-            <a:r>
-              <a:rPr sz="1000" b="1">
-                <a:solidFill>
-                  <a:srgbClr val="204F69"/>
-                </a:solidFill>
-                <a:latin typeface="TT Commons Pro"/>
-              </a:rPr>
-              <a:t>Q4 2027-2028</a:t>
-            </a:r>
-          </a:p>
-          <a:p>
-            <a:pPr>
-              <a:spcAft>
-                <a:spcPts val="200"/>
-              </a:spcAft>
-            </a:pPr>
-            <a:r>
-              <a:rPr sz="1000" b="0">
-                <a:solidFill>
-                  <a:srgbClr val="000000"/>
-                </a:solidFill>
-                <a:latin typeface="TT Commons Pro"/>
-              </a:rPr>
-              <a:t>Scale to 500+ agents, revenue model live</a:t>
+                <a:spcPts val="100"/>
+              </a:spcAft>
+            </a:pPr>
+            <a:r>
+              <a:rPr sz="900" b="0">
+                <a:solidFill>
+                  <a:srgbClr val="000000"/>
+                </a:solidFill>
+                <a:latin typeface="TT Commons Pro"/>
+              </a:rPr>
+              <a:t>Q3-Q4 2026: SDK + certification pipeline</a:t>
+            </a:r>
+          </a:p>
+          <a:p>
+            <a:pPr>
+              <a:spcAft>
+                <a:spcPts val="100"/>
+              </a:spcAft>
+            </a:pPr>
+            <a:r>
+              <a:rPr sz="900" b="0">
+                <a:solidFill>
+                  <a:srgbClr val="000000"/>
+                </a:solidFill>
+                <a:latin typeface="TT Commons Pro"/>
+              </a:rPr>
+              <a:t>Q1 2027: Beta with 30 first-party agents</a:t>
+            </a:r>
+          </a:p>
+          <a:p>
+            <a:pPr>
+              <a:spcAft>
+                <a:spcPts val="100"/>
+              </a:spcAft>
+            </a:pPr>
+            <a:r>
+              <a:rPr sz="900" b="0">
+                <a:solidFill>
+                  <a:srgbClr val="000000"/>
+                </a:solidFill>
+                <a:latin typeface="TT Commons Pro"/>
+              </a:rPr>
+              <a:t>Q2-Q3 2027: Public launch + grants</a:t>
+            </a:r>
+          </a:p>
+          <a:p>
+            <a:pPr>
+              <a:spcAft>
+                <a:spcPts val="100"/>
+              </a:spcAft>
+            </a:pPr>
+            <a:r>
+              <a:rPr sz="900" b="0">
+                <a:solidFill>
+                  <a:srgbClr val="000000"/>
+                </a:solidFill>
+                <a:latin typeface="TT Commons Pro"/>
+              </a:rPr>
+              <a:t>Q4 2027-28: Scale to 500+ agents</a:t>
             </a:r>
           </a:p>
         </p:txBody>
@@ -4583,7 +4247,7 @@
         </p:nvSpPr>
         <p:spPr>
           <a:xfrm>
-            <a:off x="1371600" y="5623560"/>
+            <a:off x="1371600" y="5440680"/>
             <a:ext cx="1554480" cy="274320"/>
           </a:xfrm>
           <a:prstGeom prst="rect">
@@ -4599,11 +4263,11 @@
           <a:p>
             <a:pPr>
               <a:spcAft>
-                <a:spcPts val="200"/>
-              </a:spcAft>
-            </a:pPr>
-            <a:r>
-              <a:rPr sz="800" b="1">
+                <a:spcPts val="100"/>
+              </a:spcAft>
+            </a:pPr>
+            <a:r>
+              <a:rPr sz="700" b="1">
                 <a:solidFill>
                   <a:srgbClr val="204F69"/>
                 </a:solidFill>
@@ -4622,7 +4286,7 @@
         </p:nvSpPr>
         <p:spPr>
           <a:xfrm>
-            <a:off x="2926080" y="5623560"/>
+            <a:off x="2926080" y="5440680"/>
             <a:ext cx="1554480" cy="274320"/>
           </a:xfrm>
           <a:prstGeom prst="rect">
@@ -4638,11 +4302,11 @@
           <a:p>
             <a:pPr>
               <a:spcAft>
-                <a:spcPts val="200"/>
-              </a:spcAft>
-            </a:pPr>
-            <a:r>
-              <a:rPr sz="800" b="1">
+                <a:spcPts val="100"/>
+              </a:spcAft>
+            </a:pPr>
+            <a:r>
+              <a:rPr sz="700" b="1">
                 <a:solidFill>
                   <a:srgbClr val="204F69"/>
                 </a:solidFill>
@@ -4661,7 +4325,7 @@
         </p:nvSpPr>
         <p:spPr>
           <a:xfrm>
-            <a:off x="4480560" y="5623560"/>
+            <a:off x="4480560" y="5440680"/>
             <a:ext cx="1554480" cy="274320"/>
           </a:xfrm>
           <a:prstGeom prst="rect">
@@ -4677,11 +4341,11 @@
           <a:p>
             <a:pPr>
               <a:spcAft>
-                <a:spcPts val="200"/>
-              </a:spcAft>
-            </a:pPr>
-            <a:r>
-              <a:rPr sz="800" b="1">
+                <a:spcPts val="100"/>
+              </a:spcAft>
+            </a:pPr>
+            <a:r>
+              <a:rPr sz="700" b="1">
                 <a:solidFill>
                   <a:srgbClr val="204F69"/>
                 </a:solidFill>
@@ -4700,7 +4364,7 @@
         </p:nvSpPr>
         <p:spPr>
           <a:xfrm>
-            <a:off x="6035040" y="5623560"/>
+            <a:off x="6035040" y="5440680"/>
             <a:ext cx="1554480" cy="274320"/>
           </a:xfrm>
           <a:prstGeom prst="rect">
@@ -4716,11 +4380,11 @@
           <a:p>
             <a:pPr>
               <a:spcAft>
-                <a:spcPts val="200"/>
-              </a:spcAft>
-            </a:pPr>
-            <a:r>
-              <a:rPr sz="800" b="1">
+                <a:spcPts val="100"/>
+              </a:spcAft>
+            </a:pPr>
+            <a:r>
+              <a:rPr sz="700" b="1">
                 <a:solidFill>
                   <a:srgbClr val="204F69"/>
                 </a:solidFill>
@@ -4739,7 +4403,7 @@
         </p:nvSpPr>
         <p:spPr>
           <a:xfrm>
-            <a:off x="7589520" y="5623560"/>
+            <a:off x="7589520" y="5440680"/>
             <a:ext cx="1554480" cy="274320"/>
           </a:xfrm>
           <a:prstGeom prst="rect">
@@ -4755,11 +4419,11 @@
           <a:p>
             <a:pPr>
               <a:spcAft>
-                <a:spcPts val="200"/>
-              </a:spcAft>
-            </a:pPr>
-            <a:r>
-              <a:rPr sz="800" b="1">
+                <a:spcPts val="100"/>
+              </a:spcAft>
+            </a:pPr>
+            <a:r>
+              <a:rPr sz="700" b="1">
                 <a:solidFill>
                   <a:srgbClr val="204F69"/>
                 </a:solidFill>
@@ -4778,7 +4442,7 @@
         </p:nvSpPr>
         <p:spPr>
           <a:xfrm>
-            <a:off x="9144000" y="5623560"/>
+            <a:off x="9144000" y="5440680"/>
             <a:ext cx="1554480" cy="274320"/>
           </a:xfrm>
           <a:prstGeom prst="rect">
@@ -4794,11 +4458,11 @@
           <a:p>
             <a:pPr>
               <a:spcAft>
-                <a:spcPts val="200"/>
-              </a:spcAft>
-            </a:pPr>
-            <a:r>
-              <a:rPr sz="800" b="1">
+                <a:spcPts val="100"/>
+              </a:spcAft>
+            </a:pPr>
+            <a:r>
+              <a:rPr sz="700" b="1">
                 <a:solidFill>
                   <a:srgbClr val="204F69"/>
                 </a:solidFill>
@@ -4817,7 +4481,7 @@
         </p:nvSpPr>
         <p:spPr>
           <a:xfrm>
-            <a:off x="10698480" y="5623560"/>
+            <a:off x="10698480" y="5440680"/>
             <a:ext cx="1554480" cy="274320"/>
           </a:xfrm>
           <a:prstGeom prst="rect">
@@ -4833,11 +4497,11 @@
           <a:p>
             <a:pPr>
               <a:spcAft>
-                <a:spcPts val="200"/>
-              </a:spcAft>
-            </a:pPr>
-            <a:r>
-              <a:rPr sz="800" b="1">
+                <a:spcPts val="100"/>
+              </a:spcAft>
+            </a:pPr>
+            <a:r>
+              <a:rPr sz="700" b="1">
                 <a:solidFill>
                   <a:srgbClr val="204F69"/>
                 </a:solidFill>
@@ -4856,7 +4520,7 @@
         </p:nvSpPr>
         <p:spPr>
           <a:xfrm>
-            <a:off x="12252960" y="5623560"/>
+            <a:off x="12252960" y="5440680"/>
             <a:ext cx="1554480" cy="274320"/>
           </a:xfrm>
           <a:prstGeom prst="rect">
@@ -4872,11 +4536,11 @@
           <a:p>
             <a:pPr>
               <a:spcAft>
-                <a:spcPts val="200"/>
-              </a:spcAft>
-            </a:pPr>
-            <a:r>
-              <a:rPr sz="800" b="1">
+                <a:spcPts val="100"/>
+              </a:spcAft>
+            </a:pPr>
+            <a:r>
+              <a:rPr sz="700" b="1">
                 <a:solidFill>
                   <a:srgbClr val="204F69"/>
                 </a:solidFill>
@@ -4895,7 +4559,7 @@
         </p:nvSpPr>
         <p:spPr>
           <a:xfrm>
-            <a:off x="13807440" y="5623560"/>
+            <a:off x="13807440" y="5440680"/>
             <a:ext cx="1554480" cy="274320"/>
           </a:xfrm>
           <a:prstGeom prst="rect">
@@ -4911,11 +4575,11 @@
           <a:p>
             <a:pPr>
               <a:spcAft>
-                <a:spcPts val="200"/>
-              </a:spcAft>
-            </a:pPr>
-            <a:r>
-              <a:rPr sz="800" b="1">
+                <a:spcPts val="100"/>
+              </a:spcAft>
+            </a:pPr>
+            <a:r>
+              <a:rPr sz="700" b="1">
                 <a:solidFill>
                   <a:srgbClr val="204F69"/>
                 </a:solidFill>
@@ -4934,7 +4598,7 @@
         </p:nvSpPr>
         <p:spPr>
           <a:xfrm>
-            <a:off x="15361919" y="5623560"/>
+            <a:off x="15361919" y="5440680"/>
             <a:ext cx="1554480" cy="274320"/>
           </a:xfrm>
           <a:prstGeom prst="rect">
@@ -4950,11 +4614,11 @@
           <a:p>
             <a:pPr>
               <a:spcAft>
-                <a:spcPts val="200"/>
-              </a:spcAft>
-            </a:pPr>
-            <a:r>
-              <a:rPr sz="800" b="1">
+                <a:spcPts val="100"/>
+              </a:spcAft>
+            </a:pPr>
+            <a:r>
+              <a:rPr sz="700" b="1">
                 <a:solidFill>
                   <a:srgbClr val="204F69"/>
                 </a:solidFill>
@@ -4973,8 +4637,8 @@
         </p:nvSpPr>
         <p:spPr>
           <a:xfrm>
-            <a:off x="1371600" y="5943600"/>
-            <a:ext cx="9326880" cy="365760"/>
+            <a:off x="1371600" y="5760720"/>
+            <a:ext cx="9326880" cy="347472"/>
           </a:xfrm>
           <a:prstGeom prst="rect">
             <a:avLst/>
@@ -5004,15 +4668,14 @@
           <a:bodyPr rtlCol="0" anchor="ctr"/>
           <a:lstStyle/>
           <a:p>
-            <a:pPr algn="ctr">
-              <a:defRPr sz="900" b="1">
+            <a:pPr algn="ctr"/>
+            <a:r>
+              <a:rPr sz="800" b="1">
                 <a:solidFill>
                   <a:srgbClr val="FFFFFF"/>
                 </a:solidFill>
                 <a:latin typeface="TT Commons Pro"/>
-              </a:defRPr>
-            </a:pPr>
-            <a:r>
+              </a:rPr>
               <a:t>Solution 1: AI Orchestrator</a:t>
             </a:r>
           </a:p>
@@ -5026,8 +4689,8 @@
         </p:nvSpPr>
         <p:spPr>
           <a:xfrm>
-            <a:off x="1371600" y="6446520"/>
-            <a:ext cx="6217920" cy="365760"/>
+            <a:off x="1371600" y="6217920"/>
+            <a:ext cx="6217920" cy="347472"/>
           </a:xfrm>
           <a:prstGeom prst="rect">
             <a:avLst/>
@@ -5057,15 +4720,14 @@
           <a:bodyPr rtlCol="0" anchor="ctr"/>
           <a:lstStyle/>
           <a:p>
-            <a:pPr algn="ctr">
-              <a:defRPr sz="900" b="1">
+            <a:pPr algn="ctr"/>
+            <a:r>
+              <a:rPr sz="800" b="1">
                 <a:solidFill>
                   <a:srgbClr val="FFFFFF"/>
                 </a:solidFill>
                 <a:latin typeface="TT Commons Pro"/>
-              </a:defRPr>
-            </a:pPr>
-            <a:r>
+              </a:rPr>
               <a:t>Solution 2: VIBE</a:t>
             </a:r>
           </a:p>
@@ -5079,8 +4741,8 @@
         </p:nvSpPr>
         <p:spPr>
           <a:xfrm>
-            <a:off x="1371600" y="6949440"/>
-            <a:ext cx="15544800" cy="365760"/>
+            <a:off x="1371600" y="6675120"/>
+            <a:ext cx="15544800" cy="347472"/>
           </a:xfrm>
           <a:prstGeom prst="rect">
             <a:avLst/>
@@ -5110,15 +4772,14 @@
           <a:bodyPr rtlCol="0" anchor="ctr"/>
           <a:lstStyle/>
           <a:p>
-            <a:pPr algn="ctr">
-              <a:defRPr sz="900" b="1">
+            <a:pPr algn="ctr"/>
+            <a:r>
+              <a:rPr sz="800" b="1">
                 <a:solidFill>
                   <a:srgbClr val="FFFFFF"/>
                 </a:solidFill>
                 <a:latin typeface="TT Commons Pro"/>
-              </a:defRPr>
-            </a:pPr>
-            <a:r>
+              </a:rPr>
               <a:t>Solution 3: Marketplace</a:t>
             </a:r>
           </a:p>
@@ -5132,8 +4793,8 @@
         </p:nvSpPr>
         <p:spPr>
           <a:xfrm>
-            <a:off x="1097280" y="7772400"/>
-            <a:ext cx="16459200" cy="731520"/>
+            <a:off x="1097280" y="7589520"/>
+            <a:ext cx="16002000" cy="548640"/>
           </a:xfrm>
           <a:prstGeom prst="rect">
             <a:avLst/>
@@ -5148,17 +4809,17 @@
           <a:p>
             <a:pPr>
               <a:spcAft>
-                <a:spcPts val="200"/>
-              </a:spcAft>
-            </a:pPr>
-            <a:r>
-              <a:rPr sz="900" b="1">
+                <a:spcPts val="100"/>
+              </a:spcAft>
+            </a:pPr>
+            <a:r>
+              <a:rPr sz="800" b="1">
                 <a:solidFill>
                   <a:srgbClr val="049FD9"/>
                 </a:solidFill>
                 <a:latin typeface="TT Commons Pro"/>
               </a:rPr>
-              <a:t>Key Milestones:  Q4 2026 VIBE Voice Boost GA  |  Q2 2027 Marketplace Public Launch  |  Q4 2027 Full Orchestrator Rollout  |  FY2028 500+ Certified Agents</a:t>
+              <a:t>Milestones:  Q4'26 VIBE GA  |  Q2'27 Marketplace Launch  |  Q4'27 Orchestrator Rollout  |  FY28 500+ Agents</a:t>
             </a:r>
           </a:p>
         </p:txBody>
@@ -8164,7 +7825,7 @@
                 <a:cs typeface="Open Sans"/>
                 <a:sym typeface="Open Sans"/>
               </a:rPr>
-              <a:t>AI hallucination in task drafts may produce incorrect actions or follow-up responses</a:t>
+              <a:t>AI hallucination may produce incorrect task drafts or follow-ups</a:t>
             </a:r>
           </a:p>
         </p:txBody>
@@ -8208,7 +7869,7 @@
                 <a:cs typeface="Open Sans"/>
                 <a:sym typeface="Open Sans"/>
               </a:rPr>
-              <a:t>Deepfake perception: users may distrust AI-generated voice in meetings</a:t>
+              <a:t>Users may distrust AI-generated voice (deepfake perception)</a:t>
             </a:r>
           </a:p>
         </p:txBody>
@@ -8252,7 +7913,7 @@
                 <a:cs typeface="Open Sans"/>
                 <a:sym typeface="Open Sans"/>
               </a:rPr>
-              <a:t>Marketplace cold-start: insufficient agents at launch limits user value</a:t>
+              <a:t>Marketplace cold-start: few agents at launch</a:t>
             </a:r>
             <a:r>
               <a:rPr lang="en-US" sz="2404">
@@ -8308,7 +7969,7 @@
                 <a:cs typeface="Open Sans"/>
                 <a:sym typeface="Open Sans"/>
               </a:rPr>
-              <a:t>Mandatory labeling ("Spoken by VIBE for [User]"), opt-in only, distinct voice persona</a:t>
+              <a:t>Mandatory labeling, opt-in only, distinct VIBE voice persona</a:t>
             </a:r>
             <a:r>
               <a:rPr lang="en-US" sz="2404">
@@ -8388,7 +8049,7 @@
                 <a:cs typeface="Open Sans"/>
                 <a:sym typeface="Open Sans"/>
               </a:rPr>
-              <a:t>Human-in-the-loop approval for every action + confidence scoring + graceful degradation</a:t>
+              <a:t>Human-in-the-loop approval + confidence scoring + graceful degradation</a:t>
             </a:r>
             <a:r>
               <a:rPr lang="en-US" sz="2404">
@@ -8456,7 +8117,7 @@
                 <a:cs typeface="Open Sans Bold"/>
                 <a:sym typeface="Open Sans Bold"/>
               </a:rPr>
-              <a:t>Seed 20-30 first-party agents + ISV partnerships + $5M developer grants program</a:t>
+              <a:t>Seed 30 first-party agents + ISV deals + $5M dev grants</a:t>
             </a:r>
             <a:r>
               <a:rPr lang="en-US" b="true" sz="2404">
@@ -8923,7 +8584,7 @@
         <p:spPr>
           <a:xfrm>
             <a:off x="1097280" y="1645920"/>
-            <a:ext cx="7772400" cy="7498079"/>
+            <a:ext cx="7498079" cy="7315200"/>
           </a:xfrm>
           <a:prstGeom prst="rect">
             <a:avLst/>
@@ -8938,27 +8599,27 @@
           <a:p>
             <a:pPr>
               <a:spcAft>
-                <a:spcPts val="200"/>
-              </a:spcAft>
-            </a:pPr>
-            <a:r>
-              <a:rPr sz="1600" b="1">
+                <a:spcPts val="100"/>
+              </a:spcAft>
+            </a:pPr>
+            <a:r>
+              <a:rPr sz="1400" b="1">
                 <a:solidFill>
                   <a:srgbClr val="049FD9"/>
                 </a:solidFill>
                 <a:latin typeface="TT Commons Pro"/>
               </a:rPr>
-              <a:t>Investment &amp; Costs</a:t>
-            </a:r>
-          </a:p>
-          <a:p>
-            <a:pPr>
-              <a:spcAft>
-                <a:spcPts val="200"/>
-              </a:spcAft>
-            </a:pPr>
-            <a:r>
-              <a:rPr sz="500" b="0">
+              <a:t>Investment</a:t>
+            </a:r>
+          </a:p>
+          <a:p>
+            <a:pPr>
+              <a:spcAft>
+                <a:spcPts val="100"/>
+              </a:spcAft>
+            </a:pPr>
+            <a:r>
+              <a:rPr sz="300" b="0">
                 <a:solidFill>
                   <a:srgbClr val="000000"/>
                 </a:solidFill>
@@ -8970,27 +8631,91 @@
           <a:p>
             <a:pPr>
               <a:spcAft>
-                <a:spcPts val="200"/>
-              </a:spcAft>
-            </a:pPr>
-            <a:r>
-              <a:rPr sz="1200" b="1">
+                <a:spcPts val="100"/>
+              </a:spcAft>
+            </a:pPr>
+            <a:r>
+              <a:rPr sz="1100" b="1">
                 <a:solidFill>
                   <a:srgbClr val="204F69"/>
                 </a:solidFill>
                 <a:latin typeface="TT Commons Pro"/>
               </a:rPr>
-              <a:t>R&amp;D Investment (from $7.98B budget)</a:t>
-            </a:r>
-          </a:p>
-          <a:p>
-            <a:pPr>
-              <a:spcAft>
-                <a:spcPts val="200"/>
-              </a:spcAft>
-            </a:pPr>
-            <a:r>
-              <a:rPr sz="200" b="0">
+              <a:t>R&amp;D (from $7.98B budget)</a:t>
+            </a:r>
+          </a:p>
+          <a:p>
+            <a:pPr>
+              <a:spcAft>
+                <a:spcPts val="100"/>
+              </a:spcAft>
+            </a:pPr>
+            <a:r>
+              <a:rPr sz="900" b="0">
+                <a:solidFill>
+                  <a:srgbClr val="000000"/>
+                </a:solidFill>
+                <a:latin typeface="TT Commons Pro"/>
+              </a:rPr>
+              <a:t>Sol 1 (Orchestrator): $45M / 18 months</a:t>
+            </a:r>
+          </a:p>
+          <a:p>
+            <a:pPr>
+              <a:spcAft>
+                <a:spcPts val="100"/>
+              </a:spcAft>
+            </a:pPr>
+            <a:r>
+              <a:rPr sz="900" b="0">
+                <a:solidFill>
+                  <a:srgbClr val="000000"/>
+                </a:solidFill>
+                <a:latin typeface="TT Commons Pro"/>
+              </a:rPr>
+              <a:t>Sol 2 (VIBE): $30M / 12 months</a:t>
+            </a:r>
+          </a:p>
+          <a:p>
+            <a:pPr>
+              <a:spcAft>
+                <a:spcPts val="100"/>
+              </a:spcAft>
+            </a:pPr>
+            <a:r>
+              <a:rPr sz="900" b="0">
+                <a:solidFill>
+                  <a:srgbClr val="000000"/>
+                </a:solidFill>
+                <a:latin typeface="TT Commons Pro"/>
+              </a:rPr>
+              <a:t>Sol 3 (Marketplace): $25M / 24 months</a:t>
+            </a:r>
+          </a:p>
+          <a:p>
+            <a:pPr>
+              <a:spcAft>
+                <a:spcPts val="100"/>
+              </a:spcAft>
+            </a:pPr>
+            <a:r>
+              <a:rPr sz="900" b="1">
+                <a:solidFill>
+                  <a:srgbClr val="000000"/>
+                </a:solidFill>
+                <a:latin typeface="TT Commons Pro"/>
+              </a:rPr>
+              <a:t>Total: $100M (1.25% of R&amp;D budget)</a:t>
+            </a:r>
+          </a:p>
+          <a:p>
+            <a:pPr>
+              <a:spcAft>
+                <a:spcPts val="100"/>
+              </a:spcAft>
+            </a:pPr>
+            <a:r>
+              <a:rPr sz="400" b="0">
                 <a:solidFill>
                   <a:srgbClr val="000000"/>
                 </a:solidFill>
@@ -9002,193 +8727,97 @@
           <a:p>
             <a:pPr>
               <a:spcAft>
-                <a:spcPts val="200"/>
-              </a:spcAft>
-            </a:pPr>
-            <a:r>
-              <a:rPr sz="1100" b="0">
-                <a:solidFill>
-                  <a:srgbClr val="000000"/>
-                </a:solidFill>
-                <a:latin typeface="TT Commons Pro"/>
-              </a:rPr>
-              <a:t>Solution 1 (Orchestrator): $45M / 18 months</a:t>
-            </a:r>
-          </a:p>
-          <a:p>
-            <a:pPr>
-              <a:spcAft>
-                <a:spcPts val="200"/>
-              </a:spcAft>
-            </a:pPr>
-            <a:r>
-              <a:rPr sz="1100" b="0">
-                <a:solidFill>
-                  <a:srgbClr val="000000"/>
-                </a:solidFill>
-                <a:latin typeface="TT Commons Pro"/>
-              </a:rPr>
-              <a:t>Solution 2 (VIBE): $30M / 12 months</a:t>
-            </a:r>
-          </a:p>
-          <a:p>
-            <a:pPr>
-              <a:spcAft>
-                <a:spcPts val="200"/>
-              </a:spcAft>
-            </a:pPr>
-            <a:r>
-              <a:rPr sz="1100" b="0">
-                <a:solidFill>
-                  <a:srgbClr val="000000"/>
-                </a:solidFill>
-                <a:latin typeface="TT Commons Pro"/>
-              </a:rPr>
-              <a:t>Solution 3 (Marketplace): $25M / 24 months</a:t>
-            </a:r>
-          </a:p>
-          <a:p>
-            <a:pPr>
-              <a:spcAft>
-                <a:spcPts val="200"/>
+                <a:spcPts val="100"/>
               </a:spcAft>
             </a:pPr>
             <a:r>
               <a:rPr sz="1100" b="1">
                 <a:solidFill>
-                  <a:srgbClr val="000000"/>
-                </a:solidFill>
-                <a:latin typeface="TT Commons Pro"/>
-              </a:rPr>
-              <a:t>Total: $100M (1.25% of annual R&amp;D budget)</a:t>
-            </a:r>
-          </a:p>
-          <a:p>
-            <a:pPr>
-              <a:spcAft>
-                <a:spcPts val="200"/>
-              </a:spcAft>
-            </a:pPr>
-            <a:r>
-              <a:rPr sz="600" b="0">
-                <a:solidFill>
-                  <a:srgbClr val="000000"/>
-                </a:solidFill>
-                <a:latin typeface="TT Commons Pro"/>
-              </a:rPr>
-              <a:t/>
-            </a:r>
-          </a:p>
-          <a:p>
-            <a:pPr>
-              <a:spcAft>
-                <a:spcPts val="200"/>
-              </a:spcAft>
-            </a:pPr>
-            <a:r>
-              <a:rPr sz="1200" b="1">
-                <a:solidFill>
                   <a:srgbClr val="204F69"/>
                 </a:solidFill>
                 <a:latin typeface="TT Commons Pro"/>
               </a:rPr>
-              <a:t>Ongoing Operating Costs (Annual)</a:t>
-            </a:r>
-          </a:p>
-          <a:p>
-            <a:pPr>
-              <a:spcAft>
-                <a:spcPts val="200"/>
-              </a:spcAft>
-            </a:pPr>
-            <a:r>
-              <a:rPr sz="200" b="0">
-                <a:solidFill>
-                  <a:srgbClr val="000000"/>
-                </a:solidFill>
-                <a:latin typeface="TT Commons Pro"/>
-              </a:rPr>
-              <a:t/>
-            </a:r>
-          </a:p>
-          <a:p>
-            <a:pPr>
-              <a:spcAft>
-                <a:spcPts val="200"/>
-              </a:spcAft>
-            </a:pPr>
-            <a:r>
-              <a:rPr sz="1100" b="0">
-                <a:solidFill>
-                  <a:srgbClr val="000000"/>
-                </a:solidFill>
-                <a:latin typeface="TT Commons Pro"/>
-              </a:rPr>
-              <a:t>Cloud infrastructure scaling: $15M/year</a:t>
-            </a:r>
-          </a:p>
-          <a:p>
-            <a:pPr>
-              <a:spcAft>
-                <a:spcPts val="200"/>
-              </a:spcAft>
-            </a:pPr>
-            <a:r>
-              <a:rPr sz="1100" b="0">
-                <a:solidFill>
-                  <a:srgbClr val="000000"/>
-                </a:solidFill>
-                <a:latin typeface="TT Commons Pro"/>
-              </a:rPr>
-              <a:t>Splunk observability licensing: $8M/year</a:t>
-            </a:r>
-          </a:p>
-          <a:p>
-            <a:pPr>
-              <a:spcAft>
-                <a:spcPts val="200"/>
-              </a:spcAft>
-            </a:pPr>
-            <a:r>
-              <a:rPr sz="1100" b="0">
-                <a:solidFill>
-                  <a:srgbClr val="000000"/>
-                </a:solidFill>
-                <a:latin typeface="TT Commons Pro"/>
-              </a:rPr>
-              <a:t>Developer relations &amp; grants: $5M/year</a:t>
-            </a:r>
-          </a:p>
-          <a:p>
-            <a:pPr>
-              <a:spcAft>
-                <a:spcPts val="200"/>
-              </a:spcAft>
-            </a:pPr>
-            <a:r>
-              <a:rPr sz="1100" b="0">
-                <a:solidFill>
-                  <a:srgbClr val="000000"/>
-                </a:solidFill>
-                <a:latin typeface="TT Commons Pro"/>
-              </a:rPr>
-              <a:t>Security certification team: $4M/year</a:t>
-            </a:r>
-          </a:p>
-          <a:p>
-            <a:pPr>
-              <a:spcAft>
-                <a:spcPts val="200"/>
-              </a:spcAft>
-            </a:pPr>
-            <a:r>
-              <a:rPr sz="1100" b="1">
-                <a:solidFill>
-                  <a:srgbClr val="000000"/>
-                </a:solidFill>
-                <a:latin typeface="TT Commons Pro"/>
-              </a:rPr>
-              <a:t>Total ongoing: $32M/year</a:t>
+              <a:t>Annual Operating Costs</a:t>
+            </a:r>
+          </a:p>
+          <a:p>
+            <a:pPr>
+              <a:spcAft>
+                <a:spcPts val="100"/>
+              </a:spcAft>
+            </a:pPr>
+            <a:r>
+              <a:rPr sz="900" b="0">
+                <a:solidFill>
+                  <a:srgbClr val="000000"/>
+                </a:solidFill>
+                <a:latin typeface="TT Commons Pro"/>
+              </a:rPr>
+              <a:t>Cloud scaling: $15M/yr</a:t>
+            </a:r>
+          </a:p>
+          <a:p>
+            <a:pPr>
+              <a:spcAft>
+                <a:spcPts val="100"/>
+              </a:spcAft>
+            </a:pPr>
+            <a:r>
+              <a:rPr sz="900" b="0">
+                <a:solidFill>
+                  <a:srgbClr val="000000"/>
+                </a:solidFill>
+                <a:latin typeface="TT Commons Pro"/>
+              </a:rPr>
+              <a:t>Splunk licensing: $8M/yr</a:t>
+            </a:r>
+          </a:p>
+          <a:p>
+            <a:pPr>
+              <a:spcAft>
+                <a:spcPts val="100"/>
+              </a:spcAft>
+            </a:pPr>
+            <a:r>
+              <a:rPr sz="900" b="0">
+                <a:solidFill>
+                  <a:srgbClr val="000000"/>
+                </a:solidFill>
+                <a:latin typeface="TT Commons Pro"/>
+              </a:rPr>
+              <a:t>Developer relations: $5M/yr</a:t>
+            </a:r>
+          </a:p>
+          <a:p>
+            <a:pPr>
+              <a:spcAft>
+                <a:spcPts val="100"/>
+              </a:spcAft>
+            </a:pPr>
+            <a:r>
+              <a:rPr sz="900" b="0">
+                <a:solidFill>
+                  <a:srgbClr val="000000"/>
+                </a:solidFill>
+                <a:latin typeface="TT Commons Pro"/>
+              </a:rPr>
+              <a:t>Certification team: $4M/yr</a:t>
+            </a:r>
+          </a:p>
+          <a:p>
+            <a:pPr>
+              <a:spcAft>
+                <a:spcPts val="100"/>
+              </a:spcAft>
+            </a:pPr>
+            <a:r>
+              <a:rPr sz="900" b="1">
+                <a:solidFill>
+                  <a:srgbClr val="000000"/>
+                </a:solidFill>
+                <a:latin typeface="TT Commons Pro"/>
+              </a:rPr>
+              <a:t>Total: $32M/year</a:t>
             </a:r>
           </a:p>
         </p:txBody>
@@ -9201,8 +8830,8 @@
         </p:nvSpPr>
         <p:spPr>
           <a:xfrm>
-            <a:off x="9875520" y="1645920"/>
-            <a:ext cx="7498079" cy="7498079"/>
+            <a:off x="9601200" y="1645920"/>
+            <a:ext cx="7498079" cy="7315200"/>
           </a:xfrm>
           <a:prstGeom prst="rect">
             <a:avLst/>
@@ -9217,11 +8846,11 @@
           <a:p>
             <a:pPr>
               <a:spcAft>
-                <a:spcPts val="200"/>
-              </a:spcAft>
-            </a:pPr>
-            <a:r>
-              <a:rPr sz="1600" b="1">
+                <a:spcPts val="100"/>
+              </a:spcAft>
+            </a:pPr>
+            <a:r>
+              <a:rPr sz="1400" b="1">
                 <a:solidFill>
                   <a:srgbClr val="049FD9"/>
                 </a:solidFill>
@@ -9233,11 +8862,11 @@
           <a:p>
             <a:pPr>
               <a:spcAft>
-                <a:spcPts val="200"/>
-              </a:spcAft>
-            </a:pPr>
-            <a:r>
-              <a:rPr sz="500" b="0">
+                <a:spcPts val="100"/>
+              </a:spcAft>
+            </a:pPr>
+            <a:r>
+              <a:rPr sz="300" b="0">
                 <a:solidFill>
                   <a:srgbClr val="000000"/>
                 </a:solidFill>
@@ -9249,43 +8878,43 @@
           <a:p>
             <a:pPr>
               <a:spcAft>
-                <a:spcPts val="200"/>
-              </a:spcAft>
-            </a:pPr>
-            <a:r>
-              <a:rPr sz="1200" b="1">
+                <a:spcPts val="100"/>
+              </a:spcAft>
+            </a:pPr>
+            <a:r>
+              <a:rPr sz="1100" b="1">
                 <a:solidFill>
                   <a:srgbClr val="204F69"/>
                 </a:solidFill>
                 <a:latin typeface="TT Commons Pro"/>
               </a:rPr>
-              <a:t>FY2027 (Year 1)</a:t>
-            </a:r>
-          </a:p>
-          <a:p>
-            <a:pPr>
-              <a:spcAft>
-                <a:spcPts val="200"/>
-              </a:spcAft>
-            </a:pPr>
-            <a:r>
-              <a:rPr sz="1100" b="0">
-                <a:solidFill>
-                  <a:srgbClr val="000000"/>
-                </a:solidFill>
-                <a:latin typeface="TT Commons Pro"/>
-              </a:rPr>
-              <a:t>Incremental collaboration ARR: +$400M</a:t>
-            </a:r>
-          </a:p>
-          <a:p>
-            <a:pPr>
-              <a:spcAft>
-                <a:spcPts val="200"/>
-              </a:spcAft>
-            </a:pPr>
-            <a:r>
-              <a:rPr sz="1100" b="0">
+              <a:t>FY2027</a:t>
+            </a:r>
+          </a:p>
+          <a:p>
+            <a:pPr>
+              <a:spcAft>
+                <a:spcPts val="100"/>
+              </a:spcAft>
+            </a:pPr>
+            <a:r>
+              <a:rPr sz="900" b="0">
+                <a:solidFill>
+                  <a:srgbClr val="000000"/>
+                </a:solidFill>
+                <a:latin typeface="TT Commons Pro"/>
+              </a:rPr>
+              <a:t>Incremental ARR: +$400M</a:t>
+            </a:r>
+          </a:p>
+          <a:p>
+            <a:pPr>
+              <a:spcAft>
+                <a:spcPts val="100"/>
+              </a:spcAft>
+            </a:pPr>
+            <a:r>
+              <a:rPr sz="900" b="0">
                 <a:solidFill>
                   <a:srgbClr val="000000"/>
                 </a:solidFill>
@@ -9297,7 +8926,7 @@
           <a:p>
             <a:pPr>
               <a:spcAft>
-                <a:spcPts val="200"/>
+                <a:spcPts val="100"/>
               </a:spcAft>
             </a:pPr>
             <a:r>
@@ -9313,43 +8942,43 @@
           <a:p>
             <a:pPr>
               <a:spcAft>
-                <a:spcPts val="200"/>
-              </a:spcAft>
-            </a:pPr>
-            <a:r>
-              <a:rPr sz="1200" b="1">
+                <a:spcPts val="100"/>
+              </a:spcAft>
+            </a:pPr>
+            <a:r>
+              <a:rPr sz="1100" b="1">
                 <a:solidFill>
                   <a:srgbClr val="204F69"/>
                 </a:solidFill>
                 <a:latin typeface="TT Commons Pro"/>
               </a:rPr>
-              <a:t>FY2028 (Year 2)</a:t>
-            </a:r>
-          </a:p>
-          <a:p>
-            <a:pPr>
-              <a:spcAft>
-                <a:spcPts val="200"/>
-              </a:spcAft>
-            </a:pPr>
-            <a:r>
-              <a:rPr sz="1100" b="0">
-                <a:solidFill>
-                  <a:srgbClr val="000000"/>
-                </a:solidFill>
-                <a:latin typeface="TT Commons Pro"/>
-              </a:rPr>
-              <a:t>Incremental collaboration ARR: +$1.1B</a:t>
-            </a:r>
-          </a:p>
-          <a:p>
-            <a:pPr>
-              <a:spcAft>
-                <a:spcPts val="200"/>
-              </a:spcAft>
-            </a:pPr>
-            <a:r>
-              <a:rPr sz="1100" b="0">
+              <a:t>FY2028</a:t>
+            </a:r>
+          </a:p>
+          <a:p>
+            <a:pPr>
+              <a:spcAft>
+                <a:spcPts val="100"/>
+              </a:spcAft>
+            </a:pPr>
+            <a:r>
+              <a:rPr sz="900" b="0">
+                <a:solidFill>
+                  <a:srgbClr val="000000"/>
+                </a:solidFill>
+                <a:latin typeface="TT Commons Pro"/>
+              </a:rPr>
+              <a:t>Incremental ARR: +$1.1B</a:t>
+            </a:r>
+          </a:p>
+          <a:p>
+            <a:pPr>
+              <a:spcAft>
+                <a:spcPts val="100"/>
+              </a:spcAft>
+            </a:pPr>
+            <a:r>
+              <a:rPr sz="900" b="0">
                 <a:solidFill>
                   <a:srgbClr val="000000"/>
                 </a:solidFill>
@@ -9361,7 +8990,7 @@
           <a:p>
             <a:pPr>
               <a:spcAft>
-                <a:spcPts val="200"/>
+                <a:spcPts val="100"/>
               </a:spcAft>
             </a:pPr>
             <a:r>
@@ -9377,43 +9006,43 @@
           <a:p>
             <a:pPr>
               <a:spcAft>
-                <a:spcPts val="200"/>
-              </a:spcAft>
-            </a:pPr>
-            <a:r>
-              <a:rPr sz="1200" b="1">
+                <a:spcPts val="100"/>
+              </a:spcAft>
+            </a:pPr>
+            <a:r>
+              <a:rPr sz="1100" b="1">
                 <a:solidFill>
                   <a:srgbClr val="204F69"/>
                 </a:solidFill>
                 <a:latin typeface="TT Commons Pro"/>
               </a:rPr>
-              <a:t>FY2029 (Year 3)</a:t>
-            </a:r>
-          </a:p>
-          <a:p>
-            <a:pPr>
-              <a:spcAft>
-                <a:spcPts val="200"/>
-              </a:spcAft>
-            </a:pPr>
-            <a:r>
-              <a:rPr sz="1100" b="0">
-                <a:solidFill>
-                  <a:srgbClr val="000000"/>
-                </a:solidFill>
-                <a:latin typeface="TT Commons Pro"/>
-              </a:rPr>
-              <a:t>Incremental collaboration ARR: +$2.1B</a:t>
-            </a:r>
-          </a:p>
-          <a:p>
-            <a:pPr>
-              <a:spcAft>
-                <a:spcPts val="200"/>
-              </a:spcAft>
-            </a:pPr>
-            <a:r>
-              <a:rPr sz="1100" b="0">
+              <a:t>FY2029</a:t>
+            </a:r>
+          </a:p>
+          <a:p>
+            <a:pPr>
+              <a:spcAft>
+                <a:spcPts val="100"/>
+              </a:spcAft>
+            </a:pPr>
+            <a:r>
+              <a:rPr sz="900" b="0">
+                <a:solidFill>
+                  <a:srgbClr val="000000"/>
+                </a:solidFill>
+                <a:latin typeface="TT Commons Pro"/>
+              </a:rPr>
+              <a:t>Incremental ARR: +$2.1B</a:t>
+            </a:r>
+          </a:p>
+          <a:p>
+            <a:pPr>
+              <a:spcAft>
+                <a:spcPts val="100"/>
+              </a:spcAft>
+            </a:pPr>
+            <a:r>
+              <a:rPr sz="900" b="0">
                 <a:solidFill>
                   <a:srgbClr val="000000"/>
                 </a:solidFill>
@@ -9425,11 +9054,11 @@
           <a:p>
             <a:pPr>
               <a:spcAft>
-                <a:spcPts val="200"/>
-              </a:spcAft>
-            </a:pPr>
-            <a:r>
-              <a:rPr sz="500" b="0">
+                <a:spcPts val="100"/>
+              </a:spcAft>
+            </a:pPr>
+            <a:r>
+              <a:rPr sz="400" b="0">
                 <a:solidFill>
                   <a:srgbClr val="000000"/>
                 </a:solidFill>
@@ -9441,33 +9070,33 @@
           <a:p>
             <a:pPr>
               <a:spcAft>
-                <a:spcPts val="200"/>
-              </a:spcAft>
-            </a:pPr>
-            <a:r>
-              <a:rPr sz="1200" b="1">
+                <a:spcPts val="100"/>
+              </a:spcAft>
+            </a:pPr>
+            <a:r>
+              <a:rPr sz="1100" b="1">
                 <a:solidFill>
                   <a:srgbClr val="049FD9"/>
                 </a:solidFill>
                 <a:latin typeface="TT Commons Pro"/>
               </a:rPr>
-              <a:t>ROI: 21x return on $100M investment by FY2029</a:t>
-            </a:r>
-          </a:p>
-          <a:p>
-            <a:pPr>
-              <a:spcAft>
-                <a:spcPts val="200"/>
-              </a:spcAft>
-            </a:pPr>
-            <a:r>
-              <a:rPr sz="1100" b="1">
+              <a:t>ROI: 21x on $100M by FY2029</a:t>
+            </a:r>
+          </a:p>
+          <a:p>
+            <a:pPr>
+              <a:spcAft>
+                <a:spcPts val="100"/>
+              </a:spcAft>
+            </a:pPr>
+            <a:r>
+              <a:rPr sz="900" b="1">
                 <a:solidFill>
                   <a:srgbClr val="049FD9"/>
                 </a:solidFill>
                 <a:latin typeface="TT Commons Pro"/>
               </a:rPr>
-              <a:t>Productivity: $4,200 saved per worker per year</a:t>
+              <a:t>$4,200 saved per worker per year</a:t>
             </a:r>
           </a:p>
         </p:txBody>
@@ -10608,11 +10237,11 @@
                 <a:spcPct val="0"/>
               </a:spcBef>
               <a:spcAft>
-                <a:spcPts val="300"/>
-              </a:spcAft>
-            </a:pPr>
-            <a:r>
-              <a:rPr sz="1000">
+                <a:spcPts val="200"/>
+              </a:spcAft>
+            </a:pPr>
+            <a:r>
+              <a:rPr sz="900">
                 <a:solidFill>
                   <a:srgbClr val="000000"/>
                 </a:solidFill>
@@ -10624,11 +10253,11 @@
           <a:p>
             <a:pPr>
               <a:spcAft>
-                <a:spcPts val="300"/>
-              </a:spcAft>
-            </a:pPr>
-            <a:r>
-              <a:rPr sz="1000">
+                <a:spcPts val="200"/>
+              </a:spcAft>
+            </a:pPr>
+            <a:r>
+              <a:rPr sz="900">
                 <a:solidFill>
                   <a:srgbClr val="000000"/>
                 </a:solidFill>
@@ -10640,11 +10269,11 @@
           <a:p>
             <a:pPr>
               <a:spcAft>
-                <a:spcPts val="300"/>
-              </a:spcAft>
-            </a:pPr>
-            <a:r>
-              <a:rPr sz="1000">
+                <a:spcPts val="200"/>
+              </a:spcAft>
+            </a:pPr>
+            <a:r>
+              <a:rPr sz="900">
                 <a:solidFill>
                   <a:srgbClr val="000000"/>
                 </a:solidFill>
@@ -10656,33 +10285,33 @@
           <a:p>
             <a:pPr>
               <a:spcAft>
-                <a:spcPts val="300"/>
-              </a:spcAft>
-            </a:pPr>
-            <a:r>
-              <a:rPr sz="1000">
-                <a:solidFill>
-                  <a:srgbClr val="000000"/>
-                </a:solidFill>
-                <a:latin typeface="TT Commons Pro"/>
-              </a:rPr>
-              <a:t>4.5/5 TTS naturalness rating</a:t>
-            </a:r>
-          </a:p>
-          <a:p>
-            <a:pPr>
-              <a:spcAft>
-                <a:spcPts val="300"/>
-              </a:spcAft>
-            </a:pPr>
-            <a:r>
-              <a:rPr sz="1000">
-                <a:solidFill>
-                  <a:srgbClr val="000000"/>
-                </a:solidFill>
-                <a:latin typeface="TT Commons Pro"/>
-              </a:rPr>
-              <a:t>+40% participation increase</a:t>
+                <a:spcPts val="200"/>
+              </a:spcAft>
+            </a:pPr>
+            <a:r>
+              <a:rPr sz="900">
+                <a:solidFill>
+                  <a:srgbClr val="000000"/>
+                </a:solidFill>
+                <a:latin typeface="TT Commons Pro"/>
+              </a:rPr>
+              <a:t>4.5/5 TTS naturalness</a:t>
+            </a:r>
+          </a:p>
+          <a:p>
+            <a:pPr>
+              <a:spcAft>
+                <a:spcPts val="200"/>
+              </a:spcAft>
+            </a:pPr>
+            <a:r>
+              <a:rPr sz="900">
+                <a:solidFill>
+                  <a:srgbClr val="000000"/>
+                </a:solidFill>
+                <a:latin typeface="TT Commons Pro"/>
+              </a:rPr>
+              <a:t>+40% participation</a:t>
             </a:r>
           </a:p>
         </p:txBody>
@@ -10716,27 +10345,27 @@
                 <a:spcPct val="0"/>
               </a:spcBef>
               <a:spcAft>
-                <a:spcPts val="300"/>
-              </a:spcAft>
-            </a:pPr>
-            <a:r>
-              <a:rPr sz="1000">
-                <a:solidFill>
-                  <a:srgbClr val="000000"/>
-                </a:solidFill>
-                <a:latin typeface="TT Commons Pro"/>
-              </a:rPr>
-              <a:t>500+ certified agents Year 1</a:t>
-            </a:r>
-          </a:p>
-          <a:p>
-            <a:pPr>
-              <a:spcAft>
-                <a:spcPts val="300"/>
-              </a:spcAft>
-            </a:pPr>
-            <a:r>
-              <a:rPr sz="1000">
+                <a:spcPts val="200"/>
+              </a:spcAft>
+            </a:pPr>
+            <a:r>
+              <a:rPr sz="900">
+                <a:solidFill>
+                  <a:srgbClr val="000000"/>
+                </a:solidFill>
+                <a:latin typeface="TT Commons Pro"/>
+              </a:rPr>
+              <a:t>500+ agents Year 1</a:t>
+            </a:r>
+          </a:p>
+          <a:p>
+            <a:pPr>
+              <a:spcAft>
+                <a:spcPts val="200"/>
+              </a:spcAft>
+            </a:pPr>
+            <a:r>
+              <a:rPr sz="900">
                 <a:solidFill>
                   <a:srgbClr val="000000"/>
                 </a:solidFill>
@@ -10748,49 +10377,49 @@
           <a:p>
             <a:pPr>
               <a:spcAft>
-                <a:spcPts val="300"/>
-              </a:spcAft>
-            </a:pPr>
-            <a:r>
-              <a:rPr sz="1000">
-                <a:solidFill>
-                  <a:srgbClr val="000000"/>
-                </a:solidFill>
-                <a:latin typeface="TT Commons Pro"/>
-              </a:rPr>
-              <a:t>3x developer growth in 18 mo</a:t>
-            </a:r>
-          </a:p>
-          <a:p>
-            <a:pPr>
-              <a:spcAft>
-                <a:spcPts val="300"/>
-              </a:spcAft>
-            </a:pPr>
-            <a:r>
-              <a:rPr sz="1000">
-                <a:solidFill>
-                  <a:srgbClr val="000000"/>
-                </a:solidFill>
-                <a:latin typeface="TT Commons Pro"/>
-              </a:rPr>
-              <a:t>85% enterprise renewal rate</a:t>
-            </a:r>
-          </a:p>
-          <a:p>
-            <a:pPr>
-              <a:spcAft>
-                <a:spcPts val="300"/>
-              </a:spcAft>
-            </a:pPr>
-            <a:r>
-              <a:rPr sz="1000">
-                <a:solidFill>
-                  <a:srgbClr val="000000"/>
-                </a:solidFill>
-                <a:latin typeface="TT Commons Pro"/>
-              </a:rPr>
-              <a:t>$50M commission by FY2029</a:t>
+                <a:spcPts val="200"/>
+              </a:spcAft>
+            </a:pPr>
+            <a:r>
+              <a:rPr sz="900">
+                <a:solidFill>
+                  <a:srgbClr val="000000"/>
+                </a:solidFill>
+                <a:latin typeface="TT Commons Pro"/>
+              </a:rPr>
+              <a:t>3x developer growth</a:t>
+            </a:r>
+          </a:p>
+          <a:p>
+            <a:pPr>
+              <a:spcAft>
+                <a:spcPts val="200"/>
+              </a:spcAft>
+            </a:pPr>
+            <a:r>
+              <a:rPr sz="900">
+                <a:solidFill>
+                  <a:srgbClr val="000000"/>
+                </a:solidFill>
+                <a:latin typeface="TT Commons Pro"/>
+              </a:rPr>
+              <a:t>85% renewal rate</a:t>
+            </a:r>
+          </a:p>
+          <a:p>
+            <a:pPr>
+              <a:spcAft>
+                <a:spcPts val="200"/>
+              </a:spcAft>
+            </a:pPr>
+            <a:r>
+              <a:rPr sz="900">
+                <a:solidFill>
+                  <a:srgbClr val="000000"/>
+                </a:solidFill>
+                <a:latin typeface="TT Commons Pro"/>
+              </a:rPr>
+              <a:t>$50M commission FY2029</a:t>
             </a:r>
           </a:p>
         </p:txBody>
@@ -10824,27 +10453,27 @@
                 <a:spcPct val="0"/>
               </a:spcBef>
               <a:spcAft>
-                <a:spcPts val="300"/>
-              </a:spcAft>
-            </a:pPr>
-            <a:r>
-              <a:rPr sz="1000">
-                <a:solidFill>
-                  <a:srgbClr val="000000"/>
-                </a:solidFill>
-                <a:latin typeface="TT Commons Pro"/>
-              </a:rPr>
-              <a:t>25% meeting-to-action rate (vs. 5% avg)</a:t>
-            </a:r>
-          </a:p>
-          <a:p>
-            <a:pPr>
-              <a:spcAft>
-                <a:spcPts val="300"/>
-              </a:spcAft>
-            </a:pPr>
-            <a:r>
-              <a:rPr sz="1000">
+                <a:spcPts val="200"/>
+              </a:spcAft>
+            </a:pPr>
+            <a:r>
+              <a:rPr sz="900">
+                <a:solidFill>
+                  <a:srgbClr val="000000"/>
+                </a:solidFill>
+                <a:latin typeface="TT Commons Pro"/>
+              </a:rPr>
+              <a:t>25% meeting-to-action rate</a:t>
+            </a:r>
+          </a:p>
+          <a:p>
+            <a:pPr>
+              <a:spcAft>
+                <a:spcPts val="200"/>
+              </a:spcAft>
+            </a:pPr>
+            <a:r>
+              <a:rPr sz="900">
                 <a:solidFill>
                   <a:srgbClr val="000000"/>
                 </a:solidFill>
@@ -10856,27 +10485,27 @@
           <a:p>
             <a:pPr>
               <a:spcAft>
-                <a:spcPts val="300"/>
-              </a:spcAft>
-            </a:pPr>
-            <a:r>
-              <a:rPr sz="1000">
-                <a:solidFill>
-                  <a:srgbClr val="000000"/>
-                </a:solidFill>
-                <a:latin typeface="TT Commons Pro"/>
-              </a:rPr>
-              <a:t>40% workflow automation in 12 mo</a:t>
-            </a:r>
-          </a:p>
-          <a:p>
-            <a:pPr>
-              <a:spcAft>
-                <a:spcPts val="300"/>
-              </a:spcAft>
-            </a:pPr>
-            <a:r>
-              <a:rPr sz="1000">
+                <a:spcPts val="200"/>
+              </a:spcAft>
+            </a:pPr>
+            <a:r>
+              <a:rPr sz="900">
+                <a:solidFill>
+                  <a:srgbClr val="000000"/>
+                </a:solidFill>
+                <a:latin typeface="TT Commons Pro"/>
+              </a:rPr>
+              <a:t>40% workflow automation</a:t>
+            </a:r>
+          </a:p>
+          <a:p>
+            <a:pPr>
+              <a:spcAft>
+                <a:spcPts val="200"/>
+              </a:spcAft>
+            </a:pPr>
+            <a:r>
+              <a:rPr sz="900">
                 <a:solidFill>
                   <a:srgbClr val="000000"/>
                 </a:solidFill>
@@ -10888,17 +10517,17 @@
           <a:p>
             <a:pPr>
               <a:spcAft>
-                <a:spcPts val="300"/>
-              </a:spcAft>
-            </a:pPr>
-            <a:r>
-              <a:rPr sz="1000">
-                <a:solidFill>
-                  <a:srgbClr val="000000"/>
-                </a:solidFill>
-                <a:latin typeface="TT Commons Pro"/>
-              </a:rPr>
-              <a:t>90%+ Q&amp;A resolution rate</a:t>
+                <a:spcPts val="200"/>
+              </a:spcAft>
+            </a:pPr>
+            <a:r>
+              <a:rPr sz="900">
+                <a:solidFill>
+                  <a:srgbClr val="000000"/>
+                </a:solidFill>
+                <a:latin typeface="TT Commons Pro"/>
+              </a:rPr>
+              <a:t>90%+ Q&amp;A resolution</a:t>
             </a:r>
           </a:p>
         </p:txBody>
@@ -11203,7 +10832,7 @@
         <p:spPr>
           <a:xfrm>
             <a:off x="1097280" y="1645920"/>
-            <a:ext cx="16459200" cy="7498079"/>
+            <a:ext cx="16002000" cy="7315200"/>
           </a:xfrm>
           <a:prstGeom prst="rect">
             <a:avLst/>
@@ -11218,43 +10847,43 @@
           <a:p>
             <a:pPr>
               <a:spcAft>
-                <a:spcPts val="200"/>
-              </a:spcAft>
-            </a:pPr>
-            <a:r>
-              <a:rPr sz="1100" b="0">
-                <a:solidFill>
-                  <a:srgbClr val="000000"/>
-                </a:solidFill>
-                <a:latin typeface="TT Commons Pro"/>
-              </a:rPr>
-              <a:t>Cisco Webex faces three critical gaps preventing it from competing effectively against</a:t>
-            </a:r>
-          </a:p>
-          <a:p>
-            <a:pPr>
-              <a:spcAft>
-                <a:spcPts val="200"/>
-              </a:spcAft>
-            </a:pPr>
-            <a:r>
-              <a:rPr sz="1100" b="0">
-                <a:solidFill>
-                  <a:srgbClr val="000000"/>
-                </a:solidFill>
-                <a:latin typeface="TT Commons Pro"/>
-              </a:rPr>
-              <a:t>Microsoft Teams and Zoom. We propose three integrated, AI-powered solutions.</a:t>
-            </a:r>
-          </a:p>
-          <a:p>
-            <a:pPr>
-              <a:spcAft>
-                <a:spcPts val="200"/>
-              </a:spcAft>
-            </a:pPr>
-            <a:r>
-              <a:rPr sz="600" b="0">
+                <a:spcPts val="100"/>
+              </a:spcAft>
+            </a:pPr>
+            <a:r>
+              <a:rPr sz="1000" b="0">
+                <a:solidFill>
+                  <a:srgbClr val="000000"/>
+                </a:solidFill>
+                <a:latin typeface="TT Commons Pro"/>
+              </a:rPr>
+              <a:t>Webex faces three gaps vs. Teams and Zoom.</a:t>
+            </a:r>
+          </a:p>
+          <a:p>
+            <a:pPr>
+              <a:spcAft>
+                <a:spcPts val="100"/>
+              </a:spcAft>
+            </a:pPr>
+            <a:r>
+              <a:rPr sz="1000" b="0">
+                <a:solidFill>
+                  <a:srgbClr val="000000"/>
+                </a:solidFill>
+                <a:latin typeface="TT Commons Pro"/>
+              </a:rPr>
+              <a:t>We propose three integrated AI solutions.</a:t>
+            </a:r>
+          </a:p>
+          <a:p>
+            <a:pPr>
+              <a:spcAft>
+                <a:spcPts val="100"/>
+              </a:spcAft>
+            </a:pPr>
+            <a:r>
+              <a:rPr sz="400" b="0">
                 <a:solidFill>
                   <a:srgbClr val="000000"/>
                 </a:solidFill>
@@ -11266,11 +10895,11 @@
           <a:p>
             <a:pPr>
               <a:spcAft>
-                <a:spcPts val="200"/>
-              </a:spcAft>
-            </a:pPr>
-            <a:r>
-              <a:rPr sz="1200" b="1">
+                <a:spcPts val="100"/>
+              </a:spcAft>
+            </a:pPr>
+            <a:r>
+              <a:rPr sz="1100" b="1">
                 <a:solidFill>
                   <a:srgbClr val="049FD9"/>
                 </a:solidFill>
@@ -11282,55 +10911,167 @@
           <a:p>
             <a:pPr>
               <a:spcAft>
-                <a:spcPts val="200"/>
-              </a:spcAft>
-            </a:pPr>
-            <a:r>
-              <a:rPr sz="1100" b="0">
-                <a:solidFill>
-                  <a:srgbClr val="000000"/>
-                </a:solidFill>
-                <a:latin typeface="TT Commons Pro"/>
-              </a:rPr>
-              <a:t>Webex AI summarizes but cannot prepare, execute, or follow up.</a:t>
-            </a:r>
-          </a:p>
-          <a:p>
-            <a:pPr>
-              <a:spcAft>
-                <a:spcPts val="200"/>
-              </a:spcAft>
-            </a:pPr>
-            <a:r>
-              <a:rPr sz="1100" b="0">
-                <a:solidFill>
-                  <a:srgbClr val="000000"/>
-                </a:solidFill>
-                <a:latin typeface="TT Commons Pro"/>
-              </a:rPr>
-              <a:t>Solution: AI Meeting Prep &amp; Workflow Orchestrator (Prepare-Perceive-Reason-Act-Follow-Up).</a:t>
-            </a:r>
-          </a:p>
-          <a:p>
-            <a:pPr>
-              <a:spcAft>
-                <a:spcPts val="200"/>
-              </a:spcAft>
-            </a:pPr>
-            <a:r>
-              <a:rPr sz="1000" b="0">
-                <a:solidFill>
-                  <a:srgbClr val="000000"/>
-                </a:solidFill>
-                <a:latin typeface="TT Commons Pro"/>
-              </a:rPr>
-              <a:t>Impact: 25% meeting-to-action rate, 15 min saved per meeting.</a:t>
-            </a:r>
-          </a:p>
-          <a:p>
-            <a:pPr>
-              <a:spcAft>
-                <a:spcPts val="200"/>
+                <a:spcPts val="100"/>
+              </a:spcAft>
+            </a:pPr>
+            <a:r>
+              <a:rPr sz="900" b="0">
+                <a:solidFill>
+                  <a:srgbClr val="000000"/>
+                </a:solidFill>
+                <a:latin typeface="TT Commons Pro"/>
+              </a:rPr>
+              <a:t>Solution: AI Orchestrator (Prepare-Perceive-Reason-Act-Follow-Up)</a:t>
+            </a:r>
+          </a:p>
+          <a:p>
+            <a:pPr>
+              <a:spcAft>
+                <a:spcPts val="100"/>
+              </a:spcAft>
+            </a:pPr>
+            <a:r>
+              <a:rPr sz="900" b="0">
+                <a:solidFill>
+                  <a:srgbClr val="000000"/>
+                </a:solidFill>
+                <a:latin typeface="TT Commons Pro"/>
+              </a:rPr>
+              <a:t>Impact: 25% action rate, 15 min saved per meeting</a:t>
+            </a:r>
+          </a:p>
+          <a:p>
+            <a:pPr>
+              <a:spcAft>
+                <a:spcPts val="100"/>
+              </a:spcAft>
+            </a:pPr>
+            <a:r>
+              <a:rPr sz="300" b="0">
+                <a:solidFill>
+                  <a:srgbClr val="000000"/>
+                </a:solidFill>
+                <a:latin typeface="TT Commons Pro"/>
+              </a:rPr>
+              <a:t/>
+            </a:r>
+          </a:p>
+          <a:p>
+            <a:pPr>
+              <a:spcAft>
+                <a:spcPts val="100"/>
+              </a:spcAft>
+            </a:pPr>
+            <a:r>
+              <a:rPr sz="1100" b="1">
+                <a:solidFill>
+                  <a:srgbClr val="049FD9"/>
+                </a:solidFill>
+                <a:latin typeface="TT Commons Pro"/>
+              </a:rPr>
+              <a:t>Problem 2: Participation Exclusion</a:t>
+            </a:r>
+          </a:p>
+          <a:p>
+            <a:pPr>
+              <a:spcAft>
+                <a:spcPts val="100"/>
+              </a:spcAft>
+            </a:pPr>
+            <a:r>
+              <a:rPr sz="900" b="0">
+                <a:solidFill>
+                  <a:srgbClr val="000000"/>
+                </a:solidFill>
+                <a:latin typeface="TT Commons Pro"/>
+              </a:rPr>
+              <a:t>Solution: VIBE - voice boost, translation, type-to-speak</a:t>
+            </a:r>
+          </a:p>
+          <a:p>
+            <a:pPr>
+              <a:spcAft>
+                <a:spcPts val="100"/>
+              </a:spcAft>
+            </a:pPr>
+            <a:r>
+              <a:rPr sz="900" b="0">
+                <a:solidFill>
+                  <a:srgbClr val="000000"/>
+                </a:solidFill>
+                <a:latin typeface="TT Commons Pro"/>
+              </a:rPr>
+              <a:t>Impact: +40% non-native speaker participation</a:t>
+            </a:r>
+          </a:p>
+          <a:p>
+            <a:pPr>
+              <a:spcAft>
+                <a:spcPts val="100"/>
+              </a:spcAft>
+            </a:pPr>
+            <a:r>
+              <a:rPr sz="300" b="0">
+                <a:solidFill>
+                  <a:srgbClr val="000000"/>
+                </a:solidFill>
+                <a:latin typeface="TT Commons Pro"/>
+              </a:rPr>
+              <a:t/>
+            </a:r>
+          </a:p>
+          <a:p>
+            <a:pPr>
+              <a:spcAft>
+                <a:spcPts val="100"/>
+              </a:spcAft>
+            </a:pPr>
+            <a:r>
+              <a:rPr sz="1100" b="1">
+                <a:solidFill>
+                  <a:srgbClr val="049FD9"/>
+                </a:solidFill>
+                <a:latin typeface="TT Commons Pro"/>
+              </a:rPr>
+              <a:t>Problem 3: Weak Ecosystem</a:t>
+            </a:r>
+          </a:p>
+          <a:p>
+            <a:pPr>
+              <a:spcAft>
+                <a:spcPts val="100"/>
+              </a:spcAft>
+            </a:pPr>
+            <a:r>
+              <a:rPr sz="900" b="0">
+                <a:solidFill>
+                  <a:srgbClr val="000000"/>
+                </a:solidFill>
+                <a:latin typeface="TT Commons Pro"/>
+              </a:rPr>
+              <a:t>Solution: Secure AI Agent Marketplace (Cisco certified)</a:t>
+            </a:r>
+          </a:p>
+          <a:p>
+            <a:pPr>
+              <a:spcAft>
+                <a:spcPts val="100"/>
+              </a:spcAft>
+            </a:pPr>
+            <a:r>
+              <a:rPr sz="900" b="0">
+                <a:solidFill>
+                  <a:srgbClr val="000000"/>
+                </a:solidFill>
+                <a:latin typeface="TT Commons Pro"/>
+              </a:rPr>
+              <a:t>Impact: 500+ agents Yr 1, $50M commission by FY2029</a:t>
+            </a:r>
+          </a:p>
+          <a:p>
+            <a:pPr>
+              <a:spcAft>
+                <a:spcPts val="100"/>
               </a:spcAft>
             </a:pPr>
             <a:r>
@@ -11346,177 +11087,17 @@
           <a:p>
             <a:pPr>
               <a:spcAft>
-                <a:spcPts val="200"/>
-              </a:spcAft>
-            </a:pPr>
-            <a:r>
-              <a:rPr sz="1200" b="1">
+                <a:spcPts val="100"/>
+              </a:spcAft>
+            </a:pPr>
+            <a:r>
+              <a:rPr sz="1100" b="1">
                 <a:solidFill>
                   <a:srgbClr val="049FD9"/>
                 </a:solidFill>
                 <a:latin typeface="TT Commons Pro"/>
               </a:rPr>
-              <a:t>Problem 2: Participation Exclusion</a:t>
-            </a:r>
-          </a:p>
-          <a:p>
-            <a:pPr>
-              <a:spcAft>
-                <a:spcPts val="200"/>
-              </a:spcAft>
-            </a:pPr>
-            <a:r>
-              <a:rPr sz="1100" b="0">
-                <a:solidFill>
-                  <a:srgbClr val="000000"/>
-                </a:solidFill>
-                <a:latin typeface="TT Commons Pro"/>
-              </a:rPr>
-              <a:t>Non-native speakers and non-technical users are excluded from full participation.</a:t>
-            </a:r>
-          </a:p>
-          <a:p>
-            <a:pPr>
-              <a:spcAft>
-                <a:spcPts val="200"/>
-              </a:spcAft>
-            </a:pPr>
-            <a:r>
-              <a:rPr sz="1100" b="0">
-                <a:solidFill>
-                  <a:srgbClr val="000000"/>
-                </a:solidFill>
-                <a:latin typeface="TT Commons Pro"/>
-              </a:rPr>
-              <a:t>Solution: VIBE - voice boost, live translation (100+ languages), type-to-speak, Simple Mode.</a:t>
-            </a:r>
-          </a:p>
-          <a:p>
-            <a:pPr>
-              <a:spcAft>
-                <a:spcPts val="200"/>
-              </a:spcAft>
-            </a:pPr>
-            <a:r>
-              <a:rPr sz="1000" b="0">
-                <a:solidFill>
-                  <a:srgbClr val="000000"/>
-                </a:solidFill>
-                <a:latin typeface="TT Commons Pro"/>
-              </a:rPr>
-              <a:t>Impact: +40% non-native speaker participation.</a:t>
-            </a:r>
-          </a:p>
-          <a:p>
-            <a:pPr>
-              <a:spcAft>
-                <a:spcPts val="200"/>
-              </a:spcAft>
-            </a:pPr>
-            <a:r>
-              <a:rPr sz="400" b="0">
-                <a:solidFill>
-                  <a:srgbClr val="000000"/>
-                </a:solidFill>
-                <a:latin typeface="TT Commons Pro"/>
-              </a:rPr>
-              <a:t/>
-            </a:r>
-          </a:p>
-          <a:p>
-            <a:pPr>
-              <a:spcAft>
-                <a:spcPts val="200"/>
-              </a:spcAft>
-            </a:pPr>
-            <a:r>
-              <a:rPr sz="1200" b="1">
-                <a:solidFill>
-                  <a:srgbClr val="049FD9"/>
-                </a:solidFill>
-                <a:latin typeface="TT Commons Pro"/>
-              </a:rPr>
-              <a:t>Problem 3: Weak Developer Ecosystem</a:t>
-            </a:r>
-          </a:p>
-          <a:p>
-            <a:pPr>
-              <a:spcAft>
-                <a:spcPts val="200"/>
-              </a:spcAft>
-            </a:pPr>
-            <a:r>
-              <a:rPr sz="1100" b="0">
-                <a:solidFill>
-                  <a:srgbClr val="000000"/>
-                </a:solidFill>
-                <a:latin typeface="TT Commons Pro"/>
-              </a:rPr>
-              <a:t>Teams: 2,000+ integrations. Zoom: 2,500+. No AI agent marketplace exists anywhere.</a:t>
-            </a:r>
-          </a:p>
-          <a:p>
-            <a:pPr>
-              <a:spcAft>
-                <a:spcPts val="200"/>
-              </a:spcAft>
-            </a:pPr>
-            <a:r>
-              <a:rPr sz="1100" b="0">
-                <a:solidFill>
-                  <a:srgbClr val="000000"/>
-                </a:solidFill>
-                <a:latin typeface="TT Commons Pro"/>
-              </a:rPr>
-              <a:t>Solution: Secure AI Agent Marketplace with Cisco certification + Splunk monitoring.</a:t>
-            </a:r>
-          </a:p>
-          <a:p>
-            <a:pPr>
-              <a:spcAft>
-                <a:spcPts val="200"/>
-              </a:spcAft>
-            </a:pPr>
-            <a:r>
-              <a:rPr sz="1000" b="0">
-                <a:solidFill>
-                  <a:srgbClr val="000000"/>
-                </a:solidFill>
-                <a:latin typeface="TT Commons Pro"/>
-              </a:rPr>
-              <a:t>Impact: 500+ certified agents Year 1, $50M annual commission by FY2029.</a:t>
-            </a:r>
-          </a:p>
-          <a:p>
-            <a:pPr>
-              <a:spcAft>
-                <a:spcPts val="200"/>
-              </a:spcAft>
-            </a:pPr>
-            <a:r>
-              <a:rPr sz="600" b="0">
-                <a:solidFill>
-                  <a:srgbClr val="000000"/>
-                </a:solidFill>
-                <a:latin typeface="TT Commons Pro"/>
-              </a:rPr>
-              <a:t/>
-            </a:r>
-          </a:p>
-          <a:p>
-            <a:pPr>
-              <a:spcAft>
-                <a:spcPts val="200"/>
-              </a:spcAft>
-            </a:pPr>
-            <a:r>
-              <a:rPr sz="1200" b="1">
-                <a:solidFill>
-                  <a:srgbClr val="049FD9"/>
-                </a:solidFill>
-                <a:latin typeface="TT Commons Pro"/>
-              </a:rPr>
-              <a:t>Combined: +$2.1B incremental ARR by FY2029  |  $4,200 saved per worker/year  |  85% renewal rate</a:t>
+              <a:t>Combined: +$2.1B ARR by FY2029 | $4,200/worker/yr | 85% renewal</a:t>
             </a:r>
           </a:p>
         </p:txBody>
@@ -12250,7 +11831,7 @@
                 <a:cs typeface="TT Commons Pro Bold"/>
                 <a:sym typeface="TT Commons Pro Bold"/>
               </a:rPr>
-              <a:t>Appendix A:  Detailed Technical Flowcharts (see attached PDF document)</a:t>
+              <a:t>Appendix A:  Detailed Technical Flowcharts</a:t>
             </a:r>
           </a:p>
           <a:p>
@@ -12272,7 +11853,7 @@
                 <a:cs typeface="TT Commons Pro Bold"/>
                 <a:sym typeface="TT Commons Pro Bold"/>
               </a:rPr>
-              <a:t>Appendix B:  Technical Feasibility &amp; Scalability Assessment</a:t>
+              <a:t>Appendix B:  Feasibility &amp; Scalability Assessment</a:t>
             </a:r>
           </a:p>
           <a:p>
@@ -12294,7 +11875,7 @@
                 <a:cs typeface="TT Commons Pro Bold"/>
                 <a:sym typeface="TT Commons Pro Bold"/>
               </a:rPr>
-              <a:t>Appendix C:  Full References &amp; Source List</a:t>
+              <a:t>Appendix C:  References &amp; Sources</a:t>
             </a:r>
           </a:p>
         </p:txBody>
@@ -12599,7 +12180,7 @@
         <p:spPr>
           <a:xfrm>
             <a:off x="914400" y="1463040"/>
-            <a:ext cx="16459200" cy="7772400"/>
+            <a:ext cx="16459200" cy="7315200"/>
           </a:xfrm>
           <a:prstGeom prst="rect">
             <a:avLst/>
@@ -12614,209 +12195,209 @@
           <a:p>
             <a:pPr>
               <a:spcAft>
-                <a:spcPts val="200"/>
-              </a:spcAft>
-            </a:pPr>
-            <a:r>
-              <a:rPr sz="900" b="0">
-                <a:solidFill>
-                  <a:srgbClr val="000000"/>
-                </a:solidFill>
-                <a:latin typeface="TT Commons Pro"/>
-              </a:rPr>
-              <a:t>1. Cisco Systems. (2024). Annual Report (Form 10-K), FY2024.</a:t>
-            </a:r>
-          </a:p>
-          <a:p>
-            <a:pPr>
-              <a:spcAft>
-                <a:spcPts val="200"/>
-              </a:spcAft>
-            </a:pPr>
-            <a:r>
-              <a:rPr sz="900" b="0">
-                <a:solidFill>
-                  <a:srgbClr val="000000"/>
-                </a:solidFill>
-                <a:latin typeface="TT Commons Pro"/>
-              </a:rPr>
-              <a:t>2. Microsoft Corporation. (2024). Annual Report (Form 10-K), FY2024.</a:t>
-            </a:r>
-          </a:p>
-          <a:p>
-            <a:pPr>
-              <a:spcAft>
-                <a:spcPts val="200"/>
-              </a:spcAft>
-            </a:pPr>
-            <a:r>
-              <a:rPr sz="900" b="0">
-                <a:solidFill>
-                  <a:srgbClr val="000000"/>
-                </a:solidFill>
-                <a:latin typeface="TT Commons Pro"/>
-              </a:rPr>
-              <a:t>3. Zoom Video Communications. (2025). Annual Report (Form 10-K), FY2025.</a:t>
-            </a:r>
-          </a:p>
-          <a:p>
-            <a:pPr>
-              <a:spcAft>
-                <a:spcPts val="200"/>
-              </a:spcAft>
-            </a:pPr>
-            <a:r>
-              <a:rPr sz="900" b="0">
-                <a:solidFill>
-                  <a:srgbClr val="000000"/>
-                </a:solidFill>
-                <a:latin typeface="TT Commons Pro"/>
-              </a:rPr>
-              <a:t>4. IDC. (2024). Worldwide Unified Communications &amp; Collaboration Market Tracker.</a:t>
-            </a:r>
-          </a:p>
-          <a:p>
-            <a:pPr>
-              <a:spcAft>
-                <a:spcPts val="200"/>
-              </a:spcAft>
-            </a:pPr>
-            <a:r>
-              <a:rPr sz="900" b="0">
-                <a:solidFill>
-                  <a:srgbClr val="000000"/>
-                </a:solidFill>
-                <a:latin typeface="TT Commons Pro"/>
-              </a:rPr>
-              <a:t>5. Gartner. (2024). Future of Work Survey: Hybrid Work Trends.</a:t>
-            </a:r>
-          </a:p>
-          <a:p>
-            <a:pPr>
-              <a:spcAft>
-                <a:spcPts val="200"/>
-              </a:spcAft>
-            </a:pPr>
-            <a:r>
-              <a:rPr sz="900" b="0">
-                <a:solidFill>
-                  <a:srgbClr val="000000"/>
-                </a:solidFill>
-                <a:latin typeface="TT Commons Pro"/>
-              </a:rPr>
-              <a:t>6. McKinsey &amp; Company. (2024). Future of Work Report: Meeting Productivity.</a:t>
-            </a:r>
-          </a:p>
-          <a:p>
-            <a:pPr>
-              <a:spcAft>
-                <a:spcPts val="200"/>
-              </a:spcAft>
-            </a:pPr>
-            <a:r>
-              <a:rPr sz="900" b="0">
-                <a:solidFill>
-                  <a:srgbClr val="000000"/>
-                </a:solidFill>
-                <a:latin typeface="TT Commons Pro"/>
-              </a:rPr>
-              <a:t>7. MarketsandMarkets. (2024). Agentic AI Market Report: Global Forecast to 2030.</a:t>
-            </a:r>
-          </a:p>
-          <a:p>
-            <a:pPr>
-              <a:spcAft>
-                <a:spcPts val="200"/>
-              </a:spcAft>
-            </a:pPr>
-            <a:r>
-              <a:rPr sz="900" b="0">
-                <a:solidFill>
-                  <a:srgbClr val="000000"/>
-                </a:solidFill>
-                <a:latin typeface="TT Commons Pro"/>
-              </a:rPr>
-              <a:t>8. Microsoft. (2024). Work Trend Index: Workplace Trends and Meeting Culture.</a:t>
-            </a:r>
-          </a:p>
-          <a:p>
-            <a:pPr>
-              <a:spcAft>
-                <a:spcPts val="200"/>
-              </a:spcAft>
-            </a:pPr>
-            <a:r>
-              <a:rPr sz="900" b="0">
-                <a:solidFill>
-                  <a:srgbClr val="000000"/>
-                </a:solidFill>
-                <a:latin typeface="TT Commons Pro"/>
-              </a:rPr>
-              <a:t>9. Cisco Webex. (2025). AI Assistant and AI Codec Technical Documentation.</a:t>
-            </a:r>
-          </a:p>
-          <a:p>
-            <a:pPr>
-              <a:spcAft>
-                <a:spcPts val="200"/>
-              </a:spcAft>
-            </a:pPr>
-            <a:r>
-              <a:rPr sz="900" b="0">
-                <a:solidFill>
-                  <a:srgbClr val="000000"/>
-                </a:solidFill>
-                <a:latin typeface="TT Commons Pro"/>
-              </a:rPr>
-              <a:t>10. Microsoft. (2025). Microsoft 365 Copilot Product Documentation.</a:t>
-            </a:r>
-          </a:p>
-          <a:p>
-            <a:pPr>
-              <a:spcAft>
-                <a:spcPts val="200"/>
-              </a:spcAft>
-            </a:pPr>
-            <a:r>
-              <a:rPr sz="900" b="0">
-                <a:solidFill>
-                  <a:srgbClr val="000000"/>
-                </a:solidFill>
-                <a:latin typeface="TT Commons Pro"/>
-              </a:rPr>
-              <a:t>11. Zoom. (2025). Zoom AI Companion 2.0 Product Documentation.</a:t>
-            </a:r>
-          </a:p>
-          <a:p>
-            <a:pPr>
-              <a:spcAft>
-                <a:spcPts val="200"/>
-              </a:spcAft>
-            </a:pPr>
-            <a:r>
-              <a:rPr sz="900" b="0">
-                <a:solidFill>
-                  <a:srgbClr val="000000"/>
-                </a:solidFill>
-                <a:latin typeface="TT Commons Pro"/>
-              </a:rPr>
-              <a:t>12. Salesforce. (2024). AppExchange Marketplace Economics Model.</a:t>
-            </a:r>
-          </a:p>
-          <a:p>
-            <a:pPr>
-              <a:spcAft>
-                <a:spcPts val="200"/>
-              </a:spcAft>
-            </a:pPr>
-            <a:r>
-              <a:rPr sz="900" b="0">
-                <a:solidFill>
-                  <a:srgbClr val="000000"/>
-                </a:solidFill>
-                <a:latin typeface="TT Commons Pro"/>
-              </a:rPr>
-              <a:t>13. Gartner. (2024). DEI in Technology Procurement Report.</a:t>
+                <a:spcPts val="100"/>
+              </a:spcAft>
+            </a:pPr>
+            <a:r>
+              <a:rPr sz="800" b="0">
+                <a:solidFill>
+                  <a:srgbClr val="000000"/>
+                </a:solidFill>
+                <a:latin typeface="TT Commons Pro"/>
+              </a:rPr>
+              <a:t>1. Cisco Systems. (2024). 10-K, FY2024.</a:t>
+            </a:r>
+          </a:p>
+          <a:p>
+            <a:pPr>
+              <a:spcAft>
+                <a:spcPts val="100"/>
+              </a:spcAft>
+            </a:pPr>
+            <a:r>
+              <a:rPr sz="800" b="0">
+                <a:solidFill>
+                  <a:srgbClr val="000000"/>
+                </a:solidFill>
+                <a:latin typeface="TT Commons Pro"/>
+              </a:rPr>
+              <a:t>2. Microsoft Corp. (2024). 10-K, FY2024.</a:t>
+            </a:r>
+          </a:p>
+          <a:p>
+            <a:pPr>
+              <a:spcAft>
+                <a:spcPts val="100"/>
+              </a:spcAft>
+            </a:pPr>
+            <a:r>
+              <a:rPr sz="800" b="0">
+                <a:solidFill>
+                  <a:srgbClr val="000000"/>
+                </a:solidFill>
+                <a:latin typeface="TT Commons Pro"/>
+              </a:rPr>
+              <a:t>3. Zoom Video. (2025). 10-K, FY2025.</a:t>
+            </a:r>
+          </a:p>
+          <a:p>
+            <a:pPr>
+              <a:spcAft>
+                <a:spcPts val="100"/>
+              </a:spcAft>
+            </a:pPr>
+            <a:r>
+              <a:rPr sz="800" b="0">
+                <a:solidFill>
+                  <a:srgbClr val="000000"/>
+                </a:solidFill>
+                <a:latin typeface="TT Commons Pro"/>
+              </a:rPr>
+              <a:t>4. IDC. (2024). UC&amp;C Market Tracker.</a:t>
+            </a:r>
+          </a:p>
+          <a:p>
+            <a:pPr>
+              <a:spcAft>
+                <a:spcPts val="100"/>
+              </a:spcAft>
+            </a:pPr>
+            <a:r>
+              <a:rPr sz="800" b="0">
+                <a:solidFill>
+                  <a:srgbClr val="000000"/>
+                </a:solidFill>
+                <a:latin typeface="TT Commons Pro"/>
+              </a:rPr>
+              <a:t>5. Gartner. (2024). Future of Work Survey.</a:t>
+            </a:r>
+          </a:p>
+          <a:p>
+            <a:pPr>
+              <a:spcAft>
+                <a:spcPts val="100"/>
+              </a:spcAft>
+            </a:pPr>
+            <a:r>
+              <a:rPr sz="800" b="0">
+                <a:solidFill>
+                  <a:srgbClr val="000000"/>
+                </a:solidFill>
+                <a:latin typeface="TT Commons Pro"/>
+              </a:rPr>
+              <a:t>6. McKinsey. (2024). Future of Work Report.</a:t>
+            </a:r>
+          </a:p>
+          <a:p>
+            <a:pPr>
+              <a:spcAft>
+                <a:spcPts val="100"/>
+              </a:spcAft>
+            </a:pPr>
+            <a:r>
+              <a:rPr sz="800" b="0">
+                <a:solidFill>
+                  <a:srgbClr val="000000"/>
+                </a:solidFill>
+                <a:latin typeface="TT Commons Pro"/>
+              </a:rPr>
+              <a:t>7. MarketsandMarkets. (2024). Agentic AI Report.</a:t>
+            </a:r>
+          </a:p>
+          <a:p>
+            <a:pPr>
+              <a:spcAft>
+                <a:spcPts val="100"/>
+              </a:spcAft>
+            </a:pPr>
+            <a:r>
+              <a:rPr sz="800" b="0">
+                <a:solidFill>
+                  <a:srgbClr val="000000"/>
+                </a:solidFill>
+                <a:latin typeface="TT Commons Pro"/>
+              </a:rPr>
+              <a:t>8. Microsoft. (2024). Work Trend Index.</a:t>
+            </a:r>
+          </a:p>
+          <a:p>
+            <a:pPr>
+              <a:spcAft>
+                <a:spcPts val="100"/>
+              </a:spcAft>
+            </a:pPr>
+            <a:r>
+              <a:rPr sz="800" b="0">
+                <a:solidFill>
+                  <a:srgbClr val="000000"/>
+                </a:solidFill>
+                <a:latin typeface="TT Commons Pro"/>
+              </a:rPr>
+              <a:t>9. Cisco Webex. (2025). AI Codec Documentation.</a:t>
+            </a:r>
+          </a:p>
+          <a:p>
+            <a:pPr>
+              <a:spcAft>
+                <a:spcPts val="100"/>
+              </a:spcAft>
+            </a:pPr>
+            <a:r>
+              <a:rPr sz="800" b="0">
+                <a:solidFill>
+                  <a:srgbClr val="000000"/>
+                </a:solidFill>
+                <a:latin typeface="TT Commons Pro"/>
+              </a:rPr>
+              <a:t>10. Microsoft. (2025). Copilot Documentation.</a:t>
+            </a:r>
+          </a:p>
+          <a:p>
+            <a:pPr>
+              <a:spcAft>
+                <a:spcPts val="100"/>
+              </a:spcAft>
+            </a:pPr>
+            <a:r>
+              <a:rPr sz="800" b="0">
+                <a:solidFill>
+                  <a:srgbClr val="000000"/>
+                </a:solidFill>
+                <a:latin typeface="TT Commons Pro"/>
+              </a:rPr>
+              <a:t>11. Zoom. (2025). AI Companion 2.0 Documentation.</a:t>
+            </a:r>
+          </a:p>
+          <a:p>
+            <a:pPr>
+              <a:spcAft>
+                <a:spcPts val="100"/>
+              </a:spcAft>
+            </a:pPr>
+            <a:r>
+              <a:rPr sz="800" b="0">
+                <a:solidFill>
+                  <a:srgbClr val="000000"/>
+                </a:solidFill>
+                <a:latin typeface="TT Commons Pro"/>
+              </a:rPr>
+              <a:t>12. Salesforce. (2024). AppExchange Economics.</a:t>
+            </a:r>
+          </a:p>
+          <a:p>
+            <a:pPr>
+              <a:spcAft>
+                <a:spcPts val="100"/>
+              </a:spcAft>
+            </a:pPr>
+            <a:r>
+              <a:rPr sz="800" b="0">
+                <a:solidFill>
+                  <a:srgbClr val="000000"/>
+                </a:solidFill>
+                <a:latin typeface="TT Commons Pro"/>
+              </a:rPr>
+              <a:t>13. Gartner. (2024). DEI in Tech Procurement.</a:t>
             </a:r>
           </a:p>
         </p:txBody>
@@ -13099,9 +12680,9 @@
               </a:pathLst>
             </a:custGeom>
             <a:blipFill>
-              <a:blip r:embed="rId3"/>
+              <a:blip r:embed="rId5"/>
               <a:stretch>
-                <a:fillRect l="-78303" t="0" r="-78303" b="0"/>
+                <a:fillRect l="0" t="0" r="0" b="0"/>
               </a:stretch>
             </a:blipFill>
           </p:spPr>
@@ -15579,8 +15160,8 @@
         </p:nvSpPr>
         <p:spPr>
           <a:xfrm>
-            <a:off x="1097280" y="4389120"/>
-            <a:ext cx="7772400" cy="5029200"/>
+            <a:off x="1371600" y="2468880"/>
+            <a:ext cx="1463040" cy="1188720"/>
           </a:xfrm>
           <a:prstGeom prst="rect">
             <a:avLst/>
@@ -15595,225 +15176,33 @@
           <a:p>
             <a:pPr>
               <a:spcAft>
-                <a:spcPts val="200"/>
-              </a:spcAft>
-            </a:pPr>
-            <a:r>
-              <a:rPr sz="1400" b="1">
-                <a:solidFill>
-                  <a:srgbClr val="049FD9"/>
-                </a:solidFill>
-                <a:latin typeface="TT Commons Pro"/>
-              </a:rPr>
-              <a:t>Competitive Landscape</a:t>
-            </a:r>
-          </a:p>
-          <a:p>
-            <a:pPr>
-              <a:spcAft>
-                <a:spcPts val="200"/>
-              </a:spcAft>
-            </a:pPr>
-            <a:r>
-              <a:rPr sz="300" b="0">
-                <a:solidFill>
-                  <a:srgbClr val="000000"/>
-                </a:solidFill>
-                <a:latin typeface="TT Commons Pro"/>
-              </a:rPr>
-              <a:t/>
-            </a:r>
-          </a:p>
-          <a:p>
-            <a:pPr>
-              <a:spcAft>
-                <a:spcPts val="200"/>
+                <a:spcPts val="100"/>
               </a:spcAft>
             </a:pPr>
             <a:r>
               <a:rPr sz="1100" b="1">
                 <a:solidFill>
-                  <a:srgbClr val="000000"/>
-                </a:solidFill>
-                <a:latin typeface="TT Commons Pro"/>
-              </a:rPr>
-              <a:t>Microsoft Teams</a:t>
-            </a:r>
-          </a:p>
-          <a:p>
-            <a:pPr>
-              <a:spcAft>
-                <a:spcPts val="200"/>
-              </a:spcAft>
-            </a:pPr>
-            <a:r>
-              <a:rPr sz="1000" b="0">
-                <a:solidFill>
-                  <a:srgbClr val="000000"/>
-                </a:solidFill>
-                <a:latin typeface="TT Commons Pro"/>
-              </a:rPr>
-              <a:t>320M+ monthly active users, 2,000+ integrations</a:t>
-            </a:r>
-          </a:p>
-          <a:p>
-            <a:pPr>
-              <a:spcAft>
-                <a:spcPts val="200"/>
-              </a:spcAft>
-            </a:pPr>
-            <a:r>
-              <a:rPr sz="1000" b="0">
-                <a:solidFill>
-                  <a:srgbClr val="000000"/>
-                </a:solidFill>
-                <a:latin typeface="TT Commons Pro"/>
-              </a:rPr>
-              <a:t>Copilot AI drafts content across Office 365 ecosystem</a:t>
-            </a:r>
-          </a:p>
-          <a:p>
-            <a:pPr>
-              <a:spcAft>
-                <a:spcPts val="200"/>
-              </a:spcAft>
-            </a:pPr>
-            <a:r>
-              <a:rPr sz="300" b="0">
-                <a:solidFill>
-                  <a:srgbClr val="000000"/>
-                </a:solidFill>
-                <a:latin typeface="TT Commons Pro"/>
-              </a:rPr>
-              <a:t/>
-            </a:r>
-          </a:p>
-          <a:p>
-            <a:pPr>
-              <a:spcAft>
-                <a:spcPts val="200"/>
+                  <a:srgbClr val="FFFFFF"/>
+                </a:solidFill>
+                <a:latin typeface="Open Sans"/>
+              </a:rPr>
+              <a:t>Market</a:t>
+            </a:r>
+          </a:p>
+          <a:p>
+            <a:pPr>
+              <a:spcAft>
+                <a:spcPts val="100"/>
               </a:spcAft>
             </a:pPr>
             <a:r>
               <a:rPr sz="1100" b="1">
                 <a:solidFill>
-                  <a:srgbClr val="000000"/>
-                </a:solidFill>
-                <a:latin typeface="TT Commons Pro"/>
-              </a:rPr>
-              <a:t>Zoom</a:t>
-            </a:r>
-          </a:p>
-          <a:p>
-            <a:pPr>
-              <a:spcAft>
-                <a:spcPts val="200"/>
-              </a:spcAft>
-            </a:pPr>
-            <a:r>
-              <a:rPr sz="1000" b="0">
-                <a:solidFill>
-                  <a:srgbClr val="000000"/>
-                </a:solidFill>
-                <a:latin typeface="TT Commons Pro"/>
-              </a:rPr>
-              <a:t>300M+ daily participants, 2,500+ integrations</a:t>
-            </a:r>
-          </a:p>
-          <a:p>
-            <a:pPr>
-              <a:spcAft>
-                <a:spcPts val="200"/>
-              </a:spcAft>
-            </a:pPr>
-            <a:r>
-              <a:rPr sz="1000" b="0">
-                <a:solidFill>
-                  <a:srgbClr val="000000"/>
-                </a:solidFill>
-                <a:latin typeface="TT Commons Pro"/>
-              </a:rPr>
-              <a:t>AI Companion 2.0 with agentic features at no extra cost</a:t>
-            </a:r>
-          </a:p>
-          <a:p>
-            <a:pPr>
-              <a:spcAft>
-                <a:spcPts val="200"/>
-              </a:spcAft>
-            </a:pPr>
-            <a:r>
-              <a:rPr sz="300" b="0">
-                <a:solidFill>
-                  <a:srgbClr val="000000"/>
-                </a:solidFill>
-                <a:latin typeface="TT Commons Pro"/>
-              </a:rPr>
-              <a:t/>
-            </a:r>
-          </a:p>
-          <a:p>
-            <a:pPr>
-              <a:spcAft>
-                <a:spcPts val="200"/>
-              </a:spcAft>
-            </a:pPr>
-            <a:r>
-              <a:rPr sz="1100" b="1">
-                <a:solidFill>
-                  <a:srgbClr val="000000"/>
-                </a:solidFill>
-                <a:latin typeface="TT Commons Pro"/>
-              </a:rPr>
-              <a:t>Webex</a:t>
-            </a:r>
-          </a:p>
-          <a:p>
-            <a:pPr>
-              <a:spcAft>
-                <a:spcPts val="200"/>
-              </a:spcAft>
-            </a:pPr>
-            <a:r>
-              <a:rPr sz="1000" b="0">
-                <a:solidFill>
-                  <a:srgbClr val="000000"/>
-                </a:solidFill>
-                <a:latin typeface="TT Commons Pro"/>
-              </a:rPr>
-              <a:t>Strong enterprise/government presence</a:t>
-            </a:r>
-          </a:p>
-          <a:p>
-            <a:pPr>
-              <a:spcAft>
-                <a:spcPts val="200"/>
-              </a:spcAft>
-            </a:pPr>
-            <a:r>
-              <a:rPr sz="1000" b="0">
-                <a:solidFill>
-                  <a:srgbClr val="000000"/>
-                </a:solidFill>
-                <a:latin typeface="TT Commons Pro"/>
-              </a:rPr>
-              <a:t>FedRAMP, HIPAA, SOC 2 Type II certified</a:t>
-            </a:r>
-          </a:p>
-          <a:p>
-            <a:pPr>
-              <a:spcAft>
-                <a:spcPts val="200"/>
-              </a:spcAft>
-            </a:pPr>
-            <a:r>
-              <a:rPr sz="1000" b="0">
-                <a:solidFill>
-                  <a:srgbClr val="000000"/>
-                </a:solidFill>
-                <a:latin typeface="TT Commons Pro"/>
-              </a:rPr>
-              <a:t>AI Codec technology, but smaller ecosystem</a:t>
+                  <a:srgbClr val="FFFFFF"/>
+                </a:solidFill>
+                <a:latin typeface="Open Sans"/>
+              </a:rPr>
+              <a:t>Trends</a:t>
             </a:r>
           </a:p>
         </p:txBody>
@@ -15826,8 +15215,8 @@
         </p:nvSpPr>
         <p:spPr>
           <a:xfrm>
-            <a:off x="9601200" y="4389120"/>
-            <a:ext cx="7772400" cy="5029200"/>
+            <a:off x="3657600" y="2468880"/>
+            <a:ext cx="1463040" cy="1188720"/>
           </a:xfrm>
           <a:prstGeom prst="rect">
             <a:avLst/>
@@ -15842,193 +15231,33 @@
           <a:p>
             <a:pPr>
               <a:spcAft>
-                <a:spcPts val="200"/>
-              </a:spcAft>
-            </a:pPr>
-            <a:r>
-              <a:rPr sz="1400" b="1">
-                <a:solidFill>
-                  <a:srgbClr val="049FD9"/>
-                </a:solidFill>
-                <a:latin typeface="TT Commons Pro"/>
-              </a:rPr>
-              <a:t>Cisco Webex Strengths</a:t>
-            </a:r>
-          </a:p>
-          <a:p>
-            <a:pPr>
-              <a:spcAft>
-                <a:spcPts val="200"/>
-              </a:spcAft>
-            </a:pPr>
-            <a:r>
-              <a:rPr sz="300" b="0">
-                <a:solidFill>
-                  <a:srgbClr val="000000"/>
-                </a:solidFill>
-                <a:latin typeface="TT Commons Pro"/>
-              </a:rPr>
-              <a:t/>
-            </a:r>
-          </a:p>
-          <a:p>
-            <a:pPr>
-              <a:spcAft>
-                <a:spcPts val="200"/>
-              </a:spcAft>
-            </a:pPr>
-            <a:r>
-              <a:rPr sz="1000" b="0">
-                <a:solidFill>
-                  <a:srgbClr val="000000"/>
-                </a:solidFill>
-                <a:latin typeface="TT Commons Pro"/>
-              </a:rPr>
-              <a:t>$7.98B annual R&amp;D budget</a:t>
-            </a:r>
-          </a:p>
-          <a:p>
-            <a:pPr>
-              <a:spcAft>
-                <a:spcPts val="200"/>
-              </a:spcAft>
-            </a:pPr>
-            <a:r>
-              <a:rPr sz="1000" b="0">
-                <a:solidFill>
-                  <a:srgbClr val="000000"/>
-                </a:solidFill>
-                <a:latin typeface="TT Commons Pro"/>
-              </a:rPr>
-              <a:t>$28B Splunk acquisition for observability</a:t>
-            </a:r>
-          </a:p>
-          <a:p>
-            <a:pPr>
-              <a:spcAft>
-                <a:spcPts val="200"/>
-              </a:spcAft>
-            </a:pPr>
-            <a:r>
-              <a:rPr sz="1000" b="0">
-                <a:solidFill>
-                  <a:srgbClr val="000000"/>
-                </a:solidFill>
-                <a:latin typeface="TT Commons Pro"/>
-              </a:rPr>
-              <a:t>600M+ meeting minutes processed monthly</a:t>
-            </a:r>
-          </a:p>
-          <a:p>
-            <a:pPr>
-              <a:spcAft>
-                <a:spcPts val="200"/>
-              </a:spcAft>
-            </a:pPr>
-            <a:r>
-              <a:rPr sz="1000" b="0">
-                <a:solidFill>
-                  <a:srgbClr val="000000"/>
-                </a:solidFill>
-                <a:latin typeface="TT Commons Pro"/>
-              </a:rPr>
-              <a:t>Industry-leading Webex AI Codec pipeline</a:t>
-            </a:r>
-          </a:p>
-          <a:p>
-            <a:pPr>
-              <a:spcAft>
-                <a:spcPts val="200"/>
-              </a:spcAft>
-            </a:pPr>
-            <a:r>
-              <a:rPr sz="500" b="0">
-                <a:solidFill>
-                  <a:srgbClr val="000000"/>
-                </a:solidFill>
-                <a:latin typeface="TT Commons Pro"/>
-              </a:rPr>
-              <a:t/>
-            </a:r>
-          </a:p>
-          <a:p>
-            <a:pPr>
-              <a:spcAft>
-                <a:spcPts val="200"/>
-              </a:spcAft>
-            </a:pPr>
-            <a:r>
-              <a:rPr sz="1400" b="1">
-                <a:solidFill>
-                  <a:srgbClr val="049FD9"/>
-                </a:solidFill>
-                <a:latin typeface="TT Commons Pro"/>
-              </a:rPr>
-              <a:t>Market Opportunity</a:t>
-            </a:r>
-          </a:p>
-          <a:p>
-            <a:pPr>
-              <a:spcAft>
-                <a:spcPts val="200"/>
-              </a:spcAft>
-            </a:pPr>
-            <a:r>
-              <a:rPr sz="300" b="0">
-                <a:solidFill>
-                  <a:srgbClr val="000000"/>
-                </a:solidFill>
-                <a:latin typeface="TT Commons Pro"/>
-              </a:rPr>
-              <a:t/>
-            </a:r>
-          </a:p>
-          <a:p>
-            <a:pPr>
-              <a:spcAft>
-                <a:spcPts val="200"/>
-              </a:spcAft>
-            </a:pPr>
-            <a:r>
-              <a:rPr sz="1000" b="0">
-                <a:solidFill>
-                  <a:srgbClr val="000000"/>
-                </a:solidFill>
-                <a:latin typeface="TT Commons Pro"/>
-              </a:rPr>
-              <a:t>Agentic AI market: $65.5B by 2030 (45% CAGR)</a:t>
-            </a:r>
-          </a:p>
-          <a:p>
-            <a:pPr>
-              <a:spcAft>
-                <a:spcPts val="200"/>
-              </a:spcAft>
-            </a:pPr>
-            <a:r>
-              <a:rPr sz="1000" b="0">
-                <a:solidFill>
-                  <a:srgbClr val="000000"/>
-                </a:solidFill>
-                <a:latin typeface="TT Commons Pro"/>
-              </a:rPr>
-              <a:t>74% of enterprises adopting permanent hybrid models</a:t>
-            </a:r>
-          </a:p>
-          <a:p>
-            <a:pPr>
-              <a:spcAft>
-                <a:spcPts val="200"/>
-              </a:spcAft>
-            </a:pPr>
-            <a:r>
-              <a:rPr sz="1000" b="0">
-                <a:solidFill>
-                  <a:srgbClr val="000000"/>
-                </a:solidFill>
-                <a:latin typeface="TT Commons Pro"/>
-              </a:rPr>
-              <a:t>No platform has launched an AI agent marketplace</a:t>
+                <a:spcPts val="100"/>
+              </a:spcAft>
+            </a:pPr>
+            <a:r>
+              <a:rPr sz="1000" b="1">
+                <a:solidFill>
+                  <a:srgbClr val="FFFFFF"/>
+                </a:solidFill>
+                <a:latin typeface="Open Sans"/>
+              </a:rPr>
+              <a:t>Competitive</a:t>
+            </a:r>
+          </a:p>
+          <a:p>
+            <a:pPr>
+              <a:spcAft>
+                <a:spcPts val="100"/>
+              </a:spcAft>
+            </a:pPr>
+            <a:r>
+              <a:rPr sz="1100" b="1">
+                <a:solidFill>
+                  <a:srgbClr val="FFFFFF"/>
+                </a:solidFill>
+                <a:latin typeface="Open Sans"/>
+              </a:rPr>
+              <a:t>Gap</a:t>
             </a:r>
           </a:p>
         </p:txBody>
@@ -16041,8 +15270,8 @@
         </p:nvSpPr>
         <p:spPr>
           <a:xfrm>
-            <a:off x="1371600" y="2377440"/>
-            <a:ext cx="1645920" cy="1371600"/>
+            <a:off x="5943600" y="2468880"/>
+            <a:ext cx="1463040" cy="1188720"/>
           </a:xfrm>
           <a:prstGeom prst="rect">
             <a:avLst/>
@@ -16057,33 +15286,33 @@
           <a:p>
             <a:pPr>
               <a:spcAft>
-                <a:spcPts val="200"/>
-              </a:spcAft>
-            </a:pPr>
-            <a:r>
-              <a:rPr sz="1200" b="1">
+                <a:spcPts val="100"/>
+              </a:spcAft>
+            </a:pPr>
+            <a:r>
+              <a:rPr sz="1100" b="1">
                 <a:solidFill>
                   <a:srgbClr val="FFFFFF"/>
                 </a:solidFill>
                 <a:latin typeface="Open Sans"/>
               </a:rPr>
-              <a:t>Market</a:t>
-            </a:r>
-          </a:p>
-          <a:p>
-            <a:pPr>
-              <a:spcAft>
-                <a:spcPts val="200"/>
-              </a:spcAft>
-            </a:pPr>
-            <a:r>
-              <a:rPr sz="1200" b="1">
+              <a:t>Cisco</a:t>
+            </a:r>
+          </a:p>
+          <a:p>
+            <a:pPr>
+              <a:spcAft>
+                <a:spcPts val="100"/>
+              </a:spcAft>
+            </a:pPr>
+            <a:r>
+              <a:rPr sz="1100" b="1">
                 <a:solidFill>
                   <a:srgbClr val="FFFFFF"/>
                 </a:solidFill>
                 <a:latin typeface="Open Sans"/>
               </a:rPr>
-              <a:t>Trends</a:t>
+              <a:t>Edge</a:t>
             </a:r>
           </a:p>
         </p:txBody>
@@ -16096,8 +15325,8 @@
         </p:nvSpPr>
         <p:spPr>
           <a:xfrm>
-            <a:off x="3657600" y="2377440"/>
-            <a:ext cx="1645920" cy="1371600"/>
+            <a:off x="1097280" y="4572000"/>
+            <a:ext cx="7315200" cy="4572000"/>
           </a:xfrm>
           <a:prstGeom prst="rect">
             <a:avLst/>
@@ -16112,33 +15341,177 @@
           <a:p>
             <a:pPr>
               <a:spcAft>
-                <a:spcPts val="200"/>
-              </a:spcAft>
-            </a:pPr>
-            <a:r>
-              <a:rPr sz="1100" b="1">
-                <a:solidFill>
-                  <a:srgbClr val="FFFFFF"/>
-                </a:solidFill>
-                <a:latin typeface="Open Sans"/>
-              </a:rPr>
-              <a:t>Competitive</a:t>
-            </a:r>
-          </a:p>
-          <a:p>
-            <a:pPr>
-              <a:spcAft>
-                <a:spcPts val="200"/>
+                <a:spcPts val="100"/>
+              </a:spcAft>
+            </a:pPr>
+            <a:r>
+              <a:rPr sz="1300" b="1">
+                <a:solidFill>
+                  <a:srgbClr val="049FD9"/>
+                </a:solidFill>
+                <a:latin typeface="TT Commons Pro"/>
+              </a:rPr>
+              <a:t>Competitive Landscape</a:t>
+            </a:r>
+          </a:p>
+          <a:p>
+            <a:pPr>
+              <a:spcAft>
+                <a:spcPts val="100"/>
+              </a:spcAft>
+            </a:pPr>
+            <a:r>
+              <a:rPr sz="200" b="0">
+                <a:solidFill>
+                  <a:srgbClr val="000000"/>
+                </a:solidFill>
+                <a:latin typeface="TT Commons Pro"/>
+              </a:rPr>
+              <a:t/>
+            </a:r>
+          </a:p>
+          <a:p>
+            <a:pPr>
+              <a:spcAft>
+                <a:spcPts val="100"/>
+              </a:spcAft>
+            </a:pPr>
+            <a:r>
+              <a:rPr sz="900" b="0">
+                <a:solidFill>
+                  <a:srgbClr val="000000"/>
+                </a:solidFill>
+                <a:latin typeface="TT Commons Pro"/>
+              </a:rPr>
+              <a:t>Microsoft Teams: 320M+ users, 2,000+ apps, Copilot AI</a:t>
+            </a:r>
+          </a:p>
+          <a:p>
+            <a:pPr>
+              <a:spcAft>
+                <a:spcPts val="100"/>
+              </a:spcAft>
+            </a:pPr>
+            <a:r>
+              <a:rPr sz="900" b="0">
+                <a:solidFill>
+                  <a:srgbClr val="000000"/>
+                </a:solidFill>
+                <a:latin typeface="TT Commons Pro"/>
+              </a:rPr>
+              <a:t>Zoom: 300M+ participants, 2,500+ apps, AI Companion</a:t>
+            </a:r>
+          </a:p>
+          <a:p>
+            <a:pPr>
+              <a:spcAft>
+                <a:spcPts val="100"/>
+              </a:spcAft>
+            </a:pPr>
+            <a:r>
+              <a:rPr sz="900" b="0">
+                <a:solidFill>
+                  <a:srgbClr val="000000"/>
+                </a:solidFill>
+                <a:latin typeface="TT Commons Pro"/>
+              </a:rPr>
+              <a:t>Webex: FedRAMP/HIPAA certified, AI Codec, smaller ecosystem</a:t>
+            </a:r>
+          </a:p>
+          <a:p>
+            <a:pPr>
+              <a:spcAft>
+                <a:spcPts val="100"/>
+              </a:spcAft>
+            </a:pPr>
+            <a:r>
+              <a:rPr sz="200" b="0">
+                <a:solidFill>
+                  <a:srgbClr val="000000"/>
+                </a:solidFill>
+                <a:latin typeface="TT Commons Pro"/>
+              </a:rPr>
+              <a:t/>
+            </a:r>
+          </a:p>
+          <a:p>
+            <a:pPr>
+              <a:spcAft>
+                <a:spcPts val="100"/>
               </a:spcAft>
             </a:pPr>
             <a:r>
               <a:rPr sz="1200" b="1">
                 <a:solidFill>
-                  <a:srgbClr val="FFFFFF"/>
-                </a:solidFill>
-                <a:latin typeface="Open Sans"/>
-              </a:rPr>
-              <a:t>Gap</a:t>
+                  <a:srgbClr val="049FD9"/>
+                </a:solidFill>
+                <a:latin typeface="TT Commons Pro"/>
+              </a:rPr>
+              <a:t>Key Trends</a:t>
+            </a:r>
+          </a:p>
+          <a:p>
+            <a:pPr>
+              <a:spcAft>
+                <a:spcPts val="100"/>
+              </a:spcAft>
+            </a:pPr>
+            <a:r>
+              <a:rPr sz="200" b="0">
+                <a:solidFill>
+                  <a:srgbClr val="000000"/>
+                </a:solidFill>
+                <a:latin typeface="TT Commons Pro"/>
+              </a:rPr>
+              <a:t/>
+            </a:r>
+          </a:p>
+          <a:p>
+            <a:pPr>
+              <a:spcAft>
+                <a:spcPts val="100"/>
+              </a:spcAft>
+            </a:pPr>
+            <a:r>
+              <a:rPr sz="900" b="0">
+                <a:solidFill>
+                  <a:srgbClr val="000000"/>
+                </a:solidFill>
+                <a:latin typeface="TT Commons Pro"/>
+              </a:rPr>
+              <a:t>Agentic AI market: $65.5B by 2030 (45% CAGR)</a:t>
+            </a:r>
+          </a:p>
+          <a:p>
+            <a:pPr>
+              <a:spcAft>
+                <a:spcPts val="100"/>
+              </a:spcAft>
+            </a:pPr>
+            <a:r>
+              <a:rPr sz="900" b="0">
+                <a:solidFill>
+                  <a:srgbClr val="000000"/>
+                </a:solidFill>
+                <a:latin typeface="TT Commons Pro"/>
+              </a:rPr>
+              <a:t>74% of enterprises adopting permanent hybrid</a:t>
+            </a:r>
+          </a:p>
+          <a:p>
+            <a:pPr>
+              <a:spcAft>
+                <a:spcPts val="100"/>
+              </a:spcAft>
+            </a:pPr>
+            <a:r>
+              <a:rPr sz="900" b="0">
+                <a:solidFill>
+                  <a:srgbClr val="000000"/>
+                </a:solidFill>
+                <a:latin typeface="TT Commons Pro"/>
+              </a:rPr>
+              <a:t>No platform has an AI agent marketplace yet</a:t>
             </a:r>
           </a:p>
         </p:txBody>
@@ -16151,8 +15524,8 @@
         </p:nvSpPr>
         <p:spPr>
           <a:xfrm>
-            <a:off x="5943600" y="2377440"/>
-            <a:ext cx="1645920" cy="1371600"/>
+            <a:off x="9601200" y="4572000"/>
+            <a:ext cx="7315200" cy="4572000"/>
           </a:xfrm>
           <a:prstGeom prst="rect">
             <a:avLst/>
@@ -16167,33 +15540,177 @@
           <a:p>
             <a:pPr>
               <a:spcAft>
-                <a:spcPts val="200"/>
+                <a:spcPts val="100"/>
+              </a:spcAft>
+            </a:pPr>
+            <a:r>
+              <a:rPr sz="1300" b="1">
+                <a:solidFill>
+                  <a:srgbClr val="049FD9"/>
+                </a:solidFill>
+                <a:latin typeface="TT Commons Pro"/>
+              </a:rPr>
+              <a:t>Cisco Strengths</a:t>
+            </a:r>
+          </a:p>
+          <a:p>
+            <a:pPr>
+              <a:spcAft>
+                <a:spcPts val="100"/>
+              </a:spcAft>
+            </a:pPr>
+            <a:r>
+              <a:rPr sz="200" b="0">
+                <a:solidFill>
+                  <a:srgbClr val="000000"/>
+                </a:solidFill>
+                <a:latin typeface="TT Commons Pro"/>
+              </a:rPr>
+              <a:t/>
+            </a:r>
+          </a:p>
+          <a:p>
+            <a:pPr>
+              <a:spcAft>
+                <a:spcPts val="100"/>
+              </a:spcAft>
+            </a:pPr>
+            <a:r>
+              <a:rPr sz="900" b="0">
+                <a:solidFill>
+                  <a:srgbClr val="000000"/>
+                </a:solidFill>
+                <a:latin typeface="TT Commons Pro"/>
+              </a:rPr>
+              <a:t>$7.98B annual R&amp;D budget</a:t>
+            </a:r>
+          </a:p>
+          <a:p>
+            <a:pPr>
+              <a:spcAft>
+                <a:spcPts val="100"/>
+              </a:spcAft>
+            </a:pPr>
+            <a:r>
+              <a:rPr sz="900" b="0">
+                <a:solidFill>
+                  <a:srgbClr val="000000"/>
+                </a:solidFill>
+                <a:latin typeface="TT Commons Pro"/>
+              </a:rPr>
+              <a:t>$28B Splunk acquisition for observability</a:t>
+            </a:r>
+          </a:p>
+          <a:p>
+            <a:pPr>
+              <a:spcAft>
+                <a:spcPts val="100"/>
+              </a:spcAft>
+            </a:pPr>
+            <a:r>
+              <a:rPr sz="900" b="0">
+                <a:solidFill>
+                  <a:srgbClr val="000000"/>
+                </a:solidFill>
+                <a:latin typeface="TT Commons Pro"/>
+              </a:rPr>
+              <a:t>600M+ meeting minutes processed monthly</a:t>
+            </a:r>
+          </a:p>
+          <a:p>
+            <a:pPr>
+              <a:spcAft>
+                <a:spcPts val="100"/>
+              </a:spcAft>
+            </a:pPr>
+            <a:r>
+              <a:rPr sz="900" b="0">
+                <a:solidFill>
+                  <a:srgbClr val="000000"/>
+                </a:solidFill>
+                <a:latin typeface="TT Commons Pro"/>
+              </a:rPr>
+              <a:t>AI Codec: industry-leading ML audio pipeline</a:t>
+            </a:r>
+          </a:p>
+          <a:p>
+            <a:pPr>
+              <a:spcAft>
+                <a:spcPts val="100"/>
+              </a:spcAft>
+            </a:pPr>
+            <a:r>
+              <a:rPr sz="200" b="0">
+                <a:solidFill>
+                  <a:srgbClr val="000000"/>
+                </a:solidFill>
+                <a:latin typeface="TT Commons Pro"/>
+              </a:rPr>
+              <a:t/>
+            </a:r>
+          </a:p>
+          <a:p>
+            <a:pPr>
+              <a:spcAft>
+                <a:spcPts val="100"/>
               </a:spcAft>
             </a:pPr>
             <a:r>
               <a:rPr sz="1200" b="1">
                 <a:solidFill>
-                  <a:srgbClr val="FFFFFF"/>
-                </a:solidFill>
-                <a:latin typeface="Open Sans"/>
-              </a:rPr>
-              <a:t>Cisco</a:t>
-            </a:r>
-          </a:p>
-          <a:p>
-            <a:pPr>
-              <a:spcAft>
-                <a:spcPts val="200"/>
-              </a:spcAft>
-            </a:pPr>
-            <a:r>
-              <a:rPr sz="1200" b="1">
-                <a:solidFill>
-                  <a:srgbClr val="FFFFFF"/>
-                </a:solidFill>
-                <a:latin typeface="Open Sans"/>
-              </a:rPr>
-              <a:t>Edge</a:t>
+                  <a:srgbClr val="049FD9"/>
+                </a:solidFill>
+                <a:latin typeface="TT Commons Pro"/>
+              </a:rPr>
+              <a:t>The Opportunity</a:t>
+            </a:r>
+          </a:p>
+          <a:p>
+            <a:pPr>
+              <a:spcAft>
+                <a:spcPts val="100"/>
+              </a:spcAft>
+            </a:pPr>
+            <a:r>
+              <a:rPr sz="200" b="0">
+                <a:solidFill>
+                  <a:srgbClr val="000000"/>
+                </a:solidFill>
+                <a:latin typeface="TT Commons Pro"/>
+              </a:rPr>
+              <a:t/>
+            </a:r>
+          </a:p>
+          <a:p>
+            <a:pPr>
+              <a:spcAft>
+                <a:spcPts val="100"/>
+              </a:spcAft>
+            </a:pPr>
+            <a:r>
+              <a:rPr sz="900" b="0">
+                <a:solidFill>
+                  <a:srgbClr val="000000"/>
+                </a:solidFill>
+                <a:latin typeface="TT Commons Pro"/>
+              </a:rPr>
+              <a:t>Leapfrog competitors by combining Cisco security</a:t>
+            </a:r>
+          </a:p>
+          <a:p>
+            <a:pPr>
+              <a:spcAft>
+                <a:spcPts val="100"/>
+              </a:spcAft>
+            </a:pPr>
+            <a:r>
+              <a:rPr sz="900" b="0">
+                <a:solidFill>
+                  <a:srgbClr val="000000"/>
+                </a:solidFill>
+                <a:latin typeface="TT Commons Pro"/>
+              </a:rPr>
+              <a:t>+ Splunk observability + agentic AI capabilities</a:t>
             </a:r>
           </a:p>
         </p:txBody>
@@ -17073,7 +16590,7 @@
                 <a:cs typeface="Open Sans"/>
                 <a:sym typeface="Open Sans"/>
               </a:rPr>
-              <a:t>Webex AI is passive: it summarizes and transcribes but cannot prepare users, execute tasks during meetings, or follow up on action items afterward.</a:t>
+              <a:t>Webex AI summarizes but cannot prepare, execute tasks, or follow up on action items.</a:t>
             </a:r>
           </a:p>
         </p:txBody>
@@ -17117,7 +16634,7 @@
                 <a:cs typeface="Open Sans"/>
                 <a:sym typeface="Open Sans"/>
               </a:rPr>
-              <a:t>Non-native speakers, non-technical users face language barriers, jargon, poor audio, and no way to participate without speaking aloud.</a:t>
+              <a:t>Non-native speakers face language barriers, jargon, and have no way to participate silently.</a:t>
             </a:r>
           </a:p>
         </p:txBody>
@@ -17378,7 +16895,7 @@
                 <a:cs typeface="Open Sans"/>
                 <a:sym typeface="Open Sans"/>
               </a:rPr>
-              <a:t>Teams has 2,000+ and Zoom has 2,500+ integrations. No platform has launched a dedicated AI agent marketplace for enterprises.</a:t>
+              <a:t>Teams: 2,000+ integrations. Zoom: 2,500+. No AI agent marketplace exists yet.</a:t>
             </a:r>
             <a:r>
               <a:rPr lang="en-US" sz="2309">
@@ -18413,7 +17930,7 @@
                 <a:cs typeface="Open Sans Bold Italics"/>
                 <a:sym typeface="Open Sans Bold Italics"/>
               </a:rPr>
-              <a:t>Repositioning Webex with Three AI-Powered Solutions</a:t>
+              <a:t>Repositioning Webex with AI-Powered Solutions</a:t>
             </a:r>
           </a:p>
         </p:txBody>
@@ -18501,7 +18018,7 @@
                 <a:cs typeface="Open Sans Bold"/>
                 <a:sym typeface="Open Sans Bold"/>
               </a:rPr>
-              <a:t>Prepare-Perceive-Reason-Act-Follow-Up: agentic AI for the full meeting lifecycle.</a:t>
+              <a:t>Agentic AI for the full meeting lifecycle: Prepare-Perceive-Reason-Act-Follow-Up.</a:t>
             </a:r>
           </a:p>
         </p:txBody>
@@ -18589,7 +18106,7 @@
                 <a:cs typeface="Open Sans Bold"/>
                 <a:sym typeface="Open Sans Bold"/>
               </a:rPr>
-              <a:t>Real-time voice boost, live translation (100+ languages), type-to-speak, jargon simplification.</a:t>
+              <a:t>Voice boost, live translation (100+ langs), type-to-speak, jargon simplification.</a:t>
             </a:r>
           </a:p>
         </p:txBody>
@@ -18809,7 +18326,7 @@
                 <a:cs typeface="Open Sans Bold"/>
                 <a:sym typeface="Open Sans Bold"/>
               </a:rPr>
-              <a:t>Industry-first secure marketplace: Build, Certify, Deploy, Monitor. 500+ agents Year 1.</a:t>
+              <a:t>Secure AI agent marketplace: Build, Certify, Deploy, Monitor. 500+ agents Yr 1.</a:t>
             </a:r>
           </a:p>
         </p:txBody>
@@ -19211,7 +18728,7 @@
         <p:spPr>
           <a:xfrm>
             <a:off x="1097280" y="1645920"/>
-            <a:ext cx="7772400" cy="7498079"/>
+            <a:ext cx="7498079" cy="7315200"/>
           </a:xfrm>
           <a:prstGeom prst="rect">
             <a:avLst/>
@@ -19226,23 +18743,55 @@
           <a:p>
             <a:pPr>
               <a:spcAft>
-                <a:spcPts val="200"/>
-              </a:spcAft>
-            </a:pPr>
-            <a:r>
-              <a:rPr sz="1400" b="1">
+                <a:spcPts val="100"/>
+              </a:spcAft>
+            </a:pPr>
+            <a:r>
+              <a:rPr sz="1300" b="1">
                 <a:solidFill>
                   <a:srgbClr val="049FD9"/>
                 </a:solidFill>
                 <a:latin typeface="TT Commons Pro"/>
               </a:rPr>
-              <a:t>Problem: Webex AI Cannot Execute Meetings</a:t>
-            </a:r>
-          </a:p>
-          <a:p>
-            <a:pPr>
-              <a:spcAft>
-                <a:spcPts val="200"/>
+              <a:t>Problem</a:t>
+            </a:r>
+          </a:p>
+          <a:p>
+            <a:pPr>
+              <a:spcAft>
+                <a:spcPts val="100"/>
+              </a:spcAft>
+            </a:pPr>
+            <a:r>
+              <a:rPr sz="900" b="0">
+                <a:solidFill>
+                  <a:srgbClr val="000000"/>
+                </a:solidFill>
+                <a:latin typeface="TT Commons Pro"/>
+              </a:rPr>
+              <a:t>Webex AI describes work but does not prepare,</a:t>
+            </a:r>
+          </a:p>
+          <a:p>
+            <a:pPr>
+              <a:spcAft>
+                <a:spcPts val="100"/>
+              </a:spcAft>
+            </a:pPr>
+            <a:r>
+              <a:rPr sz="900" b="0">
+                <a:solidFill>
+                  <a:srgbClr val="000000"/>
+                </a:solidFill>
+                <a:latin typeface="TT Commons Pro"/>
+              </a:rPr>
+              <a:t>execute, or follow up. Competitors already act.</a:t>
+            </a:r>
+          </a:p>
+          <a:p>
+            <a:pPr>
+              <a:spcAft>
+                <a:spcPts val="100"/>
               </a:spcAft>
             </a:pPr>
             <a:r>
@@ -19258,43 +18807,27 @@
           <a:p>
             <a:pPr>
               <a:spcAft>
-                <a:spcPts val="200"/>
-              </a:spcAft>
-            </a:pPr>
-            <a:r>
-              <a:rPr sz="1000" b="0">
-                <a:solidFill>
-                  <a:srgbClr val="000000"/>
-                </a:solidFill>
-                <a:latin typeface="TT Commons Pro"/>
-              </a:rPr>
-              <a:t>Webex AI describes work (summaries, transcription) but does not</a:t>
-            </a:r>
-          </a:p>
-          <a:p>
-            <a:pPr>
-              <a:spcAft>
-                <a:spcPts val="200"/>
-              </a:spcAft>
-            </a:pPr>
-            <a:r>
-              <a:rPr sz="1000" b="0">
-                <a:solidFill>
-                  <a:srgbClr val="000000"/>
-                </a:solidFill>
-                <a:latin typeface="TT Commons Pro"/>
-              </a:rPr>
-              <a:t>prepare, execute, or follow up. Competitors already take actions.</a:t>
-            </a:r>
-          </a:p>
-          <a:p>
-            <a:pPr>
-              <a:spcAft>
-                <a:spcPts val="200"/>
-              </a:spcAft>
-            </a:pPr>
-            <a:r>
-              <a:rPr sz="600" b="0">
+                <a:spcPts val="100"/>
+              </a:spcAft>
+            </a:pPr>
+            <a:r>
+              <a:rPr sz="1300" b="1">
+                <a:solidFill>
+                  <a:srgbClr val="049FD9"/>
+                </a:solidFill>
+                <a:latin typeface="TT Commons Pro"/>
+              </a:rPr>
+              <a:t>Five-Phase Architecture</a:t>
+            </a:r>
+          </a:p>
+          <a:p>
+            <a:pPr>
+              <a:spcAft>
+                <a:spcPts val="100"/>
+              </a:spcAft>
+            </a:pPr>
+            <a:r>
+              <a:rPr sz="200" b="0">
                 <a:solidFill>
                   <a:srgbClr val="000000"/>
                 </a:solidFill>
@@ -19306,27 +18839,43 @@
           <a:p>
             <a:pPr>
               <a:spcAft>
-                <a:spcPts val="200"/>
-              </a:spcAft>
-            </a:pPr>
-            <a:r>
-              <a:rPr sz="1300" b="1">
-                <a:solidFill>
-                  <a:srgbClr val="049FD9"/>
-                </a:solidFill>
-                <a:latin typeface="TT Commons Pro"/>
-              </a:rPr>
-              <a:t>Five-Phase Agentic Architecture</a:t>
-            </a:r>
-          </a:p>
-          <a:p>
-            <a:pPr>
-              <a:spcAft>
-                <a:spcPts val="200"/>
-              </a:spcAft>
-            </a:pPr>
-            <a:r>
-              <a:rPr sz="300" b="0">
+                <a:spcPts val="100"/>
+              </a:spcAft>
+            </a:pPr>
+            <a:r>
+              <a:rPr sz="1000" b="1">
+                <a:solidFill>
+                  <a:srgbClr val="204F69"/>
+                </a:solidFill>
+                <a:latin typeface="TT Commons Pro"/>
+              </a:rPr>
+              <a:t>PREPARE</a:t>
+            </a:r>
+          </a:p>
+          <a:p>
+            <a:pPr>
+              <a:spcAft>
+                <a:spcPts val="100"/>
+              </a:spcAft>
+            </a:pPr>
+            <a:r>
+              <a:rPr sz="900" b="0">
+                <a:solidFill>
+                  <a:srgbClr val="000000"/>
+                </a:solidFill>
+                <a:latin typeface="TT Commons Pro"/>
+              </a:rPr>
+              <a:t>Auto-generate agendas, slides, predicted Q&amp;A</a:t>
+            </a:r>
+          </a:p>
+          <a:p>
+            <a:pPr>
+              <a:spcAft>
+                <a:spcPts val="100"/>
+              </a:spcAft>
+            </a:pPr>
+            <a:r>
+              <a:rPr sz="200" b="0">
                 <a:solidFill>
                   <a:srgbClr val="000000"/>
                 </a:solidFill>
@@ -19338,7 +18887,7 @@
           <a:p>
             <a:pPr>
               <a:spcAft>
-                <a:spcPts val="200"/>
+                <a:spcPts val="100"/>
               </a:spcAft>
             </a:pPr>
             <a:r>
@@ -19348,33 +18897,33 @@
                 </a:solidFill>
                 <a:latin typeface="TT Commons Pro"/>
               </a:rPr>
-              <a:t>PREPARE - AI generates agendas, auto-slides, and</a:t>
-            </a:r>
-          </a:p>
-          <a:p>
-            <a:pPr>
-              <a:spcAft>
-                <a:spcPts val="200"/>
-              </a:spcAft>
-            </a:pPr>
-            <a:r>
-              <a:rPr sz="1000" b="0">
-                <a:solidFill>
-                  <a:srgbClr val="000000"/>
-                </a:solidFill>
-                <a:latin typeface="TT Commons Pro"/>
-              </a:rPr>
-              <a:t>predicted Q&amp;A from CRM, Jira, and calendar context</a:t>
-            </a:r>
-          </a:p>
-          <a:p>
-            <a:pPr>
-              <a:spcAft>
-                <a:spcPts val="200"/>
-              </a:spcAft>
-            </a:pPr>
-            <a:r>
-              <a:rPr sz="300" b="0">
+              <a:t>PERCEIVE</a:t>
+            </a:r>
+          </a:p>
+          <a:p>
+            <a:pPr>
+              <a:spcAft>
+                <a:spcPts val="100"/>
+              </a:spcAft>
+            </a:pPr>
+            <a:r>
+              <a:rPr sz="900" b="0">
+                <a:solidFill>
+                  <a:srgbClr val="000000"/>
+                </a:solidFill>
+                <a:latin typeface="TT Commons Pro"/>
+              </a:rPr>
+              <a:t>AI Codec: noise removal, ASR, intent detection</a:t>
+            </a:r>
+          </a:p>
+          <a:p>
+            <a:pPr>
+              <a:spcAft>
+                <a:spcPts val="100"/>
+              </a:spcAft>
+            </a:pPr>
+            <a:r>
+              <a:rPr sz="200" b="0">
                 <a:solidFill>
                   <a:srgbClr val="000000"/>
                 </a:solidFill>
@@ -19386,7 +18935,7 @@
           <a:p>
             <a:pPr>
               <a:spcAft>
-                <a:spcPts val="200"/>
+                <a:spcPts val="100"/>
               </a:spcAft>
             </a:pPr>
             <a:r>
@@ -19396,33 +18945,33 @@
                 </a:solidFill>
                 <a:latin typeface="TT Commons Pro"/>
               </a:rPr>
-              <a:t>PERCEIVE - Webex AI Codec processes live audio:</a:t>
-            </a:r>
-          </a:p>
-          <a:p>
-            <a:pPr>
-              <a:spcAft>
-                <a:spcPts val="200"/>
-              </a:spcAft>
-            </a:pPr>
-            <a:r>
-              <a:rPr sz="1000" b="0">
-                <a:solidFill>
-                  <a:srgbClr val="000000"/>
-                </a:solidFill>
-                <a:latin typeface="TT Commons Pro"/>
-              </a:rPr>
-              <a:t>DNN noise removal, speech-to-text, task intent detection</a:t>
-            </a:r>
-          </a:p>
-          <a:p>
-            <a:pPr>
-              <a:spcAft>
-                <a:spcPts val="200"/>
-              </a:spcAft>
-            </a:pPr>
-            <a:r>
-              <a:rPr sz="300" b="0">
+              <a:t>REASON</a:t>
+            </a:r>
+          </a:p>
+          <a:p>
+            <a:pPr>
+              <a:spcAft>
+                <a:spcPts val="100"/>
+              </a:spcAft>
+            </a:pPr>
+            <a:r>
+              <a:rPr sz="900" b="0">
+                <a:solidFill>
+                  <a:srgbClr val="000000"/>
+                </a:solidFill>
+                <a:latin typeface="TT Commons Pro"/>
+              </a:rPr>
+              <a:t>A2A retrieval from Jira, Salesforce, SAP, ServiceNow</a:t>
+            </a:r>
+          </a:p>
+          <a:p>
+            <a:pPr>
+              <a:spcAft>
+                <a:spcPts val="100"/>
+              </a:spcAft>
+            </a:pPr>
+            <a:r>
+              <a:rPr sz="200" b="0">
                 <a:solidFill>
                   <a:srgbClr val="000000"/>
                 </a:solidFill>
@@ -19434,7 +18983,7 @@
           <a:p>
             <a:pPr>
               <a:spcAft>
-                <a:spcPts val="200"/>
+                <a:spcPts val="100"/>
               </a:spcAft>
             </a:pPr>
             <a:r>
@@ -19444,33 +18993,33 @@
                 </a:solidFill>
                 <a:latin typeface="TT Commons Pro"/>
               </a:rPr>
-              <a:t>REASON - A2A protocol retrieves context from Jira,</a:t>
-            </a:r>
-          </a:p>
-          <a:p>
-            <a:pPr>
-              <a:spcAft>
-                <a:spcPts val="200"/>
-              </a:spcAft>
-            </a:pPr>
-            <a:r>
-              <a:rPr sz="1000" b="0">
-                <a:solidFill>
-                  <a:srgbClr val="000000"/>
-                </a:solidFill>
-                <a:latin typeface="TT Commons Pro"/>
-              </a:rPr>
-              <a:t>Salesforce, SAP via Cisco Secure Data Fabric</a:t>
-            </a:r>
-          </a:p>
-          <a:p>
-            <a:pPr>
-              <a:spcAft>
-                <a:spcPts val="200"/>
-              </a:spcAft>
-            </a:pPr>
-            <a:r>
-              <a:rPr sz="300" b="0">
+              <a:t>ACT</a:t>
+            </a:r>
+          </a:p>
+          <a:p>
+            <a:pPr>
+              <a:spcAft>
+                <a:spcPts val="100"/>
+              </a:spcAft>
+            </a:pPr>
+            <a:r>
+              <a:rPr sz="900" b="0">
+                <a:solidFill>
+                  <a:srgbClr val="000000"/>
+                </a:solidFill>
+                <a:latin typeface="TT Commons Pro"/>
+              </a:rPr>
+              <a:t>Draft tasks, user approve/reject, API execution</a:t>
+            </a:r>
+          </a:p>
+          <a:p>
+            <a:pPr>
+              <a:spcAft>
+                <a:spcPts val="100"/>
+              </a:spcAft>
+            </a:pPr>
+            <a:r>
+              <a:rPr sz="200" b="0">
                 <a:solidFill>
                   <a:srgbClr val="000000"/>
                 </a:solidFill>
@@ -19482,7 +19031,7 @@
           <a:p>
             <a:pPr>
               <a:spcAft>
-                <a:spcPts val="200"/>
+                <a:spcPts val="100"/>
               </a:spcAft>
             </a:pPr>
             <a:r>
@@ -19492,71 +19041,23 @@
                 </a:solidFill>
                 <a:latin typeface="TT Commons Pro"/>
               </a:rPr>
-              <a:t>ACT - AI drafts tasks, user approves/rejects via</a:t>
-            </a:r>
-          </a:p>
-          <a:p>
-            <a:pPr>
-              <a:spcAft>
-                <a:spcPts val="200"/>
-              </a:spcAft>
-            </a:pPr>
-            <a:r>
-              <a:rPr sz="1000" b="0">
-                <a:solidFill>
-                  <a:srgbClr val="000000"/>
-                </a:solidFill>
-                <a:latin typeface="TT Commons Pro"/>
-              </a:rPr>
-              <a:t>in-meeting cards, executes through authenticated APIs</a:t>
-            </a:r>
-          </a:p>
-          <a:p>
-            <a:pPr>
-              <a:spcAft>
-                <a:spcPts val="200"/>
-              </a:spcAft>
-            </a:pPr>
-            <a:r>
-              <a:rPr sz="300" b="0">
-                <a:solidFill>
-                  <a:srgbClr val="000000"/>
-                </a:solidFill>
-                <a:latin typeface="TT Commons Pro"/>
-              </a:rPr>
-              <a:t/>
-            </a:r>
-          </a:p>
-          <a:p>
-            <a:pPr>
-              <a:spcAft>
-                <a:spcPts val="200"/>
-              </a:spcAft>
-            </a:pPr>
-            <a:r>
-              <a:rPr sz="1000" b="1">
-                <a:solidFill>
-                  <a:srgbClr val="204F69"/>
-                </a:solidFill>
-                <a:latin typeface="TT Commons Pro"/>
-              </a:rPr>
-              <a:t>FOLLOW-UP - Detects unanswered questions, drafts</a:t>
-            </a:r>
-          </a:p>
-          <a:p>
-            <a:pPr>
-              <a:spcAft>
-                <a:spcPts val="200"/>
-              </a:spcAft>
-            </a:pPr>
-            <a:r>
-              <a:rPr sz="1000" b="0">
-                <a:solidFill>
-                  <a:srgbClr val="000000"/>
-                </a:solidFill>
-                <a:latin typeface="TT Commons Pro"/>
-              </a:rPr>
-              <a:t>responses, delivers via Webex/email with Splunk logging</a:t>
+              <a:t>FOLLOW-UP</a:t>
+            </a:r>
+          </a:p>
+          <a:p>
+            <a:pPr>
+              <a:spcAft>
+                <a:spcPts val="100"/>
+              </a:spcAft>
+            </a:pPr>
+            <a:r>
+              <a:rPr sz="900" b="0">
+                <a:solidFill>
+                  <a:srgbClr val="000000"/>
+                </a:solidFill>
+                <a:latin typeface="TT Commons Pro"/>
+              </a:rPr>
+              <a:t>Detect unanswered Qs, draft &amp; deliver responses</a:t>
             </a:r>
           </a:p>
         </p:txBody>
@@ -19569,8 +19070,8 @@
         </p:nvSpPr>
         <p:spPr>
           <a:xfrm>
-            <a:off x="9875520" y="1645920"/>
-            <a:ext cx="7498079" cy="7498079"/>
+            <a:off x="9601200" y="1645920"/>
+            <a:ext cx="7498079" cy="7315200"/>
           </a:xfrm>
           <a:prstGeom prst="rect">
             <a:avLst/>
@@ -19585,11 +19086,11 @@
           <a:p>
             <a:pPr>
               <a:spcAft>
-                <a:spcPts val="200"/>
-              </a:spcAft>
-            </a:pPr>
-            <a:r>
-              <a:rPr sz="1400" b="1">
+                <a:spcPts val="100"/>
+              </a:spcAft>
+            </a:pPr>
+            <a:r>
+              <a:rPr sz="1300" b="1">
                 <a:solidFill>
                   <a:srgbClr val="049FD9"/>
                 </a:solidFill>
@@ -19601,11 +19102,11 @@
           <a:p>
             <a:pPr>
               <a:spcAft>
-                <a:spcPts val="200"/>
-              </a:spcAft>
-            </a:pPr>
-            <a:r>
-              <a:rPr sz="400" b="0">
+                <a:spcPts val="100"/>
+              </a:spcAft>
+            </a:pPr>
+            <a:r>
+              <a:rPr sz="200" b="0">
                 <a:solidFill>
                   <a:srgbClr val="000000"/>
                 </a:solidFill>
@@ -19617,75 +19118,75 @@
           <a:p>
             <a:pPr>
               <a:spcAft>
-                <a:spcPts val="200"/>
-              </a:spcAft>
-            </a:pPr>
-            <a:r>
-              <a:rPr sz="1000" b="0">
-                <a:solidFill>
-                  <a:srgbClr val="000000"/>
-                </a:solidFill>
-                <a:latin typeface="TT Commons Pro"/>
-              </a:rPr>
-              <a:t>Human-in-the-loop verification for every external action</a:t>
-            </a:r>
-          </a:p>
-          <a:p>
-            <a:pPr>
-              <a:spcAft>
-                <a:spcPts val="200"/>
-              </a:spcAft>
-            </a:pPr>
-            <a:r>
-              <a:rPr sz="1000" b="0">
-                <a:solidFill>
-                  <a:srgbClr val="000000"/>
-                </a:solidFill>
-                <a:latin typeface="TT Commons Pro"/>
-              </a:rPr>
-              <a:t>Zero-trust data fabric with Splunk audit trail</a:t>
-            </a:r>
-          </a:p>
-          <a:p>
-            <a:pPr>
-              <a:spcAft>
-                <a:spcPts val="200"/>
-              </a:spcAft>
-            </a:pPr>
-            <a:r>
-              <a:rPr sz="1000" b="0">
-                <a:solidFill>
-                  <a:srgbClr val="000000"/>
-                </a:solidFill>
-                <a:latin typeface="TT Commons Pro"/>
-              </a:rPr>
-              <a:t>Full meeting lifecycle (not just summaries)</a:t>
-            </a:r>
-          </a:p>
-          <a:p>
-            <a:pPr>
-              <a:spcAft>
-                <a:spcPts val="200"/>
-              </a:spcAft>
-            </a:pPr>
-            <a:r>
-              <a:rPr sz="1000" b="0">
-                <a:solidFill>
-                  <a:srgbClr val="000000"/>
-                </a:solidFill>
-                <a:latin typeface="TT Commons Pro"/>
-              </a:rPr>
-              <a:t>Regulated-industry ready (FedRAMP, HIPAA)</a:t>
-            </a:r>
-          </a:p>
-          <a:p>
-            <a:pPr>
-              <a:spcAft>
-                <a:spcPts val="200"/>
-              </a:spcAft>
-            </a:pPr>
-            <a:r>
-              <a:rPr sz="800" b="0">
+                <a:spcPts val="100"/>
+              </a:spcAft>
+            </a:pPr>
+            <a:r>
+              <a:rPr sz="900" b="0">
+                <a:solidFill>
+                  <a:srgbClr val="000000"/>
+                </a:solidFill>
+                <a:latin typeface="TT Commons Pro"/>
+              </a:rPr>
+              <a:t>Human-in-the-loop for every action</a:t>
+            </a:r>
+          </a:p>
+          <a:p>
+            <a:pPr>
+              <a:spcAft>
+                <a:spcPts val="100"/>
+              </a:spcAft>
+            </a:pPr>
+            <a:r>
+              <a:rPr sz="900" b="0">
+                <a:solidFill>
+                  <a:srgbClr val="000000"/>
+                </a:solidFill>
+                <a:latin typeface="TT Commons Pro"/>
+              </a:rPr>
+              <a:t>Zero-trust data fabric + Splunk audit</a:t>
+            </a:r>
+          </a:p>
+          <a:p>
+            <a:pPr>
+              <a:spcAft>
+                <a:spcPts val="100"/>
+              </a:spcAft>
+            </a:pPr>
+            <a:r>
+              <a:rPr sz="900" b="0">
+                <a:solidFill>
+                  <a:srgbClr val="000000"/>
+                </a:solidFill>
+                <a:latin typeface="TT Commons Pro"/>
+              </a:rPr>
+              <a:t>Full meeting lifecycle coverage</a:t>
+            </a:r>
+          </a:p>
+          <a:p>
+            <a:pPr>
+              <a:spcAft>
+                <a:spcPts val="100"/>
+              </a:spcAft>
+            </a:pPr>
+            <a:r>
+              <a:rPr sz="900" b="0">
+                <a:solidFill>
+                  <a:srgbClr val="000000"/>
+                </a:solidFill>
+                <a:latin typeface="TT Commons Pro"/>
+              </a:rPr>
+              <a:t>Regulated-industry ready</a:t>
+            </a:r>
+          </a:p>
+          <a:p>
+            <a:pPr>
+              <a:spcAft>
+                <a:spcPts val="100"/>
+              </a:spcAft>
+            </a:pPr>
+            <a:r>
+              <a:rPr sz="600" b="0">
                 <a:solidFill>
                   <a:srgbClr val="000000"/>
                 </a:solidFill>
@@ -19697,11 +19198,11 @@
           <a:p>
             <a:pPr>
               <a:spcAft>
-                <a:spcPts val="200"/>
-              </a:spcAft>
-            </a:pPr>
-            <a:r>
-              <a:rPr sz="1400" b="1">
+                <a:spcPts val="100"/>
+              </a:spcAft>
+            </a:pPr>
+            <a:r>
+              <a:rPr sz="1300" b="1">
                 <a:solidFill>
                   <a:srgbClr val="049FD9"/>
                 </a:solidFill>
@@ -19713,11 +19214,11 @@
           <a:p>
             <a:pPr>
               <a:spcAft>
-                <a:spcPts val="200"/>
-              </a:spcAft>
-            </a:pPr>
-            <a:r>
-              <a:rPr sz="400" b="0">
+                <a:spcPts val="100"/>
+              </a:spcAft>
+            </a:pPr>
+            <a:r>
+              <a:rPr sz="200" b="0">
                 <a:solidFill>
                   <a:srgbClr val="000000"/>
                 </a:solidFill>
@@ -19729,81 +19230,81 @@
           <a:p>
             <a:pPr>
               <a:spcAft>
-                <a:spcPts val="200"/>
-              </a:spcAft>
-            </a:pPr>
-            <a:r>
-              <a:rPr sz="1000" b="0">
-                <a:solidFill>
-                  <a:srgbClr val="000000"/>
-                </a:solidFill>
-                <a:latin typeface="TT Commons Pro"/>
-              </a:rPr>
-              <a:t>15 min saved per meeting in manual data entry</a:t>
-            </a:r>
-          </a:p>
-          <a:p>
-            <a:pPr>
-              <a:spcAft>
-                <a:spcPts val="200"/>
-              </a:spcAft>
-            </a:pPr>
-            <a:r>
-              <a:rPr sz="1000" b="0">
-                <a:solidFill>
-                  <a:srgbClr val="000000"/>
-                </a:solidFill>
-                <a:latin typeface="TT Commons Pro"/>
-              </a:rPr>
-              <a:t>25% meeting-to-action rate (vs. 5% industry avg)</a:t>
-            </a:r>
-          </a:p>
-          <a:p>
-            <a:pPr>
-              <a:spcAft>
-                <a:spcPts val="200"/>
-              </a:spcAft>
-            </a:pPr>
-            <a:r>
-              <a:rPr sz="1000" b="0">
-                <a:solidFill>
-                  <a:srgbClr val="000000"/>
-                </a:solidFill>
-                <a:latin typeface="TT Commons Pro"/>
-              </a:rPr>
-              <a:t>40% workflow automation within 12 months</a:t>
-            </a:r>
-          </a:p>
-          <a:p>
-            <a:pPr>
-              <a:spcAft>
-                <a:spcPts val="200"/>
-              </a:spcAft>
-            </a:pPr>
-            <a:r>
-              <a:rPr sz="1000" b="0">
-                <a:solidFill>
-                  <a:srgbClr val="000000"/>
-                </a:solidFill>
-                <a:latin typeface="TT Commons Pro"/>
-              </a:rPr>
-              <a:t>85% task accuracy with human verification</a:t>
-            </a:r>
-          </a:p>
-          <a:p>
-            <a:pPr>
-              <a:spcAft>
-                <a:spcPts val="200"/>
-              </a:spcAft>
-            </a:pPr>
-            <a:r>
-              <a:rPr sz="1000" b="0">
-                <a:solidFill>
-                  <a:srgbClr val="000000"/>
-                </a:solidFill>
-                <a:latin typeface="TT Commons Pro"/>
-              </a:rPr>
-              <a:t>90%+ Q&amp;A resolution rate post-meeting</a:t>
+                <a:spcPts val="100"/>
+              </a:spcAft>
+            </a:pPr>
+            <a:r>
+              <a:rPr sz="900" b="0">
+                <a:solidFill>
+                  <a:srgbClr val="000000"/>
+                </a:solidFill>
+                <a:latin typeface="TT Commons Pro"/>
+              </a:rPr>
+              <a:t>15 min saved per meeting</a:t>
+            </a:r>
+          </a:p>
+          <a:p>
+            <a:pPr>
+              <a:spcAft>
+                <a:spcPts val="100"/>
+              </a:spcAft>
+            </a:pPr>
+            <a:r>
+              <a:rPr sz="900" b="0">
+                <a:solidFill>
+                  <a:srgbClr val="000000"/>
+                </a:solidFill>
+                <a:latin typeface="TT Commons Pro"/>
+              </a:rPr>
+              <a:t>25% meeting-to-action rate (vs 5% avg)</a:t>
+            </a:r>
+          </a:p>
+          <a:p>
+            <a:pPr>
+              <a:spcAft>
+                <a:spcPts val="100"/>
+              </a:spcAft>
+            </a:pPr>
+            <a:r>
+              <a:rPr sz="900" b="0">
+                <a:solidFill>
+                  <a:srgbClr val="000000"/>
+                </a:solidFill>
+                <a:latin typeface="TT Commons Pro"/>
+              </a:rPr>
+              <a:t>40% workflow automation in 12 months</a:t>
+            </a:r>
+          </a:p>
+          <a:p>
+            <a:pPr>
+              <a:spcAft>
+                <a:spcPts val="100"/>
+              </a:spcAft>
+            </a:pPr>
+            <a:r>
+              <a:rPr sz="900" b="0">
+                <a:solidFill>
+                  <a:srgbClr val="000000"/>
+                </a:solidFill>
+                <a:latin typeface="TT Commons Pro"/>
+              </a:rPr>
+              <a:t>85% task accuracy</a:t>
+            </a:r>
+          </a:p>
+          <a:p>
+            <a:pPr>
+              <a:spcAft>
+                <a:spcPts val="100"/>
+              </a:spcAft>
+            </a:pPr>
+            <a:r>
+              <a:rPr sz="900" b="0">
+                <a:solidFill>
+                  <a:srgbClr val="000000"/>
+                </a:solidFill>
+                <a:latin typeface="TT Commons Pro"/>
+              </a:rPr>
+              <a:t>90%+ Q&amp;A resolution rate</a:t>
             </a:r>
           </a:p>
         </p:txBody>
@@ -20161,7 +19662,7 @@
         <p:spPr>
           <a:xfrm>
             <a:off x="1097280" y="1645920"/>
-            <a:ext cx="7772400" cy="7498079"/>
+            <a:ext cx="7498079" cy="7315200"/>
           </a:xfrm>
           <a:prstGeom prst="rect">
             <a:avLst/>
@@ -20176,23 +19677,55 @@
           <a:p>
             <a:pPr>
               <a:spcAft>
-                <a:spcPts val="200"/>
-              </a:spcAft>
-            </a:pPr>
-            <a:r>
-              <a:rPr sz="1400" b="1">
+                <a:spcPts val="100"/>
+              </a:spcAft>
+            </a:pPr>
+            <a:r>
+              <a:rPr sz="1300" b="1">
                 <a:solidFill>
                   <a:srgbClr val="049FD9"/>
                 </a:solidFill>
                 <a:latin typeface="TT Commons Pro"/>
               </a:rPr>
-              <a:t>Problem: Meetings Exclude Participants</a:t>
-            </a:r>
-          </a:p>
-          <a:p>
-            <a:pPr>
-              <a:spcAft>
-                <a:spcPts val="200"/>
+              <a:t>Problem</a:t>
+            </a:r>
+          </a:p>
+          <a:p>
+            <a:pPr>
+              <a:spcAft>
+                <a:spcPts val="100"/>
+              </a:spcAft>
+            </a:pPr>
+            <a:r>
+              <a:rPr sz="900" b="0">
+                <a:solidFill>
+                  <a:srgbClr val="000000"/>
+                </a:solidFill>
+                <a:latin typeface="TT Commons Pro"/>
+              </a:rPr>
+              <a:t>Language barriers, jargon, poor audio, and</a:t>
+            </a:r>
+          </a:p>
+          <a:p>
+            <a:pPr>
+              <a:spcAft>
+                <a:spcPts val="100"/>
+              </a:spcAft>
+            </a:pPr>
+            <a:r>
+              <a:rPr sz="900" b="0">
+                <a:solidFill>
+                  <a:srgbClr val="000000"/>
+                </a:solidFill>
+                <a:latin typeface="TT Commons Pro"/>
+              </a:rPr>
+              <a:t>inability to speak exclude global participants.</a:t>
+            </a:r>
+          </a:p>
+          <a:p>
+            <a:pPr>
+              <a:spcAft>
+                <a:spcPts val="100"/>
               </a:spcAft>
             </a:pPr>
             <a:r>
@@ -20208,43 +19741,27 @@
           <a:p>
             <a:pPr>
               <a:spcAft>
-                <a:spcPts val="200"/>
-              </a:spcAft>
-            </a:pPr>
-            <a:r>
-              <a:rPr sz="1000" b="0">
-                <a:solidFill>
-                  <a:srgbClr val="000000"/>
-                </a:solidFill>
-                <a:latin typeface="TT Commons Pro"/>
-              </a:rPr>
-              <a:t>Language barriers, jargon, poor audio, and inability to speak</a:t>
-            </a:r>
-          </a:p>
-          <a:p>
-            <a:pPr>
-              <a:spcAft>
-                <a:spcPts val="200"/>
-              </a:spcAft>
-            </a:pPr>
-            <a:r>
-              <a:rPr sz="1000" b="0">
-                <a:solidFill>
-                  <a:srgbClr val="000000"/>
-                </a:solidFill>
-                <a:latin typeface="TT Commons Pro"/>
-              </a:rPr>
-              <a:t>create systemic exclusion in global hybrid meetings.</a:t>
-            </a:r>
-          </a:p>
-          <a:p>
-            <a:pPr>
-              <a:spcAft>
-                <a:spcPts val="200"/>
-              </a:spcAft>
-            </a:pPr>
-            <a:r>
-              <a:rPr sz="600" b="0">
+                <a:spcPts val="100"/>
+              </a:spcAft>
+            </a:pPr>
+            <a:r>
+              <a:rPr sz="1300" b="1">
+                <a:solidFill>
+                  <a:srgbClr val="049FD9"/>
+                </a:solidFill>
+                <a:latin typeface="TT Commons Pro"/>
+              </a:rPr>
+              <a:t>VIBE Capabilities</a:t>
+            </a:r>
+          </a:p>
+          <a:p>
+            <a:pPr>
+              <a:spcAft>
+                <a:spcPts val="100"/>
+              </a:spcAft>
+            </a:pPr>
+            <a:r>
+              <a:rPr sz="200" b="0">
                 <a:solidFill>
                   <a:srgbClr val="000000"/>
                 </a:solidFill>
@@ -20256,27 +19773,43 @@
           <a:p>
             <a:pPr>
               <a:spcAft>
-                <a:spcPts val="200"/>
-              </a:spcAft>
-            </a:pPr>
-            <a:r>
-              <a:rPr sz="1300" b="1">
-                <a:solidFill>
-                  <a:srgbClr val="049FD9"/>
-                </a:solidFill>
-                <a:latin typeface="TT Commons Pro"/>
-              </a:rPr>
-              <a:t>VIBE Capabilities</a:t>
-            </a:r>
-          </a:p>
-          <a:p>
-            <a:pPr>
-              <a:spcAft>
-                <a:spcPts val="200"/>
-              </a:spcAft>
-            </a:pPr>
-            <a:r>
-              <a:rPr sz="300" b="0">
+                <a:spcPts val="100"/>
+              </a:spcAft>
+            </a:pPr>
+            <a:r>
+              <a:rPr sz="1000" b="1">
+                <a:solidFill>
+                  <a:srgbClr val="204F69"/>
+                </a:solidFill>
+                <a:latin typeface="TT Commons Pro"/>
+              </a:rPr>
+              <a:t>Voice Boost</a:t>
+            </a:r>
+          </a:p>
+          <a:p>
+            <a:pPr>
+              <a:spcAft>
+                <a:spcPts val="100"/>
+              </a:spcAft>
+            </a:pPr>
+            <a:r>
+              <a:rPr sz="900" b="0">
+                <a:solidFill>
+                  <a:srgbClr val="000000"/>
+                </a:solidFill>
+                <a:latin typeface="TT Commons Pro"/>
+              </a:rPr>
+              <a:t>DNN noise removal (150+ types), auto gain, EQ</a:t>
+            </a:r>
+          </a:p>
+          <a:p>
+            <a:pPr>
+              <a:spcAft>
+                <a:spcPts val="100"/>
+              </a:spcAft>
+            </a:pPr>
+            <a:r>
+              <a:rPr sz="200" b="0">
                 <a:solidFill>
                   <a:srgbClr val="000000"/>
                 </a:solidFill>
@@ -20288,7 +19821,7 @@
           <a:p>
             <a:pPr>
               <a:spcAft>
-                <a:spcPts val="200"/>
+                <a:spcPts val="100"/>
               </a:spcAft>
             </a:pPr>
             <a:r>
@@ -20298,33 +19831,33 @@
                 </a:solidFill>
                 <a:latin typeface="TT Commons Pro"/>
               </a:rPr>
-              <a:t>Voice Boost - DNN noise removal for 150+ noise</a:t>
-            </a:r>
-          </a:p>
-          <a:p>
-            <a:pPr>
-              <a:spcAft>
-                <a:spcPts val="200"/>
-              </a:spcAft>
-            </a:pPr>
-            <a:r>
-              <a:rPr sz="1000" b="0">
-                <a:solidFill>
-                  <a:srgbClr val="000000"/>
-                </a:solidFill>
-                <a:latin typeface="TT Commons Pro"/>
-              </a:rPr>
-              <a:t>types, echo cancel, auto gain, environment-adaptive EQ</a:t>
-            </a:r>
-          </a:p>
-          <a:p>
-            <a:pPr>
-              <a:spcAft>
-                <a:spcPts val="200"/>
-              </a:spcAft>
-            </a:pPr>
-            <a:r>
-              <a:rPr sz="300" b="0">
+              <a:t>Live Translation</a:t>
+            </a:r>
+          </a:p>
+          <a:p>
+            <a:pPr>
+              <a:spcAft>
+                <a:spcPts val="100"/>
+              </a:spcAft>
+            </a:pPr>
+            <a:r>
+              <a:rPr sz="900" b="0">
+                <a:solidFill>
+                  <a:srgbClr val="000000"/>
+                </a:solidFill>
+                <a:latin typeface="TT Commons Pro"/>
+              </a:rPr>
+              <a:t>100+ languages, real-time ASR + NMT + TTS</a:t>
+            </a:r>
+          </a:p>
+          <a:p>
+            <a:pPr>
+              <a:spcAft>
+                <a:spcPts val="100"/>
+              </a:spcAft>
+            </a:pPr>
+            <a:r>
+              <a:rPr sz="200" b="0">
                 <a:solidFill>
                   <a:srgbClr val="000000"/>
                 </a:solidFill>
@@ -20336,7 +19869,7 @@
           <a:p>
             <a:pPr>
               <a:spcAft>
-                <a:spcPts val="200"/>
+                <a:spcPts val="100"/>
               </a:spcAft>
             </a:pPr>
             <a:r>
@@ -20346,33 +19879,33 @@
                 </a:solidFill>
                 <a:latin typeface="TT Commons Pro"/>
               </a:rPr>
-              <a:t>Live Translation - 100+ languages, real-time ASR +</a:t>
-            </a:r>
-          </a:p>
-          <a:p>
-            <a:pPr>
-              <a:spcAft>
-                <a:spcPts val="200"/>
-              </a:spcAft>
-            </a:pPr>
-            <a:r>
-              <a:rPr sz="1000" b="0">
-                <a:solidFill>
-                  <a:srgbClr val="000000"/>
-                </a:solidFill>
-                <a:latin typeface="TT Commons Pro"/>
-              </a:rPr>
-              <a:t>neural machine translation + text-to-speech delivery</a:t>
-            </a:r>
-          </a:p>
-          <a:p>
-            <a:pPr>
-              <a:spcAft>
-                <a:spcPts val="200"/>
-              </a:spcAft>
-            </a:pPr>
-            <a:r>
-              <a:rPr sz="300" b="0">
+              <a:t>Type-to-Speak</a:t>
+            </a:r>
+          </a:p>
+          <a:p>
+            <a:pPr>
+              <a:spcAft>
+                <a:spcPts val="100"/>
+              </a:spcAft>
+            </a:pPr>
+            <a:r>
+              <a:rPr sz="900" b="0">
+                <a:solidFill>
+                  <a:srgbClr val="000000"/>
+                </a:solidFill>
+                <a:latin typeface="TT Commons Pro"/>
+              </a:rPr>
+              <a:t>Type in any language, VIBE speaks for you</a:t>
+            </a:r>
+          </a:p>
+          <a:p>
+            <a:pPr>
+              <a:spcAft>
+                <a:spcPts val="100"/>
+              </a:spcAft>
+            </a:pPr>
+            <a:r>
+              <a:rPr sz="200" b="0">
                 <a:solidFill>
                   <a:srgbClr val="000000"/>
                 </a:solidFill>
@@ -20384,7 +19917,7 @@
           <a:p>
             <a:pPr>
               <a:spcAft>
-                <a:spcPts val="200"/>
+                <a:spcPts val="100"/>
               </a:spcAft>
             </a:pPr>
             <a:r>
@@ -20394,33 +19927,33 @@
                 </a:solidFill>
                 <a:latin typeface="TT Commons Pro"/>
               </a:rPr>
-              <a:t>Type-to-Speak - Users type in any language, VIBE</a:t>
-            </a:r>
-          </a:p>
-          <a:p>
-            <a:pPr>
-              <a:spcAft>
-                <a:spcPts val="200"/>
-              </a:spcAft>
-            </a:pPr>
-            <a:r>
-              <a:rPr sz="1000" b="0">
-                <a:solidFill>
-                  <a:srgbClr val="000000"/>
-                </a:solidFill>
-                <a:latin typeface="TT Commons Pro"/>
-              </a:rPr>
-              <a:t>speaks aloud. Labeled "Spoken by VIBE for [User]"</a:t>
-            </a:r>
-          </a:p>
-          <a:p>
-            <a:pPr>
-              <a:spcAft>
-                <a:spcPts val="200"/>
-              </a:spcAft>
-            </a:pPr>
-            <a:r>
-              <a:rPr sz="300" b="0">
+              <a:t>Simple Mode</a:t>
+            </a:r>
+          </a:p>
+          <a:p>
+            <a:pPr>
+              <a:spcAft>
+                <a:spcPts val="100"/>
+              </a:spcAft>
+            </a:pPr>
+            <a:r>
+              <a:rPr sz="900" b="0">
+                <a:solidFill>
+                  <a:srgbClr val="000000"/>
+                </a:solidFill>
+                <a:latin typeface="TT Commons Pro"/>
+              </a:rPr>
+              <a:t>Jargon to plain language with analogies</a:t>
+            </a:r>
+          </a:p>
+          <a:p>
+            <a:pPr>
+              <a:spcAft>
+                <a:spcPts val="100"/>
+              </a:spcAft>
+            </a:pPr>
+            <a:r>
+              <a:rPr sz="200" b="0">
                 <a:solidFill>
                   <a:srgbClr val="000000"/>
                 </a:solidFill>
@@ -20432,7 +19965,7 @@
           <a:p>
             <a:pPr>
               <a:spcAft>
-                <a:spcPts val="200"/>
+                <a:spcPts val="100"/>
               </a:spcAft>
             </a:pPr>
             <a:r>
@@ -20442,71 +19975,23 @@
                 </a:solidFill>
                 <a:latin typeface="TT Commons Pro"/>
               </a:rPr>
-              <a:t>Simple Mode - Rewrites jargon to plain language</a:t>
-            </a:r>
-          </a:p>
-          <a:p>
-            <a:pPr>
-              <a:spcAft>
-                <a:spcPts val="200"/>
-              </a:spcAft>
-            </a:pPr>
-            <a:r>
-              <a:rPr sz="1000" b="0">
-                <a:solidFill>
-                  <a:srgbClr val="000000"/>
-                </a:solidFill>
-                <a:latin typeface="TT Commons Pro"/>
-              </a:rPr>
-              <a:t>with analogies (e.g., "API = waiter between systems")</a:t>
-            </a:r>
-          </a:p>
-          <a:p>
-            <a:pPr>
-              <a:spcAft>
-                <a:spcPts val="200"/>
-              </a:spcAft>
-            </a:pPr>
-            <a:r>
-              <a:rPr sz="300" b="0">
-                <a:solidFill>
-                  <a:srgbClr val="000000"/>
-                </a:solidFill>
-                <a:latin typeface="TT Commons Pro"/>
-              </a:rPr>
-              <a:t/>
-            </a:r>
-          </a:p>
-          <a:p>
-            <a:pPr>
-              <a:spcAft>
-                <a:spcPts val="200"/>
-              </a:spcAft>
-            </a:pPr>
-            <a:r>
-              <a:rPr sz="1000" b="1">
-                <a:solidFill>
-                  <a:srgbClr val="204F69"/>
-                </a:solidFill>
-                <a:latin typeface="TT Commons Pro"/>
-              </a:rPr>
-              <a:t>Q&amp;A Close-Loop - Non-native asks in their language,</a:t>
-            </a:r>
-          </a:p>
-          <a:p>
-            <a:pPr>
-              <a:spcAft>
-                <a:spcPts val="200"/>
-              </a:spcAft>
-            </a:pPr>
-            <a:r>
-              <a:rPr sz="1000" b="0">
-                <a:solidFill>
-                  <a:srgbClr val="000000"/>
-                </a:solidFill>
-                <a:latin typeface="TT Commons Pro"/>
-              </a:rPr>
-              <a:t>answer is translated + simplified back automatically</a:t>
+              <a:t>Q&amp;A Close-Loop</a:t>
+            </a:r>
+          </a:p>
+          <a:p>
+            <a:pPr>
+              <a:spcAft>
+                <a:spcPts val="100"/>
+              </a:spcAft>
+            </a:pPr>
+            <a:r>
+              <a:rPr sz="900" b="0">
+                <a:solidFill>
+                  <a:srgbClr val="000000"/>
+                </a:solidFill>
+                <a:latin typeface="TT Commons Pro"/>
+              </a:rPr>
+              <a:t>Ask in native language, get simplified answer</a:t>
             </a:r>
           </a:p>
         </p:txBody>
@@ -20519,8 +20004,8 @@
         </p:nvSpPr>
         <p:spPr>
           <a:xfrm>
-            <a:off x="9875520" y="1645920"/>
-            <a:ext cx="7498079" cy="7498079"/>
+            <a:off x="9601200" y="1645920"/>
+            <a:ext cx="7498079" cy="7315200"/>
           </a:xfrm>
           <a:prstGeom prst="rect">
             <a:avLst/>
@@ -20535,11 +20020,11 @@
           <a:p>
             <a:pPr>
               <a:spcAft>
-                <a:spcPts val="200"/>
-              </a:spcAft>
-            </a:pPr>
-            <a:r>
-              <a:rPr sz="1400" b="1">
+                <a:spcPts val="100"/>
+              </a:spcAft>
+            </a:pPr>
+            <a:r>
+              <a:rPr sz="1300" b="1">
                 <a:solidFill>
                   <a:srgbClr val="049FD9"/>
                 </a:solidFill>
@@ -20551,11 +20036,11 @@
           <a:p>
             <a:pPr>
               <a:spcAft>
-                <a:spcPts val="200"/>
-              </a:spcAft>
-            </a:pPr>
-            <a:r>
-              <a:rPr sz="400" b="0">
+                <a:spcPts val="100"/>
+              </a:spcAft>
+            </a:pPr>
+            <a:r>
+              <a:rPr sz="200" b="0">
                 <a:solidFill>
                   <a:srgbClr val="000000"/>
                 </a:solidFill>
@@ -20567,75 +20052,75 @@
           <a:p>
             <a:pPr>
               <a:spcAft>
-                <a:spcPts val="200"/>
-              </a:spcAft>
-            </a:pPr>
-            <a:r>
-              <a:rPr sz="1000" b="0">
-                <a:solidFill>
-                  <a:srgbClr val="000000"/>
-                </a:solidFill>
-                <a:latin typeface="TT Commons Pro"/>
-              </a:rPr>
-              <a:t>Every TTS output labeled - VIBE never impersonates</a:t>
-            </a:r>
-          </a:p>
-          <a:p>
-            <a:pPr>
-              <a:spcAft>
-                <a:spcPts val="200"/>
-              </a:spcAft>
-            </a:pPr>
-            <a:r>
-              <a:rPr sz="1000" b="0">
-                <a:solidFill>
-                  <a:srgbClr val="000000"/>
-                </a:solidFill>
-                <a:latin typeface="TT Commons Pro"/>
-              </a:rPr>
-              <a:t>Full audit trail via Splunk observability dashboard</a:t>
-            </a:r>
-          </a:p>
-          <a:p>
-            <a:pPr>
-              <a:spcAft>
-                <a:spcPts val="200"/>
-              </a:spcAft>
-            </a:pPr>
-            <a:r>
-              <a:rPr sz="1000" b="0">
-                <a:solidFill>
-                  <a:srgbClr val="000000"/>
-                </a:solidFill>
-                <a:latin typeface="TT Commons Pro"/>
-              </a:rPr>
-              <a:t>Zero data retention option available</a:t>
-            </a:r>
-          </a:p>
-          <a:p>
-            <a:pPr>
-              <a:spcAft>
-                <a:spcPts val="200"/>
-              </a:spcAft>
-            </a:pPr>
-            <a:r>
-              <a:rPr sz="1000" b="0">
-                <a:solidFill>
-                  <a:srgbClr val="000000"/>
-                </a:solidFill>
-                <a:latin typeface="TT Commons Pro"/>
-              </a:rPr>
-              <a:t>Distinct voice persona from user's actual voice</a:t>
-            </a:r>
-          </a:p>
-          <a:p>
-            <a:pPr>
-              <a:spcAft>
-                <a:spcPts val="200"/>
-              </a:spcAft>
-            </a:pPr>
-            <a:r>
-              <a:rPr sz="800" b="0">
+                <a:spcPts val="100"/>
+              </a:spcAft>
+            </a:pPr>
+            <a:r>
+              <a:rPr sz="900" b="0">
+                <a:solidFill>
+                  <a:srgbClr val="000000"/>
+                </a:solidFill>
+                <a:latin typeface="TT Commons Pro"/>
+              </a:rPr>
+              <a:t>All TTS labeled "Spoken by VIBE for [User]"</a:t>
+            </a:r>
+          </a:p>
+          <a:p>
+            <a:pPr>
+              <a:spcAft>
+                <a:spcPts val="100"/>
+              </a:spcAft>
+            </a:pPr>
+            <a:r>
+              <a:rPr sz="900" b="0">
+                <a:solidFill>
+                  <a:srgbClr val="000000"/>
+                </a:solidFill>
+                <a:latin typeface="TT Commons Pro"/>
+              </a:rPr>
+              <a:t>Full audit trail via Splunk</a:t>
+            </a:r>
+          </a:p>
+          <a:p>
+            <a:pPr>
+              <a:spcAft>
+                <a:spcPts val="100"/>
+              </a:spcAft>
+            </a:pPr>
+            <a:r>
+              <a:rPr sz="900" b="0">
+                <a:solidFill>
+                  <a:srgbClr val="000000"/>
+                </a:solidFill>
+                <a:latin typeface="TT Commons Pro"/>
+              </a:rPr>
+              <a:t>Zero data retention option</a:t>
+            </a:r>
+          </a:p>
+          <a:p>
+            <a:pPr>
+              <a:spcAft>
+                <a:spcPts val="100"/>
+              </a:spcAft>
+            </a:pPr>
+            <a:r>
+              <a:rPr sz="900" b="0">
+                <a:solidFill>
+                  <a:srgbClr val="000000"/>
+                </a:solidFill>
+                <a:latin typeface="TT Commons Pro"/>
+              </a:rPr>
+              <a:t>VIBE never impersonates user's voice</a:t>
+            </a:r>
+          </a:p>
+          <a:p>
+            <a:pPr>
+              <a:spcAft>
+                <a:spcPts val="100"/>
+              </a:spcAft>
+            </a:pPr>
+            <a:r>
+              <a:rPr sz="600" b="0">
                 <a:solidFill>
                   <a:srgbClr val="000000"/>
                 </a:solidFill>
@@ -20647,11 +20132,11 @@
           <a:p>
             <a:pPr>
               <a:spcAft>
-                <a:spcPts val="200"/>
-              </a:spcAft>
-            </a:pPr>
-            <a:r>
-              <a:rPr sz="1400" b="1">
+                <a:spcPts val="100"/>
+              </a:spcAft>
+            </a:pPr>
+            <a:r>
+              <a:rPr sz="1300" b="1">
                 <a:solidFill>
                   <a:srgbClr val="049FD9"/>
                 </a:solidFill>
@@ -20663,11 +20148,11 @@
           <a:p>
             <a:pPr>
               <a:spcAft>
-                <a:spcPts val="200"/>
-              </a:spcAft>
-            </a:pPr>
-            <a:r>
-              <a:rPr sz="400" b="0">
+                <a:spcPts val="100"/>
+              </a:spcAft>
+            </a:pPr>
+            <a:r>
+              <a:rPr sz="200" b="0">
                 <a:solidFill>
                   <a:srgbClr val="000000"/>
                 </a:solidFill>
@@ -20679,97 +20164,97 @@
           <a:p>
             <a:pPr>
               <a:spcAft>
-                <a:spcPts val="200"/>
-              </a:spcAft>
-            </a:pPr>
-            <a:r>
-              <a:rPr sz="1000" b="0">
-                <a:solidFill>
-                  <a:srgbClr val="000000"/>
-                </a:solidFill>
-                <a:latin typeface="TT Commons Pro"/>
-              </a:rPr>
-              <a:t>Noise reduction: 95%+ across 150+ types</a:t>
-            </a:r>
-          </a:p>
-          <a:p>
-            <a:pPr>
-              <a:spcAft>
-                <a:spcPts val="200"/>
-              </a:spcAft>
-            </a:pPr>
-            <a:r>
-              <a:rPr sz="1000" b="0">
-                <a:solidFill>
-                  <a:srgbClr val="000000"/>
-                </a:solidFill>
-                <a:latin typeface="TT Commons Pro"/>
-              </a:rPr>
-              <a:t>ASR accuracy: 98% real-time transcription</a:t>
-            </a:r>
-          </a:p>
-          <a:p>
-            <a:pPr>
-              <a:spcAft>
-                <a:spcPts val="200"/>
-              </a:spcAft>
-            </a:pPr>
-            <a:r>
-              <a:rPr sz="1000" b="0">
-                <a:solidFill>
-                  <a:srgbClr val="000000"/>
-                </a:solidFill>
-                <a:latin typeface="TT Commons Pro"/>
-              </a:rPr>
-              <a:t>Translation latency: &lt; 1 second end-to-end</a:t>
-            </a:r>
-          </a:p>
-          <a:p>
-            <a:pPr>
-              <a:spcAft>
-                <a:spcPts val="200"/>
-              </a:spcAft>
-            </a:pPr>
-            <a:r>
-              <a:rPr sz="1000" b="0">
-                <a:solidFill>
-                  <a:srgbClr val="000000"/>
-                </a:solidFill>
-                <a:latin typeface="TT Commons Pro"/>
-              </a:rPr>
-              <a:t>TTS naturalness: 4.5 / 5 user rating</a:t>
-            </a:r>
-          </a:p>
-          <a:p>
-            <a:pPr>
-              <a:spcAft>
-                <a:spcPts val="200"/>
-              </a:spcAft>
-            </a:pPr>
-            <a:r>
-              <a:rPr sz="1000" b="0">
-                <a:solidFill>
-                  <a:srgbClr val="000000"/>
-                </a:solidFill>
-                <a:latin typeface="TT Commons Pro"/>
-              </a:rPr>
-              <a:t>Type-to-speak: &lt; 2 seconds from send to spoken</a:t>
-            </a:r>
-          </a:p>
-          <a:p>
-            <a:pPr>
-              <a:spcAft>
-                <a:spcPts val="200"/>
-              </a:spcAft>
-            </a:pPr>
-            <a:r>
-              <a:rPr sz="1000" b="0">
-                <a:solidFill>
-                  <a:srgbClr val="000000"/>
-                </a:solidFill>
-                <a:latin typeface="TT Commons Pro"/>
-              </a:rPr>
-              <a:t>+40% non-native speaker participation increase</a:t>
+                <a:spcPts val="100"/>
+              </a:spcAft>
+            </a:pPr>
+            <a:r>
+              <a:rPr sz="900" b="0">
+                <a:solidFill>
+                  <a:srgbClr val="000000"/>
+                </a:solidFill>
+                <a:latin typeface="TT Commons Pro"/>
+              </a:rPr>
+              <a:t>95%+ noise reduction</a:t>
+            </a:r>
+          </a:p>
+          <a:p>
+            <a:pPr>
+              <a:spcAft>
+                <a:spcPts val="100"/>
+              </a:spcAft>
+            </a:pPr>
+            <a:r>
+              <a:rPr sz="900" b="0">
+                <a:solidFill>
+                  <a:srgbClr val="000000"/>
+                </a:solidFill>
+                <a:latin typeface="TT Commons Pro"/>
+              </a:rPr>
+              <a:t>98% ASR accuracy</a:t>
+            </a:r>
+          </a:p>
+          <a:p>
+            <a:pPr>
+              <a:spcAft>
+                <a:spcPts val="100"/>
+              </a:spcAft>
+            </a:pPr>
+            <a:r>
+              <a:rPr sz="900" b="0">
+                <a:solidFill>
+                  <a:srgbClr val="000000"/>
+                </a:solidFill>
+                <a:latin typeface="TT Commons Pro"/>
+              </a:rPr>
+              <a:t>&lt;1s translation latency</a:t>
+            </a:r>
+          </a:p>
+          <a:p>
+            <a:pPr>
+              <a:spcAft>
+                <a:spcPts val="100"/>
+              </a:spcAft>
+            </a:pPr>
+            <a:r>
+              <a:rPr sz="900" b="0">
+                <a:solidFill>
+                  <a:srgbClr val="000000"/>
+                </a:solidFill>
+                <a:latin typeface="TT Commons Pro"/>
+              </a:rPr>
+              <a:t>4.5/5 TTS naturalness</a:t>
+            </a:r>
+          </a:p>
+          <a:p>
+            <a:pPr>
+              <a:spcAft>
+                <a:spcPts val="100"/>
+              </a:spcAft>
+            </a:pPr>
+            <a:r>
+              <a:rPr sz="900" b="0">
+                <a:solidFill>
+                  <a:srgbClr val="000000"/>
+                </a:solidFill>
+                <a:latin typeface="TT Commons Pro"/>
+              </a:rPr>
+              <a:t>&lt;2s type-to-speak delivery</a:t>
+            </a:r>
+          </a:p>
+          <a:p>
+            <a:pPr>
+              <a:spcAft>
+                <a:spcPts val="100"/>
+              </a:spcAft>
+            </a:pPr>
+            <a:r>
+              <a:rPr sz="900" b="0">
+                <a:solidFill>
+                  <a:srgbClr val="000000"/>
+                </a:solidFill>
+                <a:latin typeface="TT Commons Pro"/>
+              </a:rPr>
+              <a:t>+40% non-native participation</a:t>
             </a:r>
           </a:p>
         </p:txBody>
@@ -21127,7 +20612,7 @@
         <p:spPr>
           <a:xfrm>
             <a:off x="1097280" y="1645920"/>
-            <a:ext cx="7772400" cy="7498079"/>
+            <a:ext cx="7498079" cy="7315200"/>
           </a:xfrm>
           <a:prstGeom prst="rect">
             <a:avLst/>
@@ -21142,23 +20627,55 @@
           <a:p>
             <a:pPr>
               <a:spcAft>
-                <a:spcPts val="200"/>
-              </a:spcAft>
-            </a:pPr>
-            <a:r>
-              <a:rPr sz="1400" b="1">
+                <a:spcPts val="100"/>
+              </a:spcAft>
+            </a:pPr>
+            <a:r>
+              <a:rPr sz="1300" b="1">
                 <a:solidFill>
                   <a:srgbClr val="049FD9"/>
                 </a:solidFill>
                 <a:latin typeface="TT Commons Pro"/>
               </a:rPr>
-              <a:t>Problem: Weaker Developer Ecosystem</a:t>
-            </a:r>
-          </a:p>
-          <a:p>
-            <a:pPr>
-              <a:spcAft>
-                <a:spcPts val="200"/>
+              <a:t>Problem</a:t>
+            </a:r>
+          </a:p>
+          <a:p>
+            <a:pPr>
+              <a:spcAft>
+                <a:spcPts val="100"/>
+              </a:spcAft>
+            </a:pPr>
+            <a:r>
+              <a:rPr sz="900" b="0">
+                <a:solidFill>
+                  <a:srgbClr val="000000"/>
+                </a:solidFill>
+                <a:latin typeface="TT Commons Pro"/>
+              </a:rPr>
+              <a:t>Teams: 2,000+ apps. Zoom: 2,500+.</a:t>
+            </a:r>
+          </a:p>
+          <a:p>
+            <a:pPr>
+              <a:spcAft>
+                <a:spcPts val="100"/>
+              </a:spcAft>
+            </a:pPr>
+            <a:r>
+              <a:rPr sz="900" b="0">
+                <a:solidFill>
+                  <a:srgbClr val="000000"/>
+                </a:solidFill>
+                <a:latin typeface="TT Commons Pro"/>
+              </a:rPr>
+              <a:t>No AI agent marketplace exists anywhere.</a:t>
+            </a:r>
+          </a:p>
+          <a:p>
+            <a:pPr>
+              <a:spcAft>
+                <a:spcPts val="100"/>
               </a:spcAft>
             </a:pPr>
             <a:r>
@@ -21174,43 +20691,27 @@
           <a:p>
             <a:pPr>
               <a:spcAft>
-                <a:spcPts val="200"/>
-              </a:spcAft>
-            </a:pPr>
-            <a:r>
-              <a:rPr sz="1000" b="0">
-                <a:solidFill>
-                  <a:srgbClr val="000000"/>
-                </a:solidFill>
-                <a:latin typeface="TT Commons Pro"/>
-              </a:rPr>
-              <a:t>Teams: 2,000+ integrations. Zoom: 2,500+. No platform has</a:t>
-            </a:r>
-          </a:p>
-          <a:p>
-            <a:pPr>
-              <a:spcAft>
-                <a:spcPts val="200"/>
-              </a:spcAft>
-            </a:pPr>
-            <a:r>
-              <a:rPr sz="1000" b="0">
-                <a:solidFill>
-                  <a:srgbClr val="000000"/>
-                </a:solidFill>
-                <a:latin typeface="TT Commons Pro"/>
-              </a:rPr>
-              <a:t>launched an enterprise-grade AI agent marketplace.</a:t>
-            </a:r>
-          </a:p>
-          <a:p>
-            <a:pPr>
-              <a:spcAft>
-                <a:spcPts val="200"/>
-              </a:spcAft>
-            </a:pPr>
-            <a:r>
-              <a:rPr sz="600" b="0">
+                <a:spcPts val="100"/>
+              </a:spcAft>
+            </a:pPr>
+            <a:r>
+              <a:rPr sz="1300" b="1">
+                <a:solidFill>
+                  <a:srgbClr val="049FD9"/>
+                </a:solidFill>
+                <a:latin typeface="TT Commons Pro"/>
+              </a:rPr>
+              <a:t>Four-Stage Lifecycle</a:t>
+            </a:r>
+          </a:p>
+          <a:p>
+            <a:pPr>
+              <a:spcAft>
+                <a:spcPts val="100"/>
+              </a:spcAft>
+            </a:pPr>
+            <a:r>
+              <a:rPr sz="200" b="0">
                 <a:solidFill>
                   <a:srgbClr val="000000"/>
                 </a:solidFill>
@@ -21222,27 +20723,43 @@
           <a:p>
             <a:pPr>
               <a:spcAft>
-                <a:spcPts val="200"/>
-              </a:spcAft>
-            </a:pPr>
-            <a:r>
-              <a:rPr sz="1300" b="1">
-                <a:solidFill>
-                  <a:srgbClr val="049FD9"/>
-                </a:solidFill>
-                <a:latin typeface="TT Commons Pro"/>
-              </a:rPr>
-              <a:t>Four-Stage Lifecycle</a:t>
-            </a:r>
-          </a:p>
-          <a:p>
-            <a:pPr>
-              <a:spcAft>
-                <a:spcPts val="200"/>
-              </a:spcAft>
-            </a:pPr>
-            <a:r>
-              <a:rPr sz="300" b="0">
+                <a:spcPts val="100"/>
+              </a:spcAft>
+            </a:pPr>
+            <a:r>
+              <a:rPr sz="1000" b="1">
+                <a:solidFill>
+                  <a:srgbClr val="204F69"/>
+                </a:solidFill>
+                <a:latin typeface="TT Commons Pro"/>
+              </a:rPr>
+              <a:t>BUILD</a:t>
+            </a:r>
+          </a:p>
+          <a:p>
+            <a:pPr>
+              <a:spcAft>
+                <a:spcPts val="100"/>
+              </a:spcAft>
+            </a:pPr>
+            <a:r>
+              <a:rPr sz="900" b="0">
+                <a:solidFill>
+                  <a:srgbClr val="000000"/>
+                </a:solidFill>
+                <a:latin typeface="TT Commons Pro"/>
+              </a:rPr>
+              <a:t>Python/JS SDK, agent templates, sandbox testing</a:t>
+            </a:r>
+          </a:p>
+          <a:p>
+            <a:pPr>
+              <a:spcAft>
+                <a:spcPts val="100"/>
+              </a:spcAft>
+            </a:pPr>
+            <a:r>
+              <a:rPr sz="200" b="0">
                 <a:solidFill>
                   <a:srgbClr val="000000"/>
                 </a:solidFill>
@@ -21254,7 +20771,7 @@
           <a:p>
             <a:pPr>
               <a:spcAft>
-                <a:spcPts val="200"/>
+                <a:spcPts val="100"/>
               </a:spcAft>
             </a:pPr>
             <a:r>
@@ -21264,33 +20781,33 @@
                 </a:solidFill>
                 <a:latin typeface="TT Commons Pro"/>
               </a:rPr>
-              <a:t>BUILD - Python/JS SDK with agent templates:</a:t>
-            </a:r>
-          </a:p>
-          <a:p>
-            <a:pPr>
-              <a:spcAft>
-                <a:spcPts val="200"/>
-              </a:spcAft>
-            </a:pPr>
-            <a:r>
-              <a:rPr sz="1000" b="0">
-                <a:solidFill>
-                  <a:srgbClr val="000000"/>
-                </a:solidFill>
-                <a:latin typeface="TT Commons Pro"/>
-              </a:rPr>
-              <a:t>CRM Updater, Ticket Creator, Doc Generator. Sandbox testing.</a:t>
-            </a:r>
-          </a:p>
-          <a:p>
-            <a:pPr>
-              <a:spcAft>
-                <a:spcPts val="200"/>
-              </a:spcAft>
-            </a:pPr>
-            <a:r>
-              <a:rPr sz="300" b="0">
+              <a:t>CERTIFY</a:t>
+            </a:r>
+          </a:p>
+          <a:p>
+            <a:pPr>
+              <a:spcAft>
+                <a:spcPts val="100"/>
+              </a:spcAft>
+            </a:pPr>
+            <a:r>
+              <a:rPr sz="900" b="0">
+                <a:solidFill>
+                  <a:srgbClr val="000000"/>
+                </a:solidFill>
+                <a:latin typeface="TT Commons Pro"/>
+              </a:rPr>
+              <a:t>Cisco security: code analysis, SOC2/HIPAA/FedRAMP</a:t>
+            </a:r>
+          </a:p>
+          <a:p>
+            <a:pPr>
+              <a:spcAft>
+                <a:spcPts val="100"/>
+              </a:spcAft>
+            </a:pPr>
+            <a:r>
+              <a:rPr sz="200" b="0">
                 <a:solidFill>
                   <a:srgbClr val="000000"/>
                 </a:solidFill>
@@ -21302,7 +20819,7 @@
           <a:p>
             <a:pPr>
               <a:spcAft>
-                <a:spcPts val="200"/>
+                <a:spcPts val="100"/>
               </a:spcAft>
             </a:pPr>
             <a:r>
@@ -21312,49 +20829,33 @@
                 </a:solidFill>
                 <a:latin typeface="TT Commons Pro"/>
               </a:rPr>
-              <a:t>CERTIFY - Cisco security pipeline: static code analysis,</a:t>
-            </a:r>
-          </a:p>
-          <a:p>
-            <a:pPr>
-              <a:spcAft>
-                <a:spcPts val="200"/>
-              </a:spcAft>
-            </a:pPr>
-            <a:r>
-              <a:rPr sz="1000" b="0">
-                <a:solidFill>
-                  <a:srgbClr val="000000"/>
-                </a:solidFill>
-                <a:latin typeface="TT Commons Pro"/>
-              </a:rPr>
-              <a:t>permission validation, SOC 2/HIPAA/FedRAMP/GDPR checks.</a:t>
-            </a:r>
-          </a:p>
-          <a:p>
-            <a:pPr>
-              <a:spcAft>
-                <a:spcPts val="200"/>
-              </a:spcAft>
-            </a:pPr>
-            <a:r>
-              <a:rPr sz="1000" b="0">
-                <a:solidFill>
-                  <a:srgbClr val="000000"/>
-                </a:solidFill>
-                <a:latin typeface="TT Commons Pro"/>
-              </a:rPr>
-              <a:t>Cisco Verified Agent trust badge for certified agents.</a:t>
-            </a:r>
-          </a:p>
-          <a:p>
-            <a:pPr>
-              <a:spcAft>
-                <a:spcPts val="200"/>
-              </a:spcAft>
-            </a:pPr>
-            <a:r>
-              <a:rPr sz="300" b="0">
+              <a:t>DEPLOY</a:t>
+            </a:r>
+          </a:p>
+          <a:p>
+            <a:pPr>
+              <a:spcAft>
+                <a:spcPts val="100"/>
+              </a:spcAft>
+            </a:pPr>
+            <a:r>
+              <a:rPr sz="900" b="0">
+                <a:solidFill>
+                  <a:srgbClr val="000000"/>
+                </a:solidFill>
+                <a:latin typeface="TT Commons Pro"/>
+              </a:rPr>
+              <a:t>Browse by industry, configure permissions, pilot</a:t>
+            </a:r>
+          </a:p>
+          <a:p>
+            <a:pPr>
+              <a:spcAft>
+                <a:spcPts val="100"/>
+              </a:spcAft>
+            </a:pPr>
+            <a:r>
+              <a:rPr sz="200" b="0">
                 <a:solidFill>
                   <a:srgbClr val="000000"/>
                 </a:solidFill>
@@ -21366,7 +20867,7 @@
           <a:p>
             <a:pPr>
               <a:spcAft>
-                <a:spcPts val="200"/>
+                <a:spcPts val="100"/>
               </a:spcAft>
             </a:pPr>
             <a:r>
@@ -21376,71 +20877,23 @@
                 </a:solidFill>
                 <a:latin typeface="TT Commons Pro"/>
               </a:rPr>
-              <a:t>DEPLOY - Enterprise admins browse by industry vertical,</a:t>
-            </a:r>
-          </a:p>
-          <a:p>
-            <a:pPr>
-              <a:spcAft>
-                <a:spcPts val="200"/>
-              </a:spcAft>
-            </a:pPr>
-            <a:r>
-              <a:rPr sz="1000" b="0">
-                <a:solidFill>
-                  <a:srgbClr val="000000"/>
-                </a:solidFill>
-                <a:latin typeface="TT Commons Pro"/>
-              </a:rPr>
-              <a:t>configure permissions, set approval workflows, pilot rollout.</a:t>
-            </a:r>
-          </a:p>
-          <a:p>
-            <a:pPr>
-              <a:spcAft>
-                <a:spcPts val="200"/>
-              </a:spcAft>
-            </a:pPr>
-            <a:r>
-              <a:rPr sz="300" b="0">
-                <a:solidFill>
-                  <a:srgbClr val="000000"/>
-                </a:solidFill>
-                <a:latin typeface="TT Commons Pro"/>
-              </a:rPr>
-              <a:t/>
-            </a:r>
-          </a:p>
-          <a:p>
-            <a:pPr>
-              <a:spcAft>
-                <a:spcPts val="200"/>
-              </a:spcAft>
-            </a:pPr>
-            <a:r>
-              <a:rPr sz="1000" b="1">
-                <a:solidFill>
-                  <a:srgbClr val="204F69"/>
-                </a:solidFill>
-                <a:latin typeface="TT Commons Pro"/>
-              </a:rPr>
-              <a:t>MONITOR - Splunk-powered dashboards, ML anomaly</a:t>
-            </a:r>
-          </a:p>
-          <a:p>
-            <a:pPr>
-              <a:spcAft>
-                <a:spcPts val="200"/>
-              </a:spcAft>
-            </a:pPr>
-            <a:r>
-              <a:rPr sz="1000" b="0">
-                <a:solidFill>
-                  <a:srgbClr val="000000"/>
-                </a:solidFill>
-                <a:latin typeface="TT Commons Pro"/>
-              </a:rPr>
-              <a:t>detection, instant kill-switch, full audit trail retained.</a:t>
+              <a:t>MONITOR</a:t>
+            </a:r>
+          </a:p>
+          <a:p>
+            <a:pPr>
+              <a:spcAft>
+                <a:spcPts val="100"/>
+              </a:spcAft>
+            </a:pPr>
+            <a:r>
+              <a:rPr sz="900" b="0">
+                <a:solidFill>
+                  <a:srgbClr val="000000"/>
+                </a:solidFill>
+                <a:latin typeface="TT Commons Pro"/>
+              </a:rPr>
+              <a:t>Splunk dashboards, anomaly detection, kill-switch</a:t>
             </a:r>
           </a:p>
         </p:txBody>
@@ -21453,8 +20906,8 @@
         </p:nvSpPr>
         <p:spPr>
           <a:xfrm>
-            <a:off x="9875520" y="1645920"/>
-            <a:ext cx="7498079" cy="7498079"/>
+            <a:off x="9601200" y="1645920"/>
+            <a:ext cx="7498079" cy="7315200"/>
           </a:xfrm>
           <a:prstGeom prst="rect">
             <a:avLst/>
@@ -21469,11 +20922,11 @@
           <a:p>
             <a:pPr>
               <a:spcAft>
-                <a:spcPts val="200"/>
-              </a:spcAft>
-            </a:pPr>
-            <a:r>
-              <a:rPr sz="1400" b="1">
+                <a:spcPts val="100"/>
+              </a:spcAft>
+            </a:pPr>
+            <a:r>
+              <a:rPr sz="1300" b="1">
                 <a:solidFill>
                   <a:srgbClr val="049FD9"/>
                 </a:solidFill>
@@ -21485,11 +20938,11 @@
           <a:p>
             <a:pPr>
               <a:spcAft>
-                <a:spcPts val="200"/>
-              </a:spcAft>
-            </a:pPr>
-            <a:r>
-              <a:rPr sz="400" b="0">
+                <a:spcPts val="100"/>
+              </a:spcAft>
+            </a:pPr>
+            <a:r>
+              <a:rPr sz="200" b="0">
                 <a:solidFill>
                   <a:srgbClr val="000000"/>
                 </a:solidFill>
@@ -21501,55 +20954,55 @@
           <a:p>
             <a:pPr>
               <a:spcAft>
-                <a:spcPts val="200"/>
-              </a:spcAft>
-            </a:pPr>
-            <a:r>
-              <a:rPr sz="1000" b="0">
-                <a:solidFill>
-                  <a:srgbClr val="000000"/>
-                </a:solidFill>
-                <a:latin typeface="TT Commons Pro"/>
-              </a:rPr>
-              <a:t>Developer: Build + test + submit for certification</a:t>
-            </a:r>
-          </a:p>
-          <a:p>
-            <a:pPr>
-              <a:spcAft>
-                <a:spcPts val="200"/>
-              </a:spcAft>
-            </a:pPr>
-            <a:r>
-              <a:rPr sz="1000" b="0">
-                <a:solidFill>
-                  <a:srgbClr val="000000"/>
-                </a:solidFill>
-                <a:latin typeface="TT Commons Pro"/>
-              </a:rPr>
-              <a:t>Admin: Browse + deploy + monitor + kill-switch</a:t>
-            </a:r>
-          </a:p>
-          <a:p>
-            <a:pPr>
-              <a:spcAft>
-                <a:spcPts val="200"/>
-              </a:spcAft>
-            </a:pPr>
-            <a:r>
-              <a:rPr sz="1000" b="0">
-                <a:solidFill>
-                  <a:srgbClr val="000000"/>
-                </a:solidFill>
-                <a:latin typeface="TT Commons Pro"/>
-              </a:rPr>
-              <a:t>User: Discover + install + approve actions in-meeting</a:t>
-            </a:r>
-          </a:p>
-          <a:p>
-            <a:pPr>
-              <a:spcAft>
-                <a:spcPts val="200"/>
+                <a:spcPts val="100"/>
+              </a:spcAft>
+            </a:pPr>
+            <a:r>
+              <a:rPr sz="900" b="0">
+                <a:solidFill>
+                  <a:srgbClr val="000000"/>
+                </a:solidFill>
+                <a:latin typeface="TT Commons Pro"/>
+              </a:rPr>
+              <a:t>Developer: Build + test + submit</a:t>
+            </a:r>
+          </a:p>
+          <a:p>
+            <a:pPr>
+              <a:spcAft>
+                <a:spcPts val="100"/>
+              </a:spcAft>
+            </a:pPr>
+            <a:r>
+              <a:rPr sz="900" b="0">
+                <a:solidFill>
+                  <a:srgbClr val="000000"/>
+                </a:solidFill>
+                <a:latin typeface="TT Commons Pro"/>
+              </a:rPr>
+              <a:t>Admin: Browse + deploy + monitor</a:t>
+            </a:r>
+          </a:p>
+          <a:p>
+            <a:pPr>
+              <a:spcAft>
+                <a:spcPts val="100"/>
+              </a:spcAft>
+            </a:pPr>
+            <a:r>
+              <a:rPr sz="900" b="0">
+                <a:solidFill>
+                  <a:srgbClr val="000000"/>
+                </a:solidFill>
+                <a:latin typeface="TT Commons Pro"/>
+              </a:rPr>
+              <a:t>User: Discover + install + approve</a:t>
+            </a:r>
+          </a:p>
+          <a:p>
+            <a:pPr>
+              <a:spcAft>
+                <a:spcPts val="100"/>
               </a:spcAft>
             </a:pPr>
             <a:r>
@@ -21565,27 +21018,27 @@
           <a:p>
             <a:pPr>
               <a:spcAft>
-                <a:spcPts val="200"/>
-              </a:spcAft>
-            </a:pPr>
-            <a:r>
-              <a:rPr sz="1400" b="1">
+                <a:spcPts val="100"/>
+              </a:spcAft>
+            </a:pPr>
+            <a:r>
+              <a:rPr sz="1300" b="1">
                 <a:solidFill>
                   <a:srgbClr val="049FD9"/>
                 </a:solidFill>
                 <a:latin typeface="TT Commons Pro"/>
               </a:rPr>
-              <a:t>Why This Wins</a:t>
-            </a:r>
-          </a:p>
-          <a:p>
-            <a:pPr>
-              <a:spcAft>
-                <a:spcPts val="200"/>
-              </a:spcAft>
-            </a:pPr>
-            <a:r>
-              <a:rPr sz="300" b="0">
+              <a:t>Projected Impact</a:t>
+            </a:r>
+          </a:p>
+          <a:p>
+            <a:pPr>
+              <a:spcAft>
+                <a:spcPts val="100"/>
+              </a:spcAft>
+            </a:pPr>
+            <a:r>
+              <a:rPr sz="200" b="0">
                 <a:solidFill>
                   <a:srgbClr val="000000"/>
                 </a:solidFill>
@@ -21597,123 +21050,27 @@
           <a:p>
             <a:pPr>
               <a:spcAft>
-                <a:spcPts val="200"/>
-              </a:spcAft>
-            </a:pPr>
-            <a:r>
-              <a:rPr sz="1000" b="0">
-                <a:solidFill>
-                  <a:srgbClr val="000000"/>
-                </a:solidFill>
-                <a:latin typeface="TT Commons Pro"/>
-              </a:rPr>
-              <a:t>Trust-first AI with Cisco security + Splunk governance</a:t>
-            </a:r>
-          </a:p>
-          <a:p>
-            <a:pPr>
-              <a:spcAft>
-                <a:spcPts val="200"/>
-              </a:spcAft>
-            </a:pPr>
-            <a:r>
-              <a:rPr sz="1000" b="0">
-                <a:solidFill>
-                  <a:srgbClr val="000000"/>
-                </a:solidFill>
-                <a:latin typeface="TT Commons Pro"/>
-              </a:rPr>
-              <a:t>Competes on "safest AI agent ecosystem" not just count</a:t>
-            </a:r>
-          </a:p>
-          <a:p>
-            <a:pPr>
-              <a:spcAft>
-                <a:spcPts val="200"/>
-              </a:spcAft>
-            </a:pPr>
-            <a:r>
-              <a:rPr sz="1000" b="0">
-                <a:solidFill>
-                  <a:srgbClr val="000000"/>
-                </a:solidFill>
-                <a:latin typeface="TT Commons Pro"/>
-              </a:rPr>
-              <a:t>Per-seat + per-agent monetization flywheel</a:t>
-            </a:r>
-          </a:p>
-          <a:p>
-            <a:pPr>
-              <a:spcAft>
-                <a:spcPts val="200"/>
-              </a:spcAft>
-            </a:pPr>
-            <a:r>
-              <a:rPr sz="600" b="0">
-                <a:solidFill>
-                  <a:srgbClr val="000000"/>
-                </a:solidFill>
-                <a:latin typeface="TT Commons Pro"/>
-              </a:rPr>
-              <a:t/>
-            </a:r>
-          </a:p>
-          <a:p>
-            <a:pPr>
-              <a:spcAft>
-                <a:spcPts val="200"/>
-              </a:spcAft>
-            </a:pPr>
-            <a:r>
-              <a:rPr sz="1400" b="1">
-                <a:solidFill>
-                  <a:srgbClr val="049FD9"/>
-                </a:solidFill>
-                <a:latin typeface="TT Commons Pro"/>
-              </a:rPr>
-              <a:t>Projected Impact</a:t>
-            </a:r>
-          </a:p>
-          <a:p>
-            <a:pPr>
-              <a:spcAft>
-                <a:spcPts val="200"/>
-              </a:spcAft>
-            </a:pPr>
-            <a:r>
-              <a:rPr sz="300" b="0">
-                <a:solidFill>
-                  <a:srgbClr val="000000"/>
-                </a:solidFill>
-                <a:latin typeface="TT Commons Pro"/>
-              </a:rPr>
-              <a:t/>
-            </a:r>
-          </a:p>
-          <a:p>
-            <a:pPr>
-              <a:spcAft>
-                <a:spcPts val="200"/>
-              </a:spcAft>
-            </a:pPr>
-            <a:r>
-              <a:rPr sz="1000" b="0">
-                <a:solidFill>
-                  <a:srgbClr val="000000"/>
-                </a:solidFill>
-                <a:latin typeface="TT Commons Pro"/>
-              </a:rPr>
-              <a:t>500+ certified agents in Year 1</a:t>
-            </a:r>
-          </a:p>
-          <a:p>
-            <a:pPr>
-              <a:spcAft>
-                <a:spcPts val="200"/>
-              </a:spcAft>
-            </a:pPr>
-            <a:r>
-              <a:rPr sz="1000" b="0">
+                <a:spcPts val="100"/>
+              </a:spcAft>
+            </a:pPr>
+            <a:r>
+              <a:rPr sz="900" b="0">
+                <a:solidFill>
+                  <a:srgbClr val="000000"/>
+                </a:solidFill>
+                <a:latin typeface="TT Commons Pro"/>
+              </a:rPr>
+              <a:t>500+ certified agents Year 1</a:t>
+            </a:r>
+          </a:p>
+          <a:p>
+            <a:pPr>
+              <a:spcAft>
+                <a:spcPts val="100"/>
+              </a:spcAft>
+            </a:pPr>
+            <a:r>
+              <a:rPr sz="900" b="0">
                 <a:solidFill>
                   <a:srgbClr val="000000"/>
                 </a:solidFill>
@@ -21725,27 +21082,27 @@
           <a:p>
             <a:pPr>
               <a:spcAft>
-                <a:spcPts val="200"/>
-              </a:spcAft>
-            </a:pPr>
-            <a:r>
-              <a:rPr sz="1000" b="0">
-                <a:solidFill>
-                  <a:srgbClr val="000000"/>
-                </a:solidFill>
-                <a:latin typeface="TT Commons Pro"/>
-              </a:rPr>
-              <a:t>3x developer ecosystem growth in 18 months</a:t>
-            </a:r>
-          </a:p>
-          <a:p>
-            <a:pPr>
-              <a:spcAft>
-                <a:spcPts val="200"/>
-              </a:spcAft>
-            </a:pPr>
-            <a:r>
-              <a:rPr sz="1000" b="0">
+                <a:spcPts val="100"/>
+              </a:spcAft>
+            </a:pPr>
+            <a:r>
+              <a:rPr sz="900" b="0">
+                <a:solidFill>
+                  <a:srgbClr val="000000"/>
+                </a:solidFill>
+                <a:latin typeface="TT Commons Pro"/>
+              </a:rPr>
+              <a:t>3x developer growth in 18 months</a:t>
+            </a:r>
+          </a:p>
+          <a:p>
+            <a:pPr>
+              <a:spcAft>
+                <a:spcPts val="100"/>
+              </a:spcAft>
+            </a:pPr>
+            <a:r>
+              <a:rPr sz="900" b="0">
                 <a:solidFill>
                   <a:srgbClr val="000000"/>
                 </a:solidFill>
@@ -21757,17 +21114,33 @@
           <a:p>
             <a:pPr>
               <a:spcAft>
-                <a:spcPts val="200"/>
-              </a:spcAft>
-            </a:pPr>
-            <a:r>
-              <a:rPr sz="1000" b="0">
-                <a:solidFill>
-                  <a:srgbClr val="000000"/>
-                </a:solidFill>
-                <a:latin typeface="TT Commons Pro"/>
-              </a:rPr>
-              <a:t>$50M annual marketplace commission by FY2029</a:t>
+                <a:spcPts val="100"/>
+              </a:spcAft>
+            </a:pPr>
+            <a:r>
+              <a:rPr sz="900" b="0">
+                <a:solidFill>
+                  <a:srgbClr val="000000"/>
+                </a:solidFill>
+                <a:latin typeface="TT Commons Pro"/>
+              </a:rPr>
+              <a:t>$50M annual commission by FY2029</a:t>
+            </a:r>
+          </a:p>
+          <a:p>
+            <a:pPr>
+              <a:spcAft>
+                <a:spcPts val="100"/>
+              </a:spcAft>
+            </a:pPr>
+            <a:r>
+              <a:rPr sz="900" b="0">
+                <a:solidFill>
+                  <a:srgbClr val="000000"/>
+                </a:solidFill>
+                <a:latin typeface="TT Commons Pro"/>
+              </a:rPr>
+              <a:t>70/30 developer-favoring revenue split</a:t>
             </a:r>
           </a:p>
         </p:txBody>
